--- a/Presentation.pptx
+++ b/Presentation.pptx
@@ -116,7 +116,7 @@
   <p:extLst>
     <p:ext uri="{521415D9-36F7-43E2-AB2F-B90AF26B5E84}">
       <p14:sectionLst xmlns:p14="http://schemas.microsoft.com/office/powerpoint/2010/main">
-        <p14:section name="Presentation" id="{ef46170f-05f3-2198-ebb9-680a9c5244fc}">
+        <p14:section name="Presentation" id="{7ccc21e6-e0ec-8f38-8191-e0095dd1da7d}">
           <p14:sldIdLst>
             <p14:sldId id="256"/>
             <p14:sldId id="257"/>
@@ -128,7 +128,7 @@
             <p14:sldId id="263"/>
           </p14:sldIdLst>
         </p14:section>
-        <p14:section name="Appendix" id="{a1d11ab2-0ef6-a90e-c393-fcc0477535a3}">
+        <p14:section name="Appendix" id="{6154ce8b-ce1f-0012-6ab7-6099dce4b4a4}">
           <p14:sldIdLst>
             <p14:sldId id="264"/>
             <p14:sldId id="265"/>
@@ -1542,7 +1542,7 @@
           <a:p>
             <a:r>
               <a:rPr lang="en-US" dirty="0"/>
-              <a:t>[0:55] This table compares every model I trained. Random Forest and XGBoost were taught in the module, so together with a Ridge baseline they are my comparison models. My new algorithm is CatBoost, which was not covered in the lectures. I chose it because the area column has 160 categories, many of them rare, and CatBoost encodes categories without leaking the target. It reached an R-squared of 0.866, tied for best, and it generalised best to areas it had never seen. Tuning with five-fold cross-validation clearly helped: about 0.83 with default settings, 0.86 tuned. The final model is a stacking ensemble of Random Forest, XGBoost and CatBoost, chosen because it had the lowest cross-validated error. It reaches a median error of about 12 percent.</a:t>
+              <a:t>[0:55] This table compares every model I trained. Ridge, Random Forest, XGBoost, LightGBM, CatBoost and stacking were all taught in the module. My new algorithm is NGBoost, which was not covered in the lectures. Every taught model predicts one number; NGBoost predicts a whole probability distribution of the price, using natural gradient boosting, so it can give a price range. After tuning with five-fold cross-validation it ranks third of eight, with an R-squared of 0.863, and its 80 percent ranges contain 82 percent of actual prices. Tuning helped every model: about 0.83 with default settings, 0.86 tuned. The final price model is the stacking ensemble, which had the lowest cross-validated error and a median error of about 12 percent.</a:t>
             </a:r>
             <a:endParaRPr lang="en-US" dirty="0"/>
           </a:p>
@@ -1806,7 +1806,7 @@
           <a:p>
             <a:r>
               <a:rPr lang="en-US" dirty="0"/>
-              <a:t>[0:45] Here is the deployed application. [Switch to the browser.] I choose an area and a size. Battaramulla, about 11 kilometres from Fort, comes out at about 2.6 million rupees per perch, in the high band; Kaduwela, further out, at about 460,000, in the low band. Under each price, the app explains it: for Battaramulla, its location roughly doubles the price compared with a typical plot. Behind it is a GitHub repository with 15 automated tests, a retraining pipeline with a quality gate, and automatic redeployment. [Switch back to the slides.]</a:t>
+              <a:t>[0:45] Here is the deployed application. [Switch to the browser.] I choose an area and a size. Battaramulla, about 11 kilometres from Fort, comes out at about 2.6 million rupees per perch, in the high band; Kaduwela, further out, at about 460,000, in the low band. Under each price, NGBoost gives a likely range, for Battaramulla about 1.5 to 4 million, and SHAP explains it: Battaramulla's location roughly doubles the price compared with a typical plot. Behind it is a GitHub repository with 17 automated tests, a retraining pipeline with a quality gate, and automatic redeployment. [Switch back to the slides.]</a:t>
             </a:r>
             <a:endParaRPr lang="en-US" dirty="0"/>
           </a:p>
@@ -3048,7 +3048,7 @@
                 <a:gridCol w="4846320"/>
                 <a:gridCol w="4389120"/>
               </a:tblGrid>
-              <a:tr h="777240">
+              <a:tr h="713232">
                 <a:tc>
                   <a:txBody>
                     <a:bodyPr/>
@@ -3233,7 +3233,7 @@
                   </a:tcPr>
                 </a:tc>
               </a:tr>
-              <a:tr h="777240">
+              <a:tr h="713232">
                 <a:tc>
                   <a:txBody>
                     <a:bodyPr/>
@@ -3409,7 +3409,7 @@
                   </a:tcPr>
                 </a:tc>
               </a:tr>
-              <a:tr h="777240">
+              <a:tr h="713232">
                 <a:tc>
                   <a:txBody>
                     <a:bodyPr/>
@@ -3585,7 +3585,7 @@
                   </a:tcPr>
                 </a:tc>
               </a:tr>
-              <a:tr h="777240">
+              <a:tr h="713232">
                 <a:tc>
                   <a:txBody>
                     <a:bodyPr/>
@@ -3761,7 +3761,7 @@
                   </a:tcPr>
                 </a:tc>
               </a:tr>
-              <a:tr h="777240">
+              <a:tr h="713232">
                 <a:tc>
                   <a:txBody>
                     <a:bodyPr/>
@@ -3893,6 +3893,182 @@
                           </a:solidFill>
                         </a:rPr>
                         <a:t>Native handling of the 160-area category</a:t>
+                      </a:r>
+                      <a:endParaRPr lang="en-US" sz="1400" dirty="0"/>
+                    </a:p>
+                  </a:txBody>
+                  <a:tcPr marL="91440" marR="91440" marT="45720" marB="45720" anchor="ctr">
+                    <a:lnL w="9525" cap="flat" cmpd="sng" algn="ctr">
+                      <a:solidFill>
+                        <a:srgbClr val="E2E6EB"/>
+                      </a:solidFill>
+                      <a:prstDash val="solid"/>
+                      <a:round/>
+                      <a:headEnd type="none" w="med" len="med"/>
+                      <a:tailEnd type="none" w="med" len="med"/>
+                    </a:lnL>
+                    <a:lnR w="9525" cap="flat" cmpd="sng" algn="ctr">
+                      <a:solidFill>
+                        <a:srgbClr val="E2E6EB"/>
+                      </a:solidFill>
+                      <a:prstDash val="solid"/>
+                      <a:round/>
+                      <a:headEnd type="none" w="med" len="med"/>
+                      <a:tailEnd type="none" w="med" len="med"/>
+                    </a:lnR>
+                    <a:lnT w="9525" cap="flat" cmpd="sng" algn="ctr">
+                      <a:solidFill>
+                        <a:srgbClr val="E2E6EB"/>
+                      </a:solidFill>
+                      <a:prstDash val="solid"/>
+                      <a:round/>
+                      <a:headEnd type="none" w="med" len="med"/>
+                      <a:tailEnd type="none" w="med" len="med"/>
+                    </a:lnT>
+                    <a:lnB w="9525" cap="flat" cmpd="sng" algn="ctr">
+                      <a:solidFill>
+                        <a:srgbClr val="E2E6EB"/>
+                      </a:solidFill>
+                      <a:prstDash val="solid"/>
+                      <a:round/>
+                      <a:headEnd type="none" w="med" len="med"/>
+                      <a:tailEnd type="none" w="med" len="med"/>
+                    </a:lnB>
+                  </a:tcPr>
+                </a:tc>
+              </a:tr>
+              <a:tr h="713232">
+                <a:tc>
+                  <a:txBody>
+                    <a:bodyPr/>
+                    <a:lstStyle/>
+                    <a:p>
+                      <a:pPr indent="0" marL="0">
+                        <a:buNone/>
+                      </a:pPr>
+                      <a:r>
+                        <a:rPr lang="en-US" sz="1400" dirty="0">
+                          <a:solidFill>
+                            <a:srgbClr val="1C2430"/>
+                          </a:solidFill>
+                        </a:rPr>
+                        <a:t>NGBoost ★</a:t>
+                      </a:r>
+                      <a:endParaRPr lang="en-US" sz="1400" dirty="0"/>
+                    </a:p>
+                  </a:txBody>
+                  <a:tcPr marL="91440" marR="91440" marT="45720" marB="45720" anchor="ctr">
+                    <a:lnL w="9525" cap="flat" cmpd="sng" algn="ctr">
+                      <a:solidFill>
+                        <a:srgbClr val="E2E6EB"/>
+                      </a:solidFill>
+                      <a:prstDash val="solid"/>
+                      <a:round/>
+                      <a:headEnd type="none" w="med" len="med"/>
+                      <a:tailEnd type="none" w="med" len="med"/>
+                    </a:lnL>
+                    <a:lnR w="9525" cap="flat" cmpd="sng" algn="ctr">
+                      <a:solidFill>
+                        <a:srgbClr val="E2E6EB"/>
+                      </a:solidFill>
+                      <a:prstDash val="solid"/>
+                      <a:round/>
+                      <a:headEnd type="none" w="med" len="med"/>
+                      <a:tailEnd type="none" w="med" len="med"/>
+                    </a:lnR>
+                    <a:lnT w="9525" cap="flat" cmpd="sng" algn="ctr">
+                      <a:solidFill>
+                        <a:srgbClr val="E2E6EB"/>
+                      </a:solidFill>
+                      <a:prstDash val="solid"/>
+                      <a:round/>
+                      <a:headEnd type="none" w="med" len="med"/>
+                      <a:tailEnd type="none" w="med" len="med"/>
+                    </a:lnT>
+                    <a:lnB w="9525" cap="flat" cmpd="sng" algn="ctr">
+                      <a:solidFill>
+                        <a:srgbClr val="E2E6EB"/>
+                      </a:solidFill>
+                      <a:prstDash val="solid"/>
+                      <a:round/>
+                      <a:headEnd type="none" w="med" len="med"/>
+                      <a:tailEnd type="none" w="med" len="med"/>
+                    </a:lnB>
+                  </a:tcPr>
+                </a:tc>
+                <a:tc>
+                  <a:txBody>
+                    <a:bodyPr/>
+                    <a:lstStyle/>
+                    <a:p>
+                      <a:pPr indent="0" marL="0">
+                        <a:buNone/>
+                      </a:pPr>
+                      <a:r>
+                        <a:rPr lang="en-US" sz="1400" dirty="0">
+                          <a:solidFill>
+                            <a:srgbClr val="1C2430"/>
+                          </a:solidFill>
+                        </a:rPr>
+                        <a:t>489 iterations, learning_rate 0.0076, base trees depth 5, min 15 per leaf</a:t>
+                      </a:r>
+                      <a:endParaRPr lang="en-US" sz="1400" dirty="0"/>
+                    </a:p>
+                  </a:txBody>
+                  <a:tcPr marL="91440" marR="91440" marT="45720" marB="45720" anchor="ctr">
+                    <a:lnL w="9525" cap="flat" cmpd="sng" algn="ctr">
+                      <a:solidFill>
+                        <a:srgbClr val="E2E6EB"/>
+                      </a:solidFill>
+                      <a:prstDash val="solid"/>
+                      <a:round/>
+                      <a:headEnd type="none" w="med" len="med"/>
+                      <a:tailEnd type="none" w="med" len="med"/>
+                    </a:lnL>
+                    <a:lnR w="9525" cap="flat" cmpd="sng" algn="ctr">
+                      <a:solidFill>
+                        <a:srgbClr val="E2E6EB"/>
+                      </a:solidFill>
+                      <a:prstDash val="solid"/>
+                      <a:round/>
+                      <a:headEnd type="none" w="med" len="med"/>
+                      <a:tailEnd type="none" w="med" len="med"/>
+                    </a:lnR>
+                    <a:lnT w="9525" cap="flat" cmpd="sng" algn="ctr">
+                      <a:solidFill>
+                        <a:srgbClr val="E2E6EB"/>
+                      </a:solidFill>
+                      <a:prstDash val="solid"/>
+                      <a:round/>
+                      <a:headEnd type="none" w="med" len="med"/>
+                      <a:tailEnd type="none" w="med" len="med"/>
+                    </a:lnT>
+                    <a:lnB w="9525" cap="flat" cmpd="sng" algn="ctr">
+                      <a:solidFill>
+                        <a:srgbClr val="E2E6EB"/>
+                      </a:solidFill>
+                      <a:prstDash val="solid"/>
+                      <a:round/>
+                      <a:headEnd type="none" w="med" len="med"/>
+                      <a:tailEnd type="none" w="med" len="med"/>
+                    </a:lnB>
+                  </a:tcPr>
+                </a:tc>
+                <a:tc>
+                  <a:txBody>
+                    <a:bodyPr/>
+                    <a:lstStyle/>
+                    <a:p>
+                      <a:pPr indent="0" marL="0">
+                        <a:buNone/>
+                      </a:pPr>
+                      <a:r>
+                        <a:rPr lang="en-US" sz="1400" dirty="0">
+                          <a:solidFill>
+                            <a:srgbClr val="1C2430"/>
+                          </a:solidFill>
+                        </a:rPr>
+                        <a:t>Small steps; larger leaves stop the spread fitting single noisy listings</a:t>
                       </a:r>
                       <a:endParaRPr lang="en-US" sz="1400" dirty="0"/>
                     </a:p>
@@ -5237,7 +5413,7 @@
                   <a:schemeClr val="tx2"/>
                 </a:solidFill>
               </a:rPr>
-              <a:t>Model accuracy: CatBoost (new) and the final stack</a:t>
+              <a:t>Model accuracy: NGBoost (new) and the final stack</a:t>
             </a:r>
             <a:endParaRPr lang="en-US" sz="3200" dirty="0"/>
           </a:p>
@@ -5271,7 +5447,7 @@
                 <a:gridCol w="1280160"/>
                 <a:gridCol w="1554480"/>
               </a:tblGrid>
-              <a:tr h="457200">
+              <a:tr h="411480">
                 <a:tc>
                   <a:txBody>
                     <a:bodyPr/>
@@ -5517,7 +5693,7 @@
                   </a:tcPr>
                 </a:tc>
               </a:tr>
-              <a:tr h="457200">
+              <a:tr h="411480">
                 <a:tc>
                   <a:txBody>
                     <a:bodyPr/>
@@ -5763,7 +5939,7 @@
                   </a:tcPr>
                 </a:tc>
               </a:tr>
-              <a:tr h="457200">
+              <a:tr h="411480">
                 <a:tc>
                   <a:txBody>
                     <a:bodyPr/>
@@ -6009,7 +6185,253 @@
                   </a:tcPr>
                 </a:tc>
               </a:tr>
-              <a:tr h="457200">
+              <a:tr h="411480">
+                <a:tc>
+                  <a:txBody>
+                    <a:bodyPr/>
+                    <a:lstStyle/>
+                    <a:p>
+                      <a:pPr algn="l" indent="0" marL="0">
+                        <a:buNone/>
+                      </a:pPr>
+                      <a:r>
+                        <a:rPr lang="en-US" sz="1500" b="1" dirty="0">
+                          <a:solidFill>
+                            <a:srgbClr val="1F4E79"/>
+                          </a:solidFill>
+                        </a:rPr>
+                        <a:t>NGBoost (tuned) ★ new</a:t>
+                      </a:r>
+                      <a:endParaRPr lang="en-US" sz="1500" dirty="0"/>
+                    </a:p>
+                  </a:txBody>
+                  <a:tcPr marL="91440" marR="91440" marT="45720" marB="45720" anchor="ctr">
+                    <a:lnL w="9525" cap="flat" cmpd="sng" algn="ctr">
+                      <a:solidFill>
+                        <a:srgbClr val="E2E6EB"/>
+                      </a:solidFill>
+                      <a:prstDash val="solid"/>
+                      <a:round/>
+                      <a:headEnd type="none" w="med" len="med"/>
+                      <a:tailEnd type="none" w="med" len="med"/>
+                    </a:lnL>
+                    <a:lnR w="9525" cap="flat" cmpd="sng" algn="ctr">
+                      <a:solidFill>
+                        <a:srgbClr val="E2E6EB"/>
+                      </a:solidFill>
+                      <a:prstDash val="solid"/>
+                      <a:round/>
+                      <a:headEnd type="none" w="med" len="med"/>
+                      <a:tailEnd type="none" w="med" len="med"/>
+                    </a:lnR>
+                    <a:lnT w="9525" cap="flat" cmpd="sng" algn="ctr">
+                      <a:solidFill>
+                        <a:srgbClr val="E2E6EB"/>
+                      </a:solidFill>
+                      <a:prstDash val="solid"/>
+                      <a:round/>
+                      <a:headEnd type="none" w="med" len="med"/>
+                      <a:tailEnd type="none" w="med" len="med"/>
+                    </a:lnT>
+                    <a:lnB w="9525" cap="flat" cmpd="sng" algn="ctr">
+                      <a:solidFill>
+                        <a:srgbClr val="E2E6EB"/>
+                      </a:solidFill>
+                      <a:prstDash val="solid"/>
+                      <a:round/>
+                      <a:headEnd type="none" w="med" len="med"/>
+                      <a:tailEnd type="none" w="med" len="med"/>
+                    </a:lnB>
+                    <a:solidFill>
+                      <a:srgbClr val="D9E3EE"/>
+                    </a:solidFill>
+                  </a:tcPr>
+                </a:tc>
+                <a:tc>
+                  <a:txBody>
+                    <a:bodyPr/>
+                    <a:lstStyle/>
+                    <a:p>
+                      <a:pPr algn="ctr" indent="0" marL="0">
+                        <a:buNone/>
+                      </a:pPr>
+                      <a:r>
+                        <a:rPr lang="en-US" sz="1500" b="1" dirty="0">
+                          <a:solidFill>
+                            <a:srgbClr val="1F4E79"/>
+                          </a:solidFill>
+                        </a:rPr>
+                        <a:t>0.4278</a:t>
+                      </a:r>
+                      <a:endParaRPr lang="en-US" sz="1500" dirty="0"/>
+                    </a:p>
+                  </a:txBody>
+                  <a:tcPr marL="91440" marR="91440" marT="45720" marB="45720" anchor="ctr">
+                    <a:lnL w="9525" cap="flat" cmpd="sng" algn="ctr">
+                      <a:solidFill>
+                        <a:srgbClr val="E2E6EB"/>
+                      </a:solidFill>
+                      <a:prstDash val="solid"/>
+                      <a:round/>
+                      <a:headEnd type="none" w="med" len="med"/>
+                      <a:tailEnd type="none" w="med" len="med"/>
+                    </a:lnL>
+                    <a:lnR w="9525" cap="flat" cmpd="sng" algn="ctr">
+                      <a:solidFill>
+                        <a:srgbClr val="E2E6EB"/>
+                      </a:solidFill>
+                      <a:prstDash val="solid"/>
+                      <a:round/>
+                      <a:headEnd type="none" w="med" len="med"/>
+                      <a:tailEnd type="none" w="med" len="med"/>
+                    </a:lnR>
+                    <a:lnT w="9525" cap="flat" cmpd="sng" algn="ctr">
+                      <a:solidFill>
+                        <a:srgbClr val="E2E6EB"/>
+                      </a:solidFill>
+                      <a:prstDash val="solid"/>
+                      <a:round/>
+                      <a:headEnd type="none" w="med" len="med"/>
+                      <a:tailEnd type="none" w="med" len="med"/>
+                    </a:lnT>
+                    <a:lnB w="9525" cap="flat" cmpd="sng" algn="ctr">
+                      <a:solidFill>
+                        <a:srgbClr val="E2E6EB"/>
+                      </a:solidFill>
+                      <a:prstDash val="solid"/>
+                      <a:round/>
+                      <a:headEnd type="none" w="med" len="med"/>
+                      <a:tailEnd type="none" w="med" len="med"/>
+                    </a:lnB>
+                    <a:solidFill>
+                      <a:srgbClr val="D9E3EE"/>
+                    </a:solidFill>
+                  </a:tcPr>
+                </a:tc>
+                <a:tc>
+                  <a:txBody>
+                    <a:bodyPr/>
+                    <a:lstStyle/>
+                    <a:p>
+                      <a:pPr algn="ctr" indent="0" marL="0">
+                        <a:buNone/>
+                      </a:pPr>
+                      <a:r>
+                        <a:rPr lang="en-US" sz="1500" b="1" dirty="0">
+                          <a:solidFill>
+                            <a:srgbClr val="1F4E79"/>
+                          </a:solidFill>
+                        </a:rPr>
+                        <a:t>0.863</a:t>
+                      </a:r>
+                      <a:endParaRPr lang="en-US" sz="1500" dirty="0"/>
+                    </a:p>
+                  </a:txBody>
+                  <a:tcPr marL="91440" marR="91440" marT="45720" marB="45720" anchor="ctr">
+                    <a:lnL w="9525" cap="flat" cmpd="sng" algn="ctr">
+                      <a:solidFill>
+                        <a:srgbClr val="E2E6EB"/>
+                      </a:solidFill>
+                      <a:prstDash val="solid"/>
+                      <a:round/>
+                      <a:headEnd type="none" w="med" len="med"/>
+                      <a:tailEnd type="none" w="med" len="med"/>
+                    </a:lnL>
+                    <a:lnR w="9525" cap="flat" cmpd="sng" algn="ctr">
+                      <a:solidFill>
+                        <a:srgbClr val="E2E6EB"/>
+                      </a:solidFill>
+                      <a:prstDash val="solid"/>
+                      <a:round/>
+                      <a:headEnd type="none" w="med" len="med"/>
+                      <a:tailEnd type="none" w="med" len="med"/>
+                    </a:lnR>
+                    <a:lnT w="9525" cap="flat" cmpd="sng" algn="ctr">
+                      <a:solidFill>
+                        <a:srgbClr val="E2E6EB"/>
+                      </a:solidFill>
+                      <a:prstDash val="solid"/>
+                      <a:round/>
+                      <a:headEnd type="none" w="med" len="med"/>
+                      <a:tailEnd type="none" w="med" len="med"/>
+                    </a:lnT>
+                    <a:lnB w="9525" cap="flat" cmpd="sng" algn="ctr">
+                      <a:solidFill>
+                        <a:srgbClr val="E2E6EB"/>
+                      </a:solidFill>
+                      <a:prstDash val="solid"/>
+                      <a:round/>
+                      <a:headEnd type="none" w="med" len="med"/>
+                      <a:tailEnd type="none" w="med" len="med"/>
+                    </a:lnB>
+                    <a:solidFill>
+                      <a:srgbClr val="D9E3EE"/>
+                    </a:solidFill>
+                  </a:tcPr>
+                </a:tc>
+                <a:tc>
+                  <a:txBody>
+                    <a:bodyPr/>
+                    <a:lstStyle/>
+                    <a:p>
+                      <a:pPr algn="ctr" indent="0" marL="0">
+                        <a:buNone/>
+                      </a:pPr>
+                      <a:r>
+                        <a:rPr lang="en-US" sz="1500" b="1" dirty="0">
+                          <a:solidFill>
+                            <a:srgbClr val="1F4E79"/>
+                          </a:solidFill>
+                        </a:rPr>
+                        <a:t>13.1%</a:t>
+                      </a:r>
+                      <a:endParaRPr lang="en-US" sz="1500" dirty="0"/>
+                    </a:p>
+                  </a:txBody>
+                  <a:tcPr marL="91440" marR="91440" marT="45720" marB="45720" anchor="ctr">
+                    <a:lnL w="9525" cap="flat" cmpd="sng" algn="ctr">
+                      <a:solidFill>
+                        <a:srgbClr val="E2E6EB"/>
+                      </a:solidFill>
+                      <a:prstDash val="solid"/>
+                      <a:round/>
+                      <a:headEnd type="none" w="med" len="med"/>
+                      <a:tailEnd type="none" w="med" len="med"/>
+                    </a:lnL>
+                    <a:lnR w="9525" cap="flat" cmpd="sng" algn="ctr">
+                      <a:solidFill>
+                        <a:srgbClr val="E2E6EB"/>
+                      </a:solidFill>
+                      <a:prstDash val="solid"/>
+                      <a:round/>
+                      <a:headEnd type="none" w="med" len="med"/>
+                      <a:tailEnd type="none" w="med" len="med"/>
+                    </a:lnR>
+                    <a:lnT w="9525" cap="flat" cmpd="sng" algn="ctr">
+                      <a:solidFill>
+                        <a:srgbClr val="E2E6EB"/>
+                      </a:solidFill>
+                      <a:prstDash val="solid"/>
+                      <a:round/>
+                      <a:headEnd type="none" w="med" len="med"/>
+                      <a:tailEnd type="none" w="med" len="med"/>
+                    </a:lnT>
+                    <a:lnB w="9525" cap="flat" cmpd="sng" algn="ctr">
+                      <a:solidFill>
+                        <a:srgbClr val="E2E6EB"/>
+                      </a:solidFill>
+                      <a:prstDash val="solid"/>
+                      <a:round/>
+                      <a:headEnd type="none" w="med" len="med"/>
+                      <a:tailEnd type="none" w="med" len="med"/>
+                    </a:lnB>
+                    <a:solidFill>
+                      <a:srgbClr val="D9E3EE"/>
+                    </a:solidFill>
+                  </a:tcPr>
+                </a:tc>
+              </a:tr>
+              <a:tr h="411480">
                 <a:tc>
                   <a:txBody>
                     <a:bodyPr/>
@@ -6255,7 +6677,7 @@
                   </a:tcPr>
                 </a:tc>
               </a:tr>
-              <a:tr h="457200">
+              <a:tr h="411480">
                 <a:tc>
                   <a:txBody>
                     <a:bodyPr/>
@@ -6501,7 +6923,7 @@
                   </a:tcPr>
                 </a:tc>
               </a:tr>
-              <a:tr h="457200">
+              <a:tr h="411480">
                 <a:tc>
                   <a:txBody>
                     <a:bodyPr/>
@@ -6516,7 +6938,7 @@
                             <a:srgbClr val="1C2430"/>
                           </a:solidFill>
                         </a:rPr>
-                        <a:t>CatBoost (tuned) ★ new</a:t>
+                        <a:t>CatBoost (tuned)</a:t>
                       </a:r>
                       <a:endParaRPr lang="en-US" sz="1500" dirty="0"/>
                     </a:p>
@@ -6747,7 +7169,7 @@
                   </a:tcPr>
                 </a:tc>
               </a:tr>
-              <a:tr h="457200">
+              <a:tr h="411480">
                 <a:tc>
                   <a:txBody>
                     <a:bodyPr/>
@@ -6993,7 +7415,7 @@
                   </a:tcPr>
                 </a:tc>
               </a:tr>
-              <a:tr h="457200">
+              <a:tr h="411480">
                 <a:tc>
                   <a:txBody>
                     <a:bodyPr/>
@@ -7239,7 +7661,7 @@
                   </a:tcPr>
                 </a:tc>
               </a:tr>
-              <a:tr h="457200">
+              <a:tr h="411480">
                 <a:tc>
                   <a:txBody>
                     <a:bodyPr/>
@@ -7497,7 +7919,7 @@
         </p:nvSpPr>
         <p:spPr>
           <a:xfrm>
-            <a:off x="548640" y="5486400"/>
+            <a:off x="548640" y="5532120"/>
             <a:ext cx="7406640" cy="548640"/>
           </a:xfrm>
           <a:prstGeom prst="rect">
@@ -7519,7 +7941,7 @@
                   <a:schemeClr val="accent4"/>
                 </a:solidFill>
               </a:rPr>
-              <a:t>Ranked by cross-validated error (training data only). Tuning lifted R² from about 0.83 (defaults) to 0.86. Band classifier: 90.5% accuracy.</a:t>
+              <a:t>All models except NGBoost were taught. Ranked by cross-validated error (training data only). Tuning lifted R² from about 0.83 (defaults) to 0.86.</a:t>
             </a:r>
             <a:endParaRPr lang="en-US" sz="1200" dirty="0"/>
           </a:p>
@@ -7585,7 +8007,7 @@
                 <a:ea typeface="Cambria" pitchFamily="34" charset="-122"/>
                 <a:cs typeface="Cambria" pitchFamily="34" charset="-120"/>
               </a:rPr>
-              <a:t>★ New algorithm: CatBoost</a:t>
+              <a:t>★ New algorithm: NGBoost</a:t>
             </a:r>
             <a:endParaRPr lang="en-US" sz="1800" dirty="0"/>
           </a:p>
@@ -7643,7 +8065,7 @@
                   <a:schemeClr val="tx1"/>
                 </a:solidFill>
               </a:rPr>
-              <a:t>Handles the 160 area categories natively, without target leakage</a:t>
+              <a:t>Predicts a price distribution, not one number, giving an 80% price range</a:t>
             </a:r>
             <a:endParaRPr lang="en-US" sz="1400" dirty="0"/>
           </a:p>
@@ -7661,7 +8083,7 @@
                   <a:schemeClr val="tx1"/>
                 </a:solidFill>
               </a:rPr>
-              <a:t>R² 0.866 (tied best); best on unseen areas</a:t>
+              <a:t>3rd best on CV; ranges hold 82% of actual prices</a:t>
             </a:r>
             <a:endParaRPr lang="en-US" sz="1400" dirty="0"/>
           </a:p>
@@ -7758,7 +8180,7 @@
                   <a:schemeClr val="tx1"/>
                 </a:solidFill>
               </a:rPr>
-              <a:t>Combines RF + XGBoost + CatBoost</a:t>
+              <a:t>App: stacking price + NGBoost range</a:t>
             </a:r>
             <a:endParaRPr lang="en-US" sz="1400" dirty="0"/>
           </a:p>
@@ -8648,7 +9070,7 @@
                   <a:schemeClr val="accent2"/>
                 </a:solidFill>
               </a:rPr>
-              <a:t>Every price is explained: "Why this price?" (SHAP)</a:t>
+              <a:t>Every price has a likely range (NGBoost) and an explanation (SHAP)</a:t>
             </a:r>
             <a:endParaRPr lang="en-US" sz="1400" dirty="0"/>
           </a:p>
@@ -8774,7 +9196,7 @@
                   <a:schemeClr val="tx2"/>
                 </a:solidFill>
               </a:rPr>
-              <a:t>CI: 15 tests passing</a:t>
+              <a:t>CI: 17 tests passing</a:t>
             </a:r>
             <a:endParaRPr lang="en-US" sz="1500" dirty="0"/>
           </a:p>
@@ -9546,7 +9968,7 @@
                 <a:gridCol w="1737360"/>
                 <a:gridCol w="1463040"/>
               </a:tblGrid>
-              <a:tr h="457200">
+              <a:tr h="411480">
                 <a:tc>
                   <a:txBody>
                     <a:bodyPr/>
@@ -9914,7 +10336,7 @@
                   </a:tcPr>
                 </a:tc>
               </a:tr>
-              <a:tr h="457200">
+              <a:tr h="411480">
                 <a:tc>
                   <a:txBody>
                     <a:bodyPr/>
@@ -10264,7 +10686,7 @@
                   </a:tcPr>
                 </a:tc>
               </a:tr>
-              <a:tr h="457200">
+              <a:tr h="411480">
                 <a:tc>
                   <a:txBody>
                     <a:bodyPr/>
@@ -10614,7 +11036,357 @@
                   </a:tcPr>
                 </a:tc>
               </a:tr>
-              <a:tr h="457200">
+              <a:tr h="411480">
+                <a:tc>
+                  <a:txBody>
+                    <a:bodyPr/>
+                    <a:lstStyle/>
+                    <a:p>
+                      <a:pPr indent="0" marL="0">
+                        <a:buNone/>
+                      </a:pPr>
+                      <a:r>
+                        <a:rPr lang="en-US" sz="1400" dirty="0">
+                          <a:solidFill>
+                            <a:srgbClr val="1C2430"/>
+                          </a:solidFill>
+                        </a:rPr>
+                        <a:t>NGBoost (tuned) ★ new</a:t>
+                      </a:r>
+                      <a:endParaRPr lang="en-US" sz="1400" dirty="0"/>
+                    </a:p>
+                  </a:txBody>
+                  <a:tcPr marL="91440" marR="91440" marT="45720" marB="45720" anchor="ctr">
+                    <a:lnL w="9525" cap="flat" cmpd="sng" algn="ctr">
+                      <a:solidFill>
+                        <a:srgbClr val="E2E6EB"/>
+                      </a:solidFill>
+                      <a:prstDash val="solid"/>
+                      <a:round/>
+                      <a:headEnd type="none" w="med" len="med"/>
+                      <a:tailEnd type="none" w="med" len="med"/>
+                    </a:lnL>
+                    <a:lnR w="9525" cap="flat" cmpd="sng" algn="ctr">
+                      <a:solidFill>
+                        <a:srgbClr val="E2E6EB"/>
+                      </a:solidFill>
+                      <a:prstDash val="solid"/>
+                      <a:round/>
+                      <a:headEnd type="none" w="med" len="med"/>
+                      <a:tailEnd type="none" w="med" len="med"/>
+                    </a:lnR>
+                    <a:lnT w="9525" cap="flat" cmpd="sng" algn="ctr">
+                      <a:solidFill>
+                        <a:srgbClr val="E2E6EB"/>
+                      </a:solidFill>
+                      <a:prstDash val="solid"/>
+                      <a:round/>
+                      <a:headEnd type="none" w="med" len="med"/>
+                      <a:tailEnd type="none" w="med" len="med"/>
+                    </a:lnT>
+                    <a:lnB w="9525" cap="flat" cmpd="sng" algn="ctr">
+                      <a:solidFill>
+                        <a:srgbClr val="E2E6EB"/>
+                      </a:solidFill>
+                      <a:prstDash val="solid"/>
+                      <a:round/>
+                      <a:headEnd type="none" w="med" len="med"/>
+                      <a:tailEnd type="none" w="med" len="med"/>
+                    </a:lnB>
+                  </a:tcPr>
+                </a:tc>
+                <a:tc>
+                  <a:txBody>
+                    <a:bodyPr/>
+                    <a:lstStyle/>
+                    <a:p>
+                      <a:pPr indent="0" marL="0">
+                        <a:buNone/>
+                      </a:pPr>
+                      <a:r>
+                        <a:rPr lang="en-US" sz="1400" dirty="0">
+                          <a:solidFill>
+                            <a:srgbClr val="1C2430"/>
+                          </a:solidFill>
+                        </a:rPr>
+                        <a:t>0.4278</a:t>
+                      </a:r>
+                      <a:endParaRPr lang="en-US" sz="1400" dirty="0"/>
+                    </a:p>
+                  </a:txBody>
+                  <a:tcPr marL="91440" marR="91440" marT="45720" marB="45720" anchor="ctr">
+                    <a:lnL w="9525" cap="flat" cmpd="sng" algn="ctr">
+                      <a:solidFill>
+                        <a:srgbClr val="E2E6EB"/>
+                      </a:solidFill>
+                      <a:prstDash val="solid"/>
+                      <a:round/>
+                      <a:headEnd type="none" w="med" len="med"/>
+                      <a:tailEnd type="none" w="med" len="med"/>
+                    </a:lnL>
+                    <a:lnR w="9525" cap="flat" cmpd="sng" algn="ctr">
+                      <a:solidFill>
+                        <a:srgbClr val="E2E6EB"/>
+                      </a:solidFill>
+                      <a:prstDash val="solid"/>
+                      <a:round/>
+                      <a:headEnd type="none" w="med" len="med"/>
+                      <a:tailEnd type="none" w="med" len="med"/>
+                    </a:lnR>
+                    <a:lnT w="9525" cap="flat" cmpd="sng" algn="ctr">
+                      <a:solidFill>
+                        <a:srgbClr val="E2E6EB"/>
+                      </a:solidFill>
+                      <a:prstDash val="solid"/>
+                      <a:round/>
+                      <a:headEnd type="none" w="med" len="med"/>
+                      <a:tailEnd type="none" w="med" len="med"/>
+                    </a:lnT>
+                    <a:lnB w="9525" cap="flat" cmpd="sng" algn="ctr">
+                      <a:solidFill>
+                        <a:srgbClr val="E2E6EB"/>
+                      </a:solidFill>
+                      <a:prstDash val="solid"/>
+                      <a:round/>
+                      <a:headEnd type="none" w="med" len="med"/>
+                      <a:tailEnd type="none" w="med" len="med"/>
+                    </a:lnB>
+                  </a:tcPr>
+                </a:tc>
+                <a:tc>
+                  <a:txBody>
+                    <a:bodyPr/>
+                    <a:lstStyle/>
+                    <a:p>
+                      <a:pPr indent="0" marL="0">
+                        <a:buNone/>
+                      </a:pPr>
+                      <a:r>
+                        <a:rPr lang="en-US" sz="1400" dirty="0">
+                          <a:solidFill>
+                            <a:srgbClr val="1C2430"/>
+                          </a:solidFill>
+                        </a:rPr>
+                        <a:t>0.3714</a:t>
+                      </a:r>
+                      <a:endParaRPr lang="en-US" sz="1400" dirty="0"/>
+                    </a:p>
+                  </a:txBody>
+                  <a:tcPr marL="91440" marR="91440" marT="45720" marB="45720" anchor="ctr">
+                    <a:lnL w="9525" cap="flat" cmpd="sng" algn="ctr">
+                      <a:solidFill>
+                        <a:srgbClr val="E2E6EB"/>
+                      </a:solidFill>
+                      <a:prstDash val="solid"/>
+                      <a:round/>
+                      <a:headEnd type="none" w="med" len="med"/>
+                      <a:tailEnd type="none" w="med" len="med"/>
+                    </a:lnL>
+                    <a:lnR w="9525" cap="flat" cmpd="sng" algn="ctr">
+                      <a:solidFill>
+                        <a:srgbClr val="E2E6EB"/>
+                      </a:solidFill>
+                      <a:prstDash val="solid"/>
+                      <a:round/>
+                      <a:headEnd type="none" w="med" len="med"/>
+                      <a:tailEnd type="none" w="med" len="med"/>
+                    </a:lnR>
+                    <a:lnT w="9525" cap="flat" cmpd="sng" algn="ctr">
+                      <a:solidFill>
+                        <a:srgbClr val="E2E6EB"/>
+                      </a:solidFill>
+                      <a:prstDash val="solid"/>
+                      <a:round/>
+                      <a:headEnd type="none" w="med" len="med"/>
+                      <a:tailEnd type="none" w="med" len="med"/>
+                    </a:lnT>
+                    <a:lnB w="9525" cap="flat" cmpd="sng" algn="ctr">
+                      <a:solidFill>
+                        <a:srgbClr val="E2E6EB"/>
+                      </a:solidFill>
+                      <a:prstDash val="solid"/>
+                      <a:round/>
+                      <a:headEnd type="none" w="med" len="med"/>
+                      <a:tailEnd type="none" w="med" len="med"/>
+                    </a:lnB>
+                  </a:tcPr>
+                </a:tc>
+                <a:tc>
+                  <a:txBody>
+                    <a:bodyPr/>
+                    <a:lstStyle/>
+                    <a:p>
+                      <a:pPr indent="0" marL="0">
+                        <a:buNone/>
+                      </a:pPr>
+                      <a:r>
+                        <a:rPr lang="en-US" sz="1400" dirty="0">
+                          <a:solidFill>
+                            <a:srgbClr val="1C2430"/>
+                          </a:solidFill>
+                        </a:rPr>
+                        <a:t>0.863</a:t>
+                      </a:r>
+                      <a:endParaRPr lang="en-US" sz="1400" dirty="0"/>
+                    </a:p>
+                  </a:txBody>
+                  <a:tcPr marL="91440" marR="91440" marT="45720" marB="45720" anchor="ctr">
+                    <a:lnL w="9525" cap="flat" cmpd="sng" algn="ctr">
+                      <a:solidFill>
+                        <a:srgbClr val="E2E6EB"/>
+                      </a:solidFill>
+                      <a:prstDash val="solid"/>
+                      <a:round/>
+                      <a:headEnd type="none" w="med" len="med"/>
+                      <a:tailEnd type="none" w="med" len="med"/>
+                    </a:lnL>
+                    <a:lnR w="9525" cap="flat" cmpd="sng" algn="ctr">
+                      <a:solidFill>
+                        <a:srgbClr val="E2E6EB"/>
+                      </a:solidFill>
+                      <a:prstDash val="solid"/>
+                      <a:round/>
+                      <a:headEnd type="none" w="med" len="med"/>
+                      <a:tailEnd type="none" w="med" len="med"/>
+                    </a:lnR>
+                    <a:lnT w="9525" cap="flat" cmpd="sng" algn="ctr">
+                      <a:solidFill>
+                        <a:srgbClr val="E2E6EB"/>
+                      </a:solidFill>
+                      <a:prstDash val="solid"/>
+                      <a:round/>
+                      <a:headEnd type="none" w="med" len="med"/>
+                      <a:tailEnd type="none" w="med" len="med"/>
+                    </a:lnT>
+                    <a:lnB w="9525" cap="flat" cmpd="sng" algn="ctr">
+                      <a:solidFill>
+                        <a:srgbClr val="E2E6EB"/>
+                      </a:solidFill>
+                      <a:prstDash val="solid"/>
+                      <a:round/>
+                      <a:headEnd type="none" w="med" len="med"/>
+                      <a:tailEnd type="none" w="med" len="med"/>
+                    </a:lnB>
+                  </a:tcPr>
+                </a:tc>
+                <a:tc>
+                  <a:txBody>
+                    <a:bodyPr/>
+                    <a:lstStyle/>
+                    <a:p>
+                      <a:pPr indent="0" marL="0">
+                        <a:buNone/>
+                      </a:pPr>
+                      <a:r>
+                        <a:rPr lang="en-US" sz="1400" dirty="0">
+                          <a:solidFill>
+                            <a:srgbClr val="1C2430"/>
+                          </a:solidFill>
+                        </a:rPr>
+                        <a:t>572,292</a:t>
+                      </a:r>
+                      <a:endParaRPr lang="en-US" sz="1400" dirty="0"/>
+                    </a:p>
+                  </a:txBody>
+                  <a:tcPr marL="91440" marR="91440" marT="45720" marB="45720" anchor="ctr">
+                    <a:lnL w="9525" cap="flat" cmpd="sng" algn="ctr">
+                      <a:solidFill>
+                        <a:srgbClr val="E2E6EB"/>
+                      </a:solidFill>
+                      <a:prstDash val="solid"/>
+                      <a:round/>
+                      <a:headEnd type="none" w="med" len="med"/>
+                      <a:tailEnd type="none" w="med" len="med"/>
+                    </a:lnL>
+                    <a:lnR w="9525" cap="flat" cmpd="sng" algn="ctr">
+                      <a:solidFill>
+                        <a:srgbClr val="E2E6EB"/>
+                      </a:solidFill>
+                      <a:prstDash val="solid"/>
+                      <a:round/>
+                      <a:headEnd type="none" w="med" len="med"/>
+                      <a:tailEnd type="none" w="med" len="med"/>
+                    </a:lnR>
+                    <a:lnT w="9525" cap="flat" cmpd="sng" algn="ctr">
+                      <a:solidFill>
+                        <a:srgbClr val="E2E6EB"/>
+                      </a:solidFill>
+                      <a:prstDash val="solid"/>
+                      <a:round/>
+                      <a:headEnd type="none" w="med" len="med"/>
+                      <a:tailEnd type="none" w="med" len="med"/>
+                    </a:lnT>
+                    <a:lnB w="9525" cap="flat" cmpd="sng" algn="ctr">
+                      <a:solidFill>
+                        <a:srgbClr val="E2E6EB"/>
+                      </a:solidFill>
+                      <a:prstDash val="solid"/>
+                      <a:round/>
+                      <a:headEnd type="none" w="med" len="med"/>
+                      <a:tailEnd type="none" w="med" len="med"/>
+                    </a:lnB>
+                  </a:tcPr>
+                </a:tc>
+                <a:tc>
+                  <a:txBody>
+                    <a:bodyPr/>
+                    <a:lstStyle/>
+                    <a:p>
+                      <a:pPr indent="0" marL="0">
+                        <a:buNone/>
+                      </a:pPr>
+                      <a:r>
+                        <a:rPr lang="en-US" sz="1400" dirty="0">
+                          <a:solidFill>
+                            <a:srgbClr val="1C2430"/>
+                          </a:solidFill>
+                        </a:rPr>
+                        <a:t>13.1%</a:t>
+                      </a:r>
+                      <a:endParaRPr lang="en-US" sz="1400" dirty="0"/>
+                    </a:p>
+                  </a:txBody>
+                  <a:tcPr marL="91440" marR="91440" marT="45720" marB="45720" anchor="ctr">
+                    <a:lnL w="9525" cap="flat" cmpd="sng" algn="ctr">
+                      <a:solidFill>
+                        <a:srgbClr val="E2E6EB"/>
+                      </a:solidFill>
+                      <a:prstDash val="solid"/>
+                      <a:round/>
+                      <a:headEnd type="none" w="med" len="med"/>
+                      <a:tailEnd type="none" w="med" len="med"/>
+                    </a:lnL>
+                    <a:lnR w="9525" cap="flat" cmpd="sng" algn="ctr">
+                      <a:solidFill>
+                        <a:srgbClr val="E2E6EB"/>
+                      </a:solidFill>
+                      <a:prstDash val="solid"/>
+                      <a:round/>
+                      <a:headEnd type="none" w="med" len="med"/>
+                      <a:tailEnd type="none" w="med" len="med"/>
+                    </a:lnR>
+                    <a:lnT w="9525" cap="flat" cmpd="sng" algn="ctr">
+                      <a:solidFill>
+                        <a:srgbClr val="E2E6EB"/>
+                      </a:solidFill>
+                      <a:prstDash val="solid"/>
+                      <a:round/>
+                      <a:headEnd type="none" w="med" len="med"/>
+                      <a:tailEnd type="none" w="med" len="med"/>
+                    </a:lnT>
+                    <a:lnB w="9525" cap="flat" cmpd="sng" algn="ctr">
+                      <a:solidFill>
+                        <a:srgbClr val="E2E6EB"/>
+                      </a:solidFill>
+                      <a:prstDash val="solid"/>
+                      <a:round/>
+                      <a:headEnd type="none" w="med" len="med"/>
+                      <a:tailEnd type="none" w="med" len="med"/>
+                    </a:lnB>
+                  </a:tcPr>
+                </a:tc>
+              </a:tr>
+              <a:tr h="411480">
                 <a:tc>
                   <a:txBody>
                     <a:bodyPr/>
@@ -10964,7 +11736,7 @@
                   </a:tcPr>
                 </a:tc>
               </a:tr>
-              <a:tr h="457200">
+              <a:tr h="411480">
                 <a:tc>
                   <a:txBody>
                     <a:bodyPr/>
@@ -11314,7 +12086,7 @@
                   </a:tcPr>
                 </a:tc>
               </a:tr>
-              <a:tr h="457200">
+              <a:tr h="411480">
                 <a:tc>
                   <a:txBody>
                     <a:bodyPr/>
@@ -11664,7 +12436,357 @@
                   </a:tcPr>
                 </a:tc>
               </a:tr>
-              <a:tr h="457200">
+              <a:tr h="411480">
+                <a:tc>
+                  <a:txBody>
+                    <a:bodyPr/>
+                    <a:lstStyle/>
+                    <a:p>
+                      <a:pPr indent="0" marL="0">
+                        <a:buNone/>
+                      </a:pPr>
+                      <a:r>
+                        <a:rPr lang="en-US" sz="1400" dirty="0">
+                          <a:solidFill>
+                            <a:srgbClr val="1C2430"/>
+                          </a:solidFill>
+                        </a:rPr>
+                        <a:t>NGBoost (default)</a:t>
+                      </a:r>
+                      <a:endParaRPr lang="en-US" sz="1400" dirty="0"/>
+                    </a:p>
+                  </a:txBody>
+                  <a:tcPr marL="91440" marR="91440" marT="45720" marB="45720" anchor="ctr">
+                    <a:lnL w="9525" cap="flat" cmpd="sng" algn="ctr">
+                      <a:solidFill>
+                        <a:srgbClr val="E2E6EB"/>
+                      </a:solidFill>
+                      <a:prstDash val="solid"/>
+                      <a:round/>
+                      <a:headEnd type="none" w="med" len="med"/>
+                      <a:tailEnd type="none" w="med" len="med"/>
+                    </a:lnL>
+                    <a:lnR w="9525" cap="flat" cmpd="sng" algn="ctr">
+                      <a:solidFill>
+                        <a:srgbClr val="E2E6EB"/>
+                      </a:solidFill>
+                      <a:prstDash val="solid"/>
+                      <a:round/>
+                      <a:headEnd type="none" w="med" len="med"/>
+                      <a:tailEnd type="none" w="med" len="med"/>
+                    </a:lnR>
+                    <a:lnT w="9525" cap="flat" cmpd="sng" algn="ctr">
+                      <a:solidFill>
+                        <a:srgbClr val="E2E6EB"/>
+                      </a:solidFill>
+                      <a:prstDash val="solid"/>
+                      <a:round/>
+                      <a:headEnd type="none" w="med" len="med"/>
+                      <a:tailEnd type="none" w="med" len="med"/>
+                    </a:lnT>
+                    <a:lnB w="9525" cap="flat" cmpd="sng" algn="ctr">
+                      <a:solidFill>
+                        <a:srgbClr val="E2E6EB"/>
+                      </a:solidFill>
+                      <a:prstDash val="solid"/>
+                      <a:round/>
+                      <a:headEnd type="none" w="med" len="med"/>
+                      <a:tailEnd type="none" w="med" len="med"/>
+                    </a:lnB>
+                  </a:tcPr>
+                </a:tc>
+                <a:tc>
+                  <a:txBody>
+                    <a:bodyPr/>
+                    <a:lstStyle/>
+                    <a:p>
+                      <a:pPr indent="0" marL="0">
+                        <a:buNone/>
+                      </a:pPr>
+                      <a:r>
+                        <a:rPr lang="en-US" sz="1400" dirty="0">
+                          <a:solidFill>
+                            <a:srgbClr val="1C2430"/>
+                          </a:solidFill>
+                        </a:rPr>
+                        <a:t>0.4372</a:t>
+                      </a:r>
+                      <a:endParaRPr lang="en-US" sz="1400" dirty="0"/>
+                    </a:p>
+                  </a:txBody>
+                  <a:tcPr marL="91440" marR="91440" marT="45720" marB="45720" anchor="ctr">
+                    <a:lnL w="9525" cap="flat" cmpd="sng" algn="ctr">
+                      <a:solidFill>
+                        <a:srgbClr val="E2E6EB"/>
+                      </a:solidFill>
+                      <a:prstDash val="solid"/>
+                      <a:round/>
+                      <a:headEnd type="none" w="med" len="med"/>
+                      <a:tailEnd type="none" w="med" len="med"/>
+                    </a:lnL>
+                    <a:lnR w="9525" cap="flat" cmpd="sng" algn="ctr">
+                      <a:solidFill>
+                        <a:srgbClr val="E2E6EB"/>
+                      </a:solidFill>
+                      <a:prstDash val="solid"/>
+                      <a:round/>
+                      <a:headEnd type="none" w="med" len="med"/>
+                      <a:tailEnd type="none" w="med" len="med"/>
+                    </a:lnR>
+                    <a:lnT w="9525" cap="flat" cmpd="sng" algn="ctr">
+                      <a:solidFill>
+                        <a:srgbClr val="E2E6EB"/>
+                      </a:solidFill>
+                      <a:prstDash val="solid"/>
+                      <a:round/>
+                      <a:headEnd type="none" w="med" len="med"/>
+                      <a:tailEnd type="none" w="med" len="med"/>
+                    </a:lnT>
+                    <a:lnB w="9525" cap="flat" cmpd="sng" algn="ctr">
+                      <a:solidFill>
+                        <a:srgbClr val="E2E6EB"/>
+                      </a:solidFill>
+                      <a:prstDash val="solid"/>
+                      <a:round/>
+                      <a:headEnd type="none" w="med" len="med"/>
+                      <a:tailEnd type="none" w="med" len="med"/>
+                    </a:lnB>
+                  </a:tcPr>
+                </a:tc>
+                <a:tc>
+                  <a:txBody>
+                    <a:bodyPr/>
+                    <a:lstStyle/>
+                    <a:p>
+                      <a:pPr indent="0" marL="0">
+                        <a:buNone/>
+                      </a:pPr>
+                      <a:r>
+                        <a:rPr lang="en-US" sz="1400" dirty="0">
+                          <a:solidFill>
+                            <a:srgbClr val="1C2430"/>
+                          </a:solidFill>
+                        </a:rPr>
+                        <a:t>0.3921</a:t>
+                      </a:r>
+                      <a:endParaRPr lang="en-US" sz="1400" dirty="0"/>
+                    </a:p>
+                  </a:txBody>
+                  <a:tcPr marL="91440" marR="91440" marT="45720" marB="45720" anchor="ctr">
+                    <a:lnL w="9525" cap="flat" cmpd="sng" algn="ctr">
+                      <a:solidFill>
+                        <a:srgbClr val="E2E6EB"/>
+                      </a:solidFill>
+                      <a:prstDash val="solid"/>
+                      <a:round/>
+                      <a:headEnd type="none" w="med" len="med"/>
+                      <a:tailEnd type="none" w="med" len="med"/>
+                    </a:lnL>
+                    <a:lnR w="9525" cap="flat" cmpd="sng" algn="ctr">
+                      <a:solidFill>
+                        <a:srgbClr val="E2E6EB"/>
+                      </a:solidFill>
+                      <a:prstDash val="solid"/>
+                      <a:round/>
+                      <a:headEnd type="none" w="med" len="med"/>
+                      <a:tailEnd type="none" w="med" len="med"/>
+                    </a:lnR>
+                    <a:lnT w="9525" cap="flat" cmpd="sng" algn="ctr">
+                      <a:solidFill>
+                        <a:srgbClr val="E2E6EB"/>
+                      </a:solidFill>
+                      <a:prstDash val="solid"/>
+                      <a:round/>
+                      <a:headEnd type="none" w="med" len="med"/>
+                      <a:tailEnd type="none" w="med" len="med"/>
+                    </a:lnT>
+                    <a:lnB w="9525" cap="flat" cmpd="sng" algn="ctr">
+                      <a:solidFill>
+                        <a:srgbClr val="E2E6EB"/>
+                      </a:solidFill>
+                      <a:prstDash val="solid"/>
+                      <a:round/>
+                      <a:headEnd type="none" w="med" len="med"/>
+                      <a:tailEnd type="none" w="med" len="med"/>
+                    </a:lnB>
+                  </a:tcPr>
+                </a:tc>
+                <a:tc>
+                  <a:txBody>
+                    <a:bodyPr/>
+                    <a:lstStyle/>
+                    <a:p>
+                      <a:pPr indent="0" marL="0">
+                        <a:buNone/>
+                      </a:pPr>
+                      <a:r>
+                        <a:rPr lang="en-US" sz="1400" dirty="0">
+                          <a:solidFill>
+                            <a:srgbClr val="1C2430"/>
+                          </a:solidFill>
+                        </a:rPr>
+                        <a:t>0.848</a:t>
+                      </a:r>
+                      <a:endParaRPr lang="en-US" sz="1400" dirty="0"/>
+                    </a:p>
+                  </a:txBody>
+                  <a:tcPr marL="91440" marR="91440" marT="45720" marB="45720" anchor="ctr">
+                    <a:lnL w="9525" cap="flat" cmpd="sng" algn="ctr">
+                      <a:solidFill>
+                        <a:srgbClr val="E2E6EB"/>
+                      </a:solidFill>
+                      <a:prstDash val="solid"/>
+                      <a:round/>
+                      <a:headEnd type="none" w="med" len="med"/>
+                      <a:tailEnd type="none" w="med" len="med"/>
+                    </a:lnL>
+                    <a:lnR w="9525" cap="flat" cmpd="sng" algn="ctr">
+                      <a:solidFill>
+                        <a:srgbClr val="E2E6EB"/>
+                      </a:solidFill>
+                      <a:prstDash val="solid"/>
+                      <a:round/>
+                      <a:headEnd type="none" w="med" len="med"/>
+                      <a:tailEnd type="none" w="med" len="med"/>
+                    </a:lnR>
+                    <a:lnT w="9525" cap="flat" cmpd="sng" algn="ctr">
+                      <a:solidFill>
+                        <a:srgbClr val="E2E6EB"/>
+                      </a:solidFill>
+                      <a:prstDash val="solid"/>
+                      <a:round/>
+                      <a:headEnd type="none" w="med" len="med"/>
+                      <a:tailEnd type="none" w="med" len="med"/>
+                    </a:lnT>
+                    <a:lnB w="9525" cap="flat" cmpd="sng" algn="ctr">
+                      <a:solidFill>
+                        <a:srgbClr val="E2E6EB"/>
+                      </a:solidFill>
+                      <a:prstDash val="solid"/>
+                      <a:round/>
+                      <a:headEnd type="none" w="med" len="med"/>
+                      <a:tailEnd type="none" w="med" len="med"/>
+                    </a:lnB>
+                  </a:tcPr>
+                </a:tc>
+                <a:tc>
+                  <a:txBody>
+                    <a:bodyPr/>
+                    <a:lstStyle/>
+                    <a:p>
+                      <a:pPr indent="0" marL="0">
+                        <a:buNone/>
+                      </a:pPr>
+                      <a:r>
+                        <a:rPr lang="en-US" sz="1400" dirty="0">
+                          <a:solidFill>
+                            <a:srgbClr val="1C2430"/>
+                          </a:solidFill>
+                        </a:rPr>
+                        <a:t>596,068</a:t>
+                      </a:r>
+                      <a:endParaRPr lang="en-US" sz="1400" dirty="0"/>
+                    </a:p>
+                  </a:txBody>
+                  <a:tcPr marL="91440" marR="91440" marT="45720" marB="45720" anchor="ctr">
+                    <a:lnL w="9525" cap="flat" cmpd="sng" algn="ctr">
+                      <a:solidFill>
+                        <a:srgbClr val="E2E6EB"/>
+                      </a:solidFill>
+                      <a:prstDash val="solid"/>
+                      <a:round/>
+                      <a:headEnd type="none" w="med" len="med"/>
+                      <a:tailEnd type="none" w="med" len="med"/>
+                    </a:lnL>
+                    <a:lnR w="9525" cap="flat" cmpd="sng" algn="ctr">
+                      <a:solidFill>
+                        <a:srgbClr val="E2E6EB"/>
+                      </a:solidFill>
+                      <a:prstDash val="solid"/>
+                      <a:round/>
+                      <a:headEnd type="none" w="med" len="med"/>
+                      <a:tailEnd type="none" w="med" len="med"/>
+                    </a:lnR>
+                    <a:lnT w="9525" cap="flat" cmpd="sng" algn="ctr">
+                      <a:solidFill>
+                        <a:srgbClr val="E2E6EB"/>
+                      </a:solidFill>
+                      <a:prstDash val="solid"/>
+                      <a:round/>
+                      <a:headEnd type="none" w="med" len="med"/>
+                      <a:tailEnd type="none" w="med" len="med"/>
+                    </a:lnT>
+                    <a:lnB w="9525" cap="flat" cmpd="sng" algn="ctr">
+                      <a:solidFill>
+                        <a:srgbClr val="E2E6EB"/>
+                      </a:solidFill>
+                      <a:prstDash val="solid"/>
+                      <a:round/>
+                      <a:headEnd type="none" w="med" len="med"/>
+                      <a:tailEnd type="none" w="med" len="med"/>
+                    </a:lnB>
+                  </a:tcPr>
+                </a:tc>
+                <a:tc>
+                  <a:txBody>
+                    <a:bodyPr/>
+                    <a:lstStyle/>
+                    <a:p>
+                      <a:pPr indent="0" marL="0">
+                        <a:buNone/>
+                      </a:pPr>
+                      <a:r>
+                        <a:rPr lang="en-US" sz="1400" dirty="0">
+                          <a:solidFill>
+                            <a:srgbClr val="1C2430"/>
+                          </a:solidFill>
+                        </a:rPr>
+                        <a:t>14.5%</a:t>
+                      </a:r>
+                      <a:endParaRPr lang="en-US" sz="1400" dirty="0"/>
+                    </a:p>
+                  </a:txBody>
+                  <a:tcPr marL="91440" marR="91440" marT="45720" marB="45720" anchor="ctr">
+                    <a:lnL w="9525" cap="flat" cmpd="sng" algn="ctr">
+                      <a:solidFill>
+                        <a:srgbClr val="E2E6EB"/>
+                      </a:solidFill>
+                      <a:prstDash val="solid"/>
+                      <a:round/>
+                      <a:headEnd type="none" w="med" len="med"/>
+                      <a:tailEnd type="none" w="med" len="med"/>
+                    </a:lnL>
+                    <a:lnR w="9525" cap="flat" cmpd="sng" algn="ctr">
+                      <a:solidFill>
+                        <a:srgbClr val="E2E6EB"/>
+                      </a:solidFill>
+                      <a:prstDash val="solid"/>
+                      <a:round/>
+                      <a:headEnd type="none" w="med" len="med"/>
+                      <a:tailEnd type="none" w="med" len="med"/>
+                    </a:lnR>
+                    <a:lnT w="9525" cap="flat" cmpd="sng" algn="ctr">
+                      <a:solidFill>
+                        <a:srgbClr val="E2E6EB"/>
+                      </a:solidFill>
+                      <a:prstDash val="solid"/>
+                      <a:round/>
+                      <a:headEnd type="none" w="med" len="med"/>
+                      <a:tailEnd type="none" w="med" len="med"/>
+                    </a:lnT>
+                    <a:lnB w="9525" cap="flat" cmpd="sng" algn="ctr">
+                      <a:solidFill>
+                        <a:srgbClr val="E2E6EB"/>
+                      </a:solidFill>
+                      <a:prstDash val="solid"/>
+                      <a:round/>
+                      <a:headEnd type="none" w="med" len="med"/>
+                      <a:tailEnd type="none" w="med" len="med"/>
+                    </a:lnB>
+                  </a:tcPr>
+                </a:tc>
+              </a:tr>
+              <a:tr h="411480">
                 <a:tc>
                   <a:txBody>
                     <a:bodyPr/>
@@ -12014,7 +13136,7 @@
                   </a:tcPr>
                 </a:tc>
               </a:tr>
-              <a:tr h="457200">
+              <a:tr h="411480">
                 <a:tc>
                   <a:txBody>
                     <a:bodyPr/>
@@ -12364,7 +13486,7 @@
                   </a:tcPr>
                 </a:tc>
               </a:tr>
-              <a:tr h="457200">
+              <a:tr h="411480">
                 <a:tc>
                   <a:txBody>
                     <a:bodyPr/>

--- a/Presentation.pptx
+++ b/Presentation.pptx
@@ -4,6 +4,9 @@
   <p:sldMasterIdLst>
     <p:sldMasterId id="2147483648" r:id="rId1"/>
   </p:sldMasterIdLst>
+  <p:notesMasterIdLst>
+    <p:notesMasterId r:id="rId12"/>
+  </p:notesMasterIdLst>
   <p:sldIdLst>
     <p:sldId id="256" r:id="rId2"/>
     <p:sldId id="257" r:id="rId3"/>
@@ -16,9 +19,6 @@
     <p:sldId id="264" r:id="rId10"/>
     <p:sldId id="265" r:id="rId11"/>
   </p:sldIdLst>
-  <p:notesMasterIdLst>
-    <p:notesMasterId r:id="rId12"/>
-  </p:notesMasterIdLst>
   <p:sldSz cx="12192000" cy="6858000"/>
   <p:notesSz cx="6858000" cy="12192000"/>
   <p:defaultTextStyle>
@@ -116,7 +116,7 @@
   <p:extLst>
     <p:ext uri="{521415D9-36F7-43E2-AB2F-B90AF26B5E84}">
       <p14:sectionLst xmlns:p14="http://schemas.microsoft.com/office/powerpoint/2010/main">
-        <p14:section name="Presentation" id="{7ccc21e6-e0ec-8f38-8191-e0095dd1da7d}">
+        <p14:section name="Presentation" id="{7CCC21E6-E0EC-8F38-8191-E0095DD1DA7D}">
           <p14:sldIdLst>
             <p14:sldId id="256"/>
             <p14:sldId id="257"/>
@@ -128,7 +128,7 @@
             <p14:sldId id="263"/>
           </p14:sldIdLst>
         </p14:section>
-        <p14:section name="Appendix" id="{6154ce8b-ce1f-0012-6ab7-6099dce4b4a4}">
+        <p14:section name="Appendix" id="{6154CE8B-CE1F-0012-6AB7-6099DCE4B4A4}">
           <p14:sldIdLst>
             <p14:sldId id="264"/>
             <p14:sldId id="265"/>
@@ -143,10 +143,95 @@
 </p:presentation>
 </file>
 
+<file path=ppt/changesInfos/changesInfo1.xml><?xml version="1.0" encoding="utf-8"?>
+<pc:chgInfo xmlns:a="http://schemas.openxmlformats.org/drawingml/2006/main" xmlns:r="http://schemas.openxmlformats.org/officeDocument/2006/relationships" xmlns:ac="http://schemas.microsoft.com/office/drawing/2013/main/command" xmlns:pc="http://schemas.microsoft.com/office/powerpoint/2013/main/command">
+  <pc:docChgLst>
+    <pc:chgData name="Amal Ranawaka" userId="7880e1bd-1e72-41fc-b207-b1ec3632c44d" providerId="ADAL" clId="{12C612FF-7402-4B5C-8646-B0039ADEC4D1}"/>
+    <pc:docChg chg="undo custSel modSld">
+      <pc:chgData name="Amal Ranawaka" userId="7880e1bd-1e72-41fc-b207-b1ec3632c44d" providerId="ADAL" clId="{12C612FF-7402-4B5C-8646-B0039ADEC4D1}" dt="2026-10-30T10:28:21.765" v="43" actId="20577"/>
+      <pc:docMkLst>
+        <pc:docMk/>
+      </pc:docMkLst>
+      <pc:sldChg chg="modSp mod">
+        <pc:chgData name="Amal Ranawaka" userId="7880e1bd-1e72-41fc-b207-b1ec3632c44d" providerId="ADAL" clId="{12C612FF-7402-4B5C-8646-B0039ADEC4D1}" dt="2026-10-29T16:54:46.555" v="4" actId="20577"/>
+        <pc:sldMkLst>
+          <pc:docMk/>
+          <pc:sldMk cId="0" sldId="256"/>
+        </pc:sldMkLst>
+        <pc:spChg chg="mod">
+          <ac:chgData name="Amal Ranawaka" userId="7880e1bd-1e72-41fc-b207-b1ec3632c44d" providerId="ADAL" clId="{12C612FF-7402-4B5C-8646-B0039ADEC4D1}" dt="2026-10-29T16:54:46.555" v="4" actId="20577"/>
+          <ac:spMkLst>
+            <pc:docMk/>
+            <pc:sldMk cId="0" sldId="256"/>
+            <ac:spMk id="10" creationId="{00000000-0000-0000-0000-000000000000}"/>
+          </ac:spMkLst>
+        </pc:spChg>
+      </pc:sldChg>
+      <pc:sldChg chg="modSp mod">
+        <pc:chgData name="Amal Ranawaka" userId="7880e1bd-1e72-41fc-b207-b1ec3632c44d" providerId="ADAL" clId="{12C612FF-7402-4B5C-8646-B0039ADEC4D1}" dt="2026-10-30T10:28:21.765" v="43" actId="20577"/>
+        <pc:sldMkLst>
+          <pc:docMk/>
+          <pc:sldMk cId="0" sldId="259"/>
+        </pc:sldMkLst>
+        <pc:spChg chg="mod">
+          <ac:chgData name="Amal Ranawaka" userId="7880e1bd-1e72-41fc-b207-b1ec3632c44d" providerId="ADAL" clId="{12C612FF-7402-4B5C-8646-B0039ADEC4D1}" dt="2026-10-29T16:54:32.023" v="2" actId="20577"/>
+          <ac:spMkLst>
+            <pc:docMk/>
+            <pc:sldMk cId="0" sldId="259"/>
+            <ac:spMk id="7" creationId="{00000000-0000-0000-0000-000000000000}"/>
+          </ac:spMkLst>
+        </pc:spChg>
+        <pc:graphicFrameChg chg="modGraphic">
+          <ac:chgData name="Amal Ranawaka" userId="7880e1bd-1e72-41fc-b207-b1ec3632c44d" providerId="ADAL" clId="{12C612FF-7402-4B5C-8646-B0039ADEC4D1}" dt="2026-10-30T10:28:21.765" v="43" actId="20577"/>
+          <ac:graphicFrameMkLst>
+            <pc:docMk/>
+            <pc:sldMk cId="0" sldId="259"/>
+            <ac:graphicFrameMk id="5" creationId="{00000000-0000-0000-0000-000000000000}"/>
+          </ac:graphicFrameMkLst>
+        </pc:graphicFrameChg>
+      </pc:sldChg>
+      <pc:sldChg chg="delSp modSp mod">
+        <pc:chgData name="Amal Ranawaka" userId="7880e1bd-1e72-41fc-b207-b1ec3632c44d" providerId="ADAL" clId="{12C612FF-7402-4B5C-8646-B0039ADEC4D1}" dt="2026-10-29T17:01:51.850" v="42" actId="1076"/>
+        <pc:sldMkLst>
+          <pc:docMk/>
+          <pc:sldMk cId="0" sldId="263"/>
+        </pc:sldMkLst>
+        <pc:spChg chg="mod">
+          <ac:chgData name="Amal Ranawaka" userId="7880e1bd-1e72-41fc-b207-b1ec3632c44d" providerId="ADAL" clId="{12C612FF-7402-4B5C-8646-B0039ADEC4D1}" dt="2026-10-29T17:01:51.850" v="42" actId="1076"/>
+          <ac:spMkLst>
+            <pc:docMk/>
+            <pc:sldMk cId="0" sldId="263"/>
+            <ac:spMk id="12" creationId="{00000000-0000-0000-0000-000000000000}"/>
+          </ac:spMkLst>
+        </pc:spChg>
+        <pc:spChg chg="del">
+          <ac:chgData name="Amal Ranawaka" userId="7880e1bd-1e72-41fc-b207-b1ec3632c44d" providerId="ADAL" clId="{12C612FF-7402-4B5C-8646-B0039ADEC4D1}" dt="2026-10-29T17:01:02.888" v="5" actId="478"/>
+          <ac:spMkLst>
+            <pc:docMk/>
+            <pc:sldMk cId="0" sldId="263"/>
+            <ac:spMk id="14" creationId="{00000000-0000-0000-0000-000000000000}"/>
+          </ac:spMkLst>
+        </pc:spChg>
+        <pc:spChg chg="del">
+          <ac:chgData name="Amal Ranawaka" userId="7880e1bd-1e72-41fc-b207-b1ec3632c44d" providerId="ADAL" clId="{12C612FF-7402-4B5C-8646-B0039ADEC4D1}" dt="2026-10-29T17:01:04.373" v="6" actId="478"/>
+          <ac:spMkLst>
+            <pc:docMk/>
+            <pc:sldMk cId="0" sldId="263"/>
+            <ac:spMk id="15" creationId="{00000000-0000-0000-0000-000000000000}"/>
+          </ac:spMkLst>
+        </pc:spChg>
+      </pc:sldChg>
+    </pc:docChg>
+  </pc:docChgLst>
+</pc:chgInfo>
+</file>
+
 <file path=ppt/charts/chart1.xml><?xml version="1.0" encoding="utf-8"?>
-<c:chartSpace xmlns:c="http://schemas.openxmlformats.org/drawingml/2006/chart" xmlns:a="http://schemas.openxmlformats.org/drawingml/2006/main" xmlns:r="http://schemas.openxmlformats.org/officeDocument/2006/relationships">
+<c:chartSpace xmlns:c="http://schemas.openxmlformats.org/drawingml/2006/chart" xmlns:a="http://schemas.openxmlformats.org/drawingml/2006/main" xmlns:r="http://schemas.openxmlformats.org/officeDocument/2006/relationships" xmlns:c16r2="http://schemas.microsoft.com/office/drawing/2015/06/chart">
   <c:date1904 val="0"/>
+  <c:lang val="en-US"/>
   <c:roundedCorners val="1"/>
+  <c:style val="2"/>
   <c:chart>
     <c:title>
       <c:tx>
@@ -163,7 +248,7 @@
               </a:defRPr>
             </a:pPr>
             <a:r>
-              <a:rPr sz="1300" b="0" i="0" u="none" strike="noStrike">
+              <a:rPr lang="en-US" sz="1300" b="0" i="0" u="none" strike="noStrike">
                 <a:solidFill>
                   <a:srgbClr val="1C2430"/>
                 </a:solidFill>
@@ -174,7 +259,6 @@
           </a:p>
         </c:rich>
       </c:tx>
-      <c:layout/>
       <c:overlay val="0"/>
     </c:title>
     <c:autoTitleDeleted val="0"/>
@@ -207,18 +291,26 @@
           <c:invertIfNegative val="0"/>
           <c:dLbls>
             <c:numFmt formatCode="0.00" sourceLinked="0"/>
+            <c:spPr>
+              <a:noFill/>
+              <a:ln>
+                <a:noFill/>
+              </a:ln>
+              <a:effectLst/>
+            </c:spPr>
             <c:txPr>
               <a:bodyPr/>
               <a:lstStyle/>
               <a:p>
                 <a:pPr>
-                  <a:defRPr b="0" i="0" strike="noStrike" sz="1200" u="none">
+                  <a:defRPr sz="1200" b="0" i="0" u="none" strike="noStrike">
                     <a:solidFill>
                       <a:srgbClr val="1C2430"/>
                     </a:solidFill>
                     <a:latin typeface="+mn-lt"/>
                   </a:defRPr>
                 </a:pPr>
+                <a:endParaRPr lang="en-US"/>
               </a:p>
             </c:txPr>
             <c:showLegendKey val="0"/>
@@ -228,28 +320,31 @@
             <c:showPercent val="0"/>
             <c:showBubbleSize val="0"/>
             <c:showLeaderLines val="0"/>
+            <c:extLst>
+              <c:ext xmlns:c15="http://schemas.microsoft.com/office/drawing/2012/chart" uri="{CE6537A1-D6FC-4f65-9D91-7224C49458BB}">
+                <c15:showLeaderLines val="0"/>
+              </c:ext>
+            </c:extLst>
           </c:dLbls>
           <c:cat>
-            <c:multiLvlStrRef>
+            <c:strRef>
               <c:f>Sheet1!$A$2:$A$5</c:f>
-              <c:multiLvlStrCache>
+              <c:strCache>
                 <c:ptCount val="4"/>
-                <c:lvl>
-                  <c:pt idx="0">
-                    <c:v>Ridge</c:v>
-                  </c:pt>
-                  <c:pt idx="1">
-                    <c:v>Random Forest</c:v>
-                  </c:pt>
-                  <c:pt idx="2">
-                    <c:v>XGBoost</c:v>
-                  </c:pt>
-                  <c:pt idx="3">
-                    <c:v>CatBoost</c:v>
-                  </c:pt>
-                </c:lvl>
-              </c:multiLvlStrCache>
-            </c:multiLvlStrRef>
+                <c:pt idx="0">
+                  <c:v>Ridge</c:v>
+                </c:pt>
+                <c:pt idx="1">
+                  <c:v>Random Forest</c:v>
+                </c:pt>
+                <c:pt idx="2">
+                  <c:v>XGBoost</c:v>
+                </c:pt>
+                <c:pt idx="3">
+                  <c:v>CatBoost</c:v>
+                </c:pt>
+              </c:strCache>
+            </c:strRef>
           </c:cat>
           <c:val>
             <c:numRef>
@@ -258,20 +353,25 @@
                 <c:formatCode>General</c:formatCode>
                 <c:ptCount val="4"/>
                 <c:pt idx="0">
-                  <c:v>0.808</c:v>
+                  <c:v>0.80800000000000005</c:v>
                 </c:pt>
                 <c:pt idx="1">
-                  <c:v>0.827</c:v>
+                  <c:v>0.82699999999999996</c:v>
                 </c:pt>
                 <c:pt idx="2">
-                  <c:v>0.827</c:v>
+                  <c:v>0.82699999999999996</c:v>
                 </c:pt>
                 <c:pt idx="3">
-                  <c:v>0.825</c:v>
+                  <c:v>0.82499999999999996</c:v>
                 </c:pt>
               </c:numCache>
             </c:numRef>
           </c:val>
+          <c:extLst>
+            <c:ext xmlns:c16="http://schemas.microsoft.com/office/drawing/2014/chart" uri="{C3380CC4-5D6E-409C-BE32-E72D297353CC}">
+              <c16:uniqueId val="{00000000-D544-4B9D-A402-293BF61D6989}"/>
+            </c:ext>
+          </c:extLst>
         </c:ser>
         <c:ser>
           <c:idx val="1"/>
@@ -296,18 +396,26 @@
           <c:invertIfNegative val="0"/>
           <c:dLbls>
             <c:numFmt formatCode="0.00" sourceLinked="0"/>
+            <c:spPr>
+              <a:noFill/>
+              <a:ln>
+                <a:noFill/>
+              </a:ln>
+              <a:effectLst/>
+            </c:spPr>
             <c:txPr>
               <a:bodyPr/>
               <a:lstStyle/>
               <a:p>
                 <a:pPr>
-                  <a:defRPr b="0" i="0" strike="noStrike" sz="1200" u="none">
+                  <a:defRPr sz="1200" b="0" i="0" u="none" strike="noStrike">
                     <a:solidFill>
                       <a:srgbClr val="1C2430"/>
                     </a:solidFill>
                     <a:latin typeface="+mn-lt"/>
                   </a:defRPr>
                 </a:pPr>
+                <a:endParaRPr lang="en-US"/>
               </a:p>
             </c:txPr>
             <c:showLegendKey val="0"/>
@@ -317,28 +425,31 @@
             <c:showPercent val="0"/>
             <c:showBubbleSize val="0"/>
             <c:showLeaderLines val="0"/>
+            <c:extLst>
+              <c:ext xmlns:c15="http://schemas.microsoft.com/office/drawing/2012/chart" uri="{CE6537A1-D6FC-4f65-9D91-7224C49458BB}">
+                <c15:showLeaderLines val="0"/>
+              </c:ext>
+            </c:extLst>
           </c:dLbls>
           <c:cat>
-            <c:multiLvlStrRef>
+            <c:strRef>
               <c:f>Sheet1!$A$2:$A$5</c:f>
-              <c:multiLvlStrCache>
+              <c:strCache>
                 <c:ptCount val="4"/>
-                <c:lvl>
-                  <c:pt idx="0">
-                    <c:v>Ridge</c:v>
-                  </c:pt>
-                  <c:pt idx="1">
-                    <c:v>Random Forest</c:v>
-                  </c:pt>
-                  <c:pt idx="2">
-                    <c:v>XGBoost</c:v>
-                  </c:pt>
-                  <c:pt idx="3">
-                    <c:v>CatBoost</c:v>
-                  </c:pt>
-                </c:lvl>
-              </c:multiLvlStrCache>
-            </c:multiLvlStrRef>
+                <c:pt idx="0">
+                  <c:v>Ridge</c:v>
+                </c:pt>
+                <c:pt idx="1">
+                  <c:v>Random Forest</c:v>
+                </c:pt>
+                <c:pt idx="2">
+                  <c:v>XGBoost</c:v>
+                </c:pt>
+                <c:pt idx="3">
+                  <c:v>CatBoost</c:v>
+                </c:pt>
+              </c:strCache>
+            </c:strRef>
           </c:cat>
           <c:val>
             <c:numRef>
@@ -347,50 +458,37 @@
                 <c:formatCode>General</c:formatCode>
                 <c:ptCount val="4"/>
                 <c:pt idx="0">
-                  <c:v>0.541</c:v>
+                  <c:v>0.54100000000000004</c:v>
                 </c:pt>
                 <c:pt idx="1">
-                  <c:v>0.688</c:v>
+                  <c:v>0.68799999999999994</c:v>
                 </c:pt>
                 <c:pt idx="2">
-                  <c:v>0.665</c:v>
+                  <c:v>0.66500000000000004</c:v>
                 </c:pt>
                 <c:pt idx="3">
-                  <c:v>0.703</c:v>
+                  <c:v>0.70299999999999996</c:v>
                 </c:pt>
               </c:numCache>
             </c:numRef>
           </c:val>
+          <c:extLst>
+            <c:ext xmlns:c16="http://schemas.microsoft.com/office/drawing/2014/chart" uri="{C3380CC4-5D6E-409C-BE32-E72D297353CC}">
+              <c16:uniqueId val="{00000001-D544-4B9D-A402-293BF61D6989}"/>
+            </c:ext>
+          </c:extLst>
         </c:ser>
         <c:dLbls>
-          <c:numFmt formatCode="0.00" sourceLinked="0"/>
-          <c:txPr>
-            <a:bodyPr/>
-            <a:lstStyle/>
-            <a:p>
-              <a:pPr>
-                <a:defRPr b="0" i="0" strike="noStrike" sz="1200" u="none">
-                  <a:solidFill>
-                    <a:srgbClr val="1C2430"/>
-                  </a:solidFill>
-                  <a:latin typeface="+mn-lt"/>
-                </a:defRPr>
-              </a:pPr>
-            </a:p>
-          </c:txPr>
           <c:showLegendKey val="0"/>
           <c:showVal val="1"/>
           <c:showCatName val="0"/>
           <c:showSerName val="0"/>
           <c:showPercent val="0"/>
           <c:showBubbleSize val="0"/>
-          <c:showLeaderLines val="0"/>
         </c:dLbls>
         <c:gapWidth val="70"/>
-        <c:overlap val="0"/>
         <c:axId val="2094734554"/>
         <c:axId val="2094734552"/>
-        <c:axId val="2094734556"/>
       </c:barChart>
       <c:catAx>
         <c:axId val="2094734554"/>
@@ -431,6 +529,7 @@
         <c:crosses val="autoZero"/>
         <c:auto val="1"/>
         <c:lblAlgn val="ctr"/>
+        <c:lblOffset val="100"/>
         <c:noMultiLvlLbl val="1"/>
       </c:catAx>
       <c:valAx>
@@ -446,30 +545,6 @@
         <c:majorTickMark val="out"/>
         <c:minorTickMark val="none"/>
         <c:tickLblPos val="nextTo"/>
-        <c:spPr>
-          <a:ln w="12700" cap="flat">
-            <a:solidFill>
-              <a:srgbClr val="888888"/>
-            </a:solidFill>
-            <a:prstDash val="solid"/>
-            <a:round/>
-          </a:ln>
-        </c:spPr>
-        <c:txPr>
-          <a:bodyPr/>
-          <a:lstStyle/>
-          <a:p>
-            <a:pPr>
-              <a:defRPr sz="1200" b="0" i="0" u="none" strike="noStrike">
-                <a:solidFill>
-                  <a:srgbClr val="000000"/>
-                </a:solidFill>
-                <a:latin typeface="+mn-lt"/>
-              </a:defRPr>
-            </a:pPr>
-            <a:endParaRPr lang="en-US"/>
-          </a:p>
-        </c:txPr>
         <c:crossAx val="2094734554"/>
         <c:crosses val="autoZero"/>
         <c:crossBetween val="between"/>
@@ -504,6 +579,7 @@
     </c:legend>
     <c:plotVisOnly val="1"/>
     <c:dispBlanksAs val="span"/>
+    <c:showDLblsOverMax val="1"/>
   </c:chart>
   <c:spPr>
     <a:noFill/>
@@ -519,9 +595,11 @@
 </file>
 
 <file path=ppt/charts/chart2.xml><?xml version="1.0" encoding="utf-8"?>
-<c:chartSpace xmlns:c="http://schemas.openxmlformats.org/drawingml/2006/chart" xmlns:a="http://schemas.openxmlformats.org/drawingml/2006/main" xmlns:r="http://schemas.openxmlformats.org/officeDocument/2006/relationships">
+<c:chartSpace xmlns:c="http://schemas.openxmlformats.org/drawingml/2006/chart" xmlns:a="http://schemas.openxmlformats.org/drawingml/2006/main" xmlns:r="http://schemas.openxmlformats.org/officeDocument/2006/relationships" xmlns:c16r2="http://schemas.microsoft.com/office/drawing/2015/06/chart">
   <c:date1904 val="0"/>
+  <c:lang val="en-US"/>
   <c:roundedCorners val="1"/>
+  <c:style val="2"/>
   <c:chart>
     <c:title>
       <c:tx>
@@ -538,7 +616,7 @@
               </a:defRPr>
             </a:pPr>
             <a:r>
-              <a:rPr sz="1300" b="0" i="0" u="none" strike="noStrike">
+              <a:rPr lang="en-US" sz="1300" b="0" i="0" u="none" strike="noStrike">
                 <a:solidFill>
                   <a:srgbClr val="1C2430"/>
                 </a:solidFill>
@@ -549,7 +627,6 @@
           </a:p>
         </c:rich>
       </c:tx>
-      <c:layout/>
       <c:overlay val="0"/>
     </c:title>
     <c:autoTitleDeleted val="0"/>
@@ -593,6 +670,11 @@
               </a:solidFill>
               <a:effectLst/>
             </c:spPr>
+            <c:extLst>
+              <c:ext xmlns:c16="http://schemas.microsoft.com/office/drawing/2014/chart" uri="{C3380CC4-5D6E-409C-BE32-E72D297353CC}">
+                <c16:uniqueId val="{00000001-A4BE-4EBA-9790-AAABFD5F5CCB}"/>
+              </c:ext>
+            </c:extLst>
           </c:dPt>
           <c:dPt>
             <c:idx val="1"/>
@@ -603,6 +685,11 @@
               </a:solidFill>
               <a:effectLst/>
             </c:spPr>
+            <c:extLst>
+              <c:ext xmlns:c16="http://schemas.microsoft.com/office/drawing/2014/chart" uri="{C3380CC4-5D6E-409C-BE32-E72D297353CC}">
+                <c16:uniqueId val="{00000003-A4BE-4EBA-9790-AAABFD5F5CCB}"/>
+              </c:ext>
+            </c:extLst>
           </c:dPt>
           <c:dPt>
             <c:idx val="2"/>
@@ -613,6 +700,11 @@
               </a:solidFill>
               <a:effectLst/>
             </c:spPr>
+            <c:extLst>
+              <c:ext xmlns:c16="http://schemas.microsoft.com/office/drawing/2014/chart" uri="{C3380CC4-5D6E-409C-BE32-E72D297353CC}">
+                <c16:uniqueId val="{00000005-A4BE-4EBA-9790-AAABFD5F5CCB}"/>
+              </c:ext>
+            </c:extLst>
           </c:dPt>
           <c:dLbls>
             <c:dLbl>
@@ -631,6 +723,7 @@
                       <a:latin typeface="+mn-lt"/>
                     </a:defRPr>
                   </a:pPr>
+                  <a:endParaRPr lang="en-US"/>
                 </a:p>
               </c:txPr>
               <c:showLegendKey val="0"/>
@@ -639,6 +732,12 @@
               <c:showSerName val="0"/>
               <c:showPercent val="0"/>
               <c:showBubbleSize val="0"/>
+              <c:extLst>
+                <c:ext xmlns:c15="http://schemas.microsoft.com/office/drawing/2012/chart" uri="{CE6537A1-D6FC-4f65-9D91-7224C49458BB}"/>
+                <c:ext xmlns:c16="http://schemas.microsoft.com/office/drawing/2014/chart" uri="{C3380CC4-5D6E-409C-BE32-E72D297353CC}">
+                  <c16:uniqueId val="{00000001-A4BE-4EBA-9790-AAABFD5F5CCB}"/>
+                </c:ext>
+              </c:extLst>
             </c:dLbl>
             <c:dLbl>
               <c:idx val="1"/>
@@ -656,6 +755,7 @@
                       <a:latin typeface="+mn-lt"/>
                     </a:defRPr>
                   </a:pPr>
+                  <a:endParaRPr lang="en-US"/>
                 </a:p>
               </c:txPr>
               <c:showLegendKey val="0"/>
@@ -664,6 +764,12 @@
               <c:showSerName val="0"/>
               <c:showPercent val="0"/>
               <c:showBubbleSize val="0"/>
+              <c:extLst>
+                <c:ext xmlns:c15="http://schemas.microsoft.com/office/drawing/2012/chart" uri="{CE6537A1-D6FC-4f65-9D91-7224C49458BB}"/>
+                <c:ext xmlns:c16="http://schemas.microsoft.com/office/drawing/2014/chart" uri="{C3380CC4-5D6E-409C-BE32-E72D297353CC}">
+                  <c16:uniqueId val="{00000003-A4BE-4EBA-9790-AAABFD5F5CCB}"/>
+                </c:ext>
+              </c:extLst>
             </c:dLbl>
             <c:dLbl>
               <c:idx val="2"/>
@@ -681,6 +787,7 @@
                       <a:latin typeface="+mn-lt"/>
                     </a:defRPr>
                   </a:pPr>
+                  <a:endParaRPr lang="en-US"/>
                 </a:p>
               </c:txPr>
               <c:showLegendKey val="0"/>
@@ -689,8 +796,21 @@
               <c:showSerName val="0"/>
               <c:showPercent val="0"/>
               <c:showBubbleSize val="0"/>
+              <c:extLst>
+                <c:ext xmlns:c15="http://schemas.microsoft.com/office/drawing/2012/chart" uri="{CE6537A1-D6FC-4f65-9D91-7224C49458BB}"/>
+                <c:ext xmlns:c16="http://schemas.microsoft.com/office/drawing/2014/chart" uri="{C3380CC4-5D6E-409C-BE32-E72D297353CC}">
+                  <c16:uniqueId val="{00000005-A4BE-4EBA-9790-AAABFD5F5CCB}"/>
+                </c:ext>
+              </c:extLst>
             </c:dLbl>
             <c:numFmt formatCode="0&quot;%&quot;" sourceLinked="0"/>
+            <c:spPr>
+              <a:noFill/>
+              <a:ln>
+                <a:noFill/>
+              </a:ln>
+              <a:effectLst/>
+            </c:spPr>
             <c:txPr>
               <a:bodyPr/>
               <a:lstStyle/>
@@ -703,6 +823,7 @@
                     <a:latin typeface="Arial"/>
                   </a:defRPr>
                 </a:pPr>
+                <a:endParaRPr lang="en-US"/>
               </a:p>
             </c:txPr>
             <c:showLegendKey val="0"/>
@@ -712,6 +833,9 @@
             <c:showPercent val="1"/>
             <c:showBubbleSize val="0"/>
             <c:showLeaderLines val="0"/>
+            <c:extLst>
+              <c:ext xmlns:c15="http://schemas.microsoft.com/office/drawing/2012/chart" uri="{CE6537A1-D6FC-4f65-9D91-7224C49458BB}"/>
+            </c:extLst>
           </c:dLbls>
           <c:cat>
             <c:strRef>
@@ -734,6 +858,7 @@
             <c:numRef>
               <c:f>Sheet1!$B$2:$B$4</c:f>
               <c:numCache>
+                <c:formatCode>General</c:formatCode>
                 <c:ptCount val="3"/>
                 <c:pt idx="0">
                   <c:v>87.1</c:v>
@@ -747,7 +872,21 @@
               </c:numCache>
             </c:numRef>
           </c:val>
+          <c:extLst>
+            <c:ext xmlns:c16="http://schemas.microsoft.com/office/drawing/2014/chart" uri="{C3380CC4-5D6E-409C-BE32-E72D297353CC}">
+              <c16:uniqueId val="{00000006-A4BE-4EBA-9790-AAABFD5F5CCB}"/>
+            </c:ext>
+          </c:extLst>
         </c:ser>
+        <c:dLbls>
+          <c:showLegendKey val="0"/>
+          <c:showVal val="0"/>
+          <c:showCatName val="0"/>
+          <c:showSerName val="0"/>
+          <c:showPercent val="0"/>
+          <c:showBubbleSize val="0"/>
+          <c:showLeaderLines val="0"/>
+        </c:dLbls>
         <c:firstSliceAng val="0"/>
         <c:holeSize val="58"/>
       </c:doughnutChart>
@@ -781,6 +920,7 @@
     </c:legend>
     <c:plotVisOnly val="1"/>
     <c:dispBlanksAs val="span"/>
+    <c:showDLblsOverMax val="1"/>
   </c:chart>
   <c:spPr>
     <a:noFill/>
@@ -817,234 +957,10 @@
           <a:chExt cx="0" cy="0"/>
         </a:xfrm>
       </p:grpSpPr>
-      <p:sp>
-        <p:nvSpPr>
-          <p:cNvPr id="2" name="Header Placeholder 1"/>
-          <p:cNvSpPr>
-            <a:spLocks noGrp="1"/>
-          </p:cNvSpPr>
-          <p:nvPr>
-            <p:ph type="hdr" sz="quarter"/>
-          </p:nvPr>
-        </p:nvSpPr>
-        <p:spPr>
-          <a:xfrm>
-            <a:off x="0" y="0"/>
-            <a:ext cx="2971800" cy="458788"/>
-          </a:xfrm>
-          <a:prstGeom prst="rect">
-            <a:avLst/>
-          </a:prstGeom>
-        </p:spPr>
-        <p:txBody>
-          <a:bodyPr vert="horz" lIns="91440" tIns="45720" rIns="91440" bIns="45720" rtlCol="0"/>
-          <a:lstStyle>
-            <a:lvl1pPr algn="l">
-              <a:defRPr sz="1200"/>
-            </a:lvl1pPr>
-          </a:lstStyle>
-          <a:p>
-            <a:endParaRPr lang="en-US"/>
-          </a:p>
-        </p:txBody>
-      </p:sp>
-      <p:sp>
-        <p:nvSpPr>
-          <p:cNvPr id="3" name="Date Placeholder 2"/>
-          <p:cNvSpPr>
-            <a:spLocks noGrp="1"/>
-          </p:cNvSpPr>
-          <p:nvPr>
-            <p:ph type="dt" idx="1"/>
-          </p:nvPr>
-        </p:nvSpPr>
-        <p:spPr>
-          <a:xfrm>
-            <a:off x="3884613" y="0"/>
-            <a:ext cx="2971800" cy="458788"/>
-          </a:xfrm>
-          <a:prstGeom prst="rect">
-            <a:avLst/>
-          </a:prstGeom>
-        </p:spPr>
-        <p:txBody>
-          <a:bodyPr vert="horz" lIns="91440" tIns="45720" rIns="91440" bIns="45720" rtlCol="0"/>
-          <a:lstStyle>
-            <a:lvl1pPr algn="r">
-              <a:defRPr sz="1200"/>
-            </a:lvl1pPr>
-          </a:lstStyle>
-          <a:p>
-            <a:fld id="{5282F153-3F37-0F45-9E97-73ACFA13230C}" type="datetimeFigureOut">
-              <a:rPr lang="en-US"/>
-              <a:t>7/23/19</a:t>
-            </a:fld>
-            <a:endParaRPr lang="en-US"/>
-          </a:p>
-        </p:txBody>
-      </p:sp>
-      <p:sp>
-        <p:nvSpPr>
-          <p:cNvPr id="4" name="Slide Image Placeholder 3"/>
-          <p:cNvSpPr>
-            <a:spLocks noGrp="1" noRot="1" noChangeAspect="1"/>
-          </p:cNvSpPr>
-          <p:nvPr>
-            <p:ph type="sldImg" idx="2"/>
-          </p:nvPr>
-        </p:nvSpPr>
-        <p:spPr>
-          <a:xfrm>
-            <a:off x="685800" y="1143000"/>
-            <a:ext cx="5486400" cy="3086100"/>
-          </a:xfrm>
-          <a:prstGeom prst="rect">
-            <a:avLst/>
-          </a:prstGeom>
-          <a:noFill/>
-          <a:ln w="12700">
-            <a:solidFill>
-              <a:prstClr val="black"/>
-            </a:solidFill>
-          </a:ln>
-        </p:spPr>
-        <p:txBody>
-          <a:bodyPr vert="horz" lIns="91440" tIns="45720" rIns="91440" bIns="45720" rtlCol="0" anchor="ctr"/>
-          <a:lstStyle/>
-          <a:p>
-            <a:endParaRPr lang="en-US"/>
-          </a:p>
-        </p:txBody>
-      </p:sp>
-      <p:sp>
-        <p:nvSpPr>
-          <p:cNvPr id="5" name="Notes Placeholder 4"/>
-          <p:cNvSpPr>
-            <a:spLocks noGrp="1"/>
-          </p:cNvSpPr>
-          <p:nvPr>
-            <p:ph type="body" sz="quarter" idx="3"/>
-          </p:nvPr>
-        </p:nvSpPr>
-        <p:spPr>
-          <a:xfrm>
-            <a:off x="685800" y="4400550"/>
-            <a:ext cx="5486400" cy="3600450"/>
-          </a:xfrm>
-          <a:prstGeom prst="rect">
-            <a:avLst/>
-          </a:prstGeom>
-        </p:spPr>
-        <p:txBody>
-          <a:bodyPr vert="horz" lIns="91440" tIns="45720" rIns="91440" bIns="45720" rtlCol="0"/>
-          <a:lstStyle/>
-          <a:p>
-            <a:pPr lvl="0"/>
-            <a:r>
-              <a:rPr lang="en-US"/>
-              <a:t>Click to edit Master text styles</a:t>
-            </a:r>
-          </a:p>
-          <a:p>
-            <a:pPr lvl="1"/>
-            <a:r>
-              <a:rPr lang="en-US"/>
-              <a:t>Second level</a:t>
-            </a:r>
-          </a:p>
-          <a:p>
-            <a:pPr lvl="2"/>
-            <a:r>
-              <a:rPr lang="en-US"/>
-              <a:t>Third level</a:t>
-            </a:r>
-          </a:p>
-          <a:p>
-            <a:pPr lvl="3"/>
-            <a:r>
-              <a:rPr lang="en-US"/>
-              <a:t>Fourth level</a:t>
-            </a:r>
-          </a:p>
-          <a:p>
-            <a:pPr lvl="4"/>
-            <a:r>
-              <a:rPr lang="en-US"/>
-              <a:t>Fifth level</a:t>
-            </a:r>
-          </a:p>
-        </p:txBody>
-      </p:sp>
-      <p:sp>
-        <p:nvSpPr>
-          <p:cNvPr id="6" name="Footer Placeholder 5"/>
-          <p:cNvSpPr>
-            <a:spLocks noGrp="1"/>
-          </p:cNvSpPr>
-          <p:nvPr>
-            <p:ph type="ftr" sz="quarter" idx="4"/>
-          </p:nvPr>
-        </p:nvSpPr>
-        <p:spPr>
-          <a:xfrm>
-            <a:off x="0" y="8685213"/>
-            <a:ext cx="2971800" cy="458787"/>
-          </a:xfrm>
-          <a:prstGeom prst="rect">
-            <a:avLst/>
-          </a:prstGeom>
-        </p:spPr>
-        <p:txBody>
-          <a:bodyPr vert="horz" lIns="91440" tIns="45720" rIns="91440" bIns="45720" rtlCol="0" anchor="b"/>
-          <a:lstStyle>
-            <a:lvl1pPr algn="l">
-              <a:defRPr sz="1200"/>
-            </a:lvl1pPr>
-          </a:lstStyle>
-          <a:p>
-            <a:endParaRPr lang="en-US"/>
-          </a:p>
-        </p:txBody>
-      </p:sp>
-      <p:sp>
-        <p:nvSpPr>
-          <p:cNvPr id="7" name="Slide Number Placeholder 6"/>
-          <p:cNvSpPr>
-            <a:spLocks noGrp="1"/>
-          </p:cNvSpPr>
-          <p:nvPr>
-            <p:ph type="sldNum" sz="quarter" idx="5"/>
-          </p:nvPr>
-        </p:nvSpPr>
-        <p:spPr>
-          <a:xfrm>
-            <a:off x="3884613" y="8685213"/>
-            <a:ext cx="2971800" cy="458787"/>
-          </a:xfrm>
-          <a:prstGeom prst="rect">
-            <a:avLst/>
-          </a:prstGeom>
-        </p:spPr>
-        <p:txBody>
-          <a:bodyPr vert="horz" lIns="91440" tIns="45720" rIns="91440" bIns="45720" rtlCol="0" anchor="b"/>
-          <a:lstStyle>
-            <a:lvl1pPr algn="r">
-              <a:defRPr sz="1200"/>
-            </a:lvl1pPr>
-          </a:lstStyle>
-          <a:p>
-            <a:fld id="{CE5E9CC1-C706-0F49-92D6-E571CC5EEA8F}" type="slidenum">
-              <a:rPr lang="en-US"/>
-              <a:t>‹#›</a:t>
-            </a:fld>
-            <a:endParaRPr lang="en-US"/>
-          </a:p>
-        </p:txBody>
-      </p:sp>
     </p:spTree>
     <p:extLst>
       <p:ext uri="{BB962C8B-B14F-4D97-AF65-F5344CB8AC3E}">
-        <p14:creationId xmlns:p14="http://schemas.microsoft.com/office/powerpoint/2010/main" val="1024086991"/>
+        <p14:creationId xmlns:p14="http://schemas.microsoft.com/office/powerpoint/2010/main" val="1913328157"/>
       </p:ext>
     </p:extLst>
   </p:cSld>
@@ -1192,7 +1108,6 @@
               <a:rPr lang="en-US" dirty="0"/>
               <a:t>[0:25] This project predicts land prices in the Colombo district. Land is the biggest purchase most Sri Lankan families make, but there is no public, plot-level price guide - people judge prices from a few online ads, and similar plots are advertised at very different prices. So I built a model that estimates a fair asking price per perch from a plot's area, size and land type, and put it in a live web app.</a:t>
             </a:r>
-            <a:endParaRPr lang="en-US" dirty="0"/>
           </a:p>
         </p:txBody>
       </p:sp>
@@ -1280,7 +1195,6 @@
               <a:rPr lang="en-US" dirty="0"/>
               <a:t>Appendix - only for questions. Every model chose strong regularisation, consistent with little signal within an area beyond size and type.</a:t>
             </a:r>
-            <a:endParaRPr lang="en-US" dirty="0"/>
           </a:p>
         </p:txBody>
       </p:sp>
@@ -1368,7 +1282,6 @@
               <a:rPr lang="en-US" dirty="0"/>
               <a:t>[0:40] The data is 4,494 real land advertisements from the Colombo district, posted in 2021. I chose price per perch as the target, because it makes plots of different sizes comparable, and I dropped the advertised total price because it would leak the answer. Three listings were priced per acre and never converted, so I fixed them, and I removed duplicates. And because prices are extremely skewed, removing outliers directly would have thrown away 297 genuine expensive plots in central Colombo - so I log-transformed the price first, which left only 21 real outliers. That gave 4,275 clean listings.</a:t>
             </a:r>
-            <a:endParaRPr lang="en-US" dirty="0"/>
           </a:p>
         </p:txBody>
       </p:sp>
@@ -1456,7 +1369,6 @@
               <a:rPr lang="en-US" dirty="0"/>
               <a:t>[0:30] The exploratory analysis showed one thing very clearly: location sets the price. The median price per perch differs 84 times between the cheapest area, Kosgama, and the most expensive, Kurunduwatta in central Colombo. Distance from Colombo Fort has a correlation of minus 0.81 with price. And the location features are strongly correlated with each other - they mostly describe one thing: how central and built-up an area is.</a:t>
             </a:r>
-            <a:endParaRPr lang="en-US" dirty="0"/>
           </a:p>
         </p:txBody>
       </p:sp>
@@ -1544,7 +1456,6 @@
               <a:rPr lang="en-US" dirty="0"/>
               <a:t>[0:55] This table compares every model I trained. Ridge, Random Forest, XGBoost, LightGBM, CatBoost and stacking were all taught in the module. My new algorithm is NGBoost, which was not covered in the lectures. Every taught model predicts one number; NGBoost predicts a whole probability distribution of the price, using natural gradient boosting, so it can give a price range. After tuning with five-fold cross-validation it ranks third of eight, with an R-squared of 0.863, and its 80 percent ranges contain 82 percent of actual prices. Tuning helped every model: about 0.83 with default settings, 0.86 tuned. The final price model is the stacking ensemble, which had the lowest cross-validated error and a median error of about 12 percent.</a:t>
             </a:r>
-            <a:endParaRPr lang="en-US" dirty="0"/>
           </a:p>
         </p:txBody>
       </p:sp>
@@ -1632,7 +1543,6 @@
               <a:rPr lang="en-US" dirty="0"/>
               <a:t>[0:40] The most important finding came from the data itself. All 27 location features have exactly one value per area - they were calculated from the area name, not from each plot. So 81 percent of price variation is between areas. When I tested the models on areas they had never seen, accuracy dropped - but that is where the tree models clearly beat the linear model: R-squared 0.70 against 0.54. Because of this, the app only offers areas the model knows.</a:t>
             </a:r>
-            <a:endParaRPr lang="en-US" dirty="0"/>
           </a:p>
         </p:txBody>
       </p:sp>
@@ -1720,7 +1630,6 @@
               <a:rPr lang="en-US" dirty="0"/>
               <a:t>[0:40] To explain the model I used SHAP and LIME on the final ensemble. SHAP shows that location drives 87 percent of the model's decisions, land type 9 and land size 4. For a single held-out plot in Dampe, the waterfall shows why it was priced low: it is 28 kilometres from Fort, Dampe is a low-priced area, and the nearest grade-A school is far away. LIME, which works in a completely different way, agreed on the same top three drivers, and CatBoost's own exact SHAP values show the same 87 percent location share.</a:t>
             </a:r>
-            <a:endParaRPr lang="en-US" dirty="0"/>
           </a:p>
         </p:txBody>
       </p:sp>
@@ -1808,7 +1717,6 @@
               <a:rPr lang="en-US" dirty="0"/>
               <a:t>[0:45] Here is the deployed application. [Switch to the browser.] I choose an area and a size. Battaramulla, about 11 kilometres from Fort, comes out at about 2.6 million rupees per perch, in the high band; Kaduwela, further out, at about 460,000, in the low band. Under each price, NGBoost gives a likely range, for Battaramulla about 1.5 to 4 million, and SHAP explains it: Battaramulla's location roughly doubles the price compared with a typical plot. Behind it is a GitHub repository with 17 automated tests, a retraining pipeline with a quality gate, and automatic redeployment. [Switch back to the slides.]</a:t>
             </a:r>
-            <a:endParaRPr lang="en-US" dirty="0"/>
           </a:p>
         </p:txBody>
       </p:sp>
@@ -1896,7 +1804,6 @@
               <a:rPr lang="en-US" dirty="0"/>
               <a:t>[0:15] To conclude: all tuned models perform almost the same, so the data - not the algorithm - limits the accuracy. The main limitations are asking prices rather than sale prices, 2021 data, and location recorded per area. Per-plot location data would improve the model most. Thank you - I am happy to take questions.</a:t>
             </a:r>
-            <a:endParaRPr lang="en-US" dirty="0"/>
           </a:p>
         </p:txBody>
       </p:sp>
@@ -1984,7 +1891,6 @@
               <a:rPr lang="en-US" dirty="0"/>
               <a:t>Appendix - only for questions. Final model selected on cross-validated RMSE (lowest: stacking, 0.4265), not on the test set.</a:t>
             </a:r>
-            <a:endParaRPr lang="en-US" dirty="0"/>
           </a:p>
         </p:txBody>
       </p:sp>
@@ -2062,6 +1968,7 @@
         <a:solidFill>
           <a:schemeClr val="tx2"/>
         </a:solidFill>
+        <a:effectLst/>
       </p:bgPr>
     </p:bg>
     <p:spTree>
@@ -2081,9 +1988,11 @@
       <p:sp>
         <p:nvSpPr>
           <p:cNvPr id="2" name="Text 0"/>
-          <p:cNvSpPr/>
+          <p:cNvSpPr>
+            <a:spLocks noGrp="1"/>
+          </p:cNvSpPr>
           <p:nvPr>
-            <p:ph idx="100" type="title" hasCustomPrompt="1"/>
+            <p:ph type="title" idx="100" hasCustomPrompt="1"/>
           </p:nvPr>
         </p:nvSpPr>
         <p:spPr>
@@ -2100,7 +2009,7 @@
         <p:txBody>
           <a:bodyPr wrap="square" rtlCol="0"/>
           <a:lstStyle>
-            <a:lvl1pPr algn="l" indent="0" marL="0">
+            <a:lvl1pPr marL="0" indent="0" algn="l">
               <a:buNone/>
               <a:defRPr lang="en-US" sz="4400" b="1" dirty="0">
                 <a:solidFill>
@@ -2110,7 +2019,7 @@
             </a:lvl1pPr>
           </a:lstStyle>
           <a:p>
-            <a:pPr algn="l" indent="0" marL="0">
+            <a:pPr marL="0" indent="0" algn="l">
               <a:buNone/>
             </a:pPr>
             <a:endParaRPr lang="en-US" sz="4400" dirty="0"/>
@@ -2120,9 +2029,11 @@
       <p:sp>
         <p:nvSpPr>
           <p:cNvPr id="3" name="Text 0"/>
-          <p:cNvSpPr/>
+          <p:cNvSpPr>
+            <a:spLocks noGrp="1"/>
+          </p:cNvSpPr>
           <p:nvPr>
-            <p:ph idx="101" type="body" hasCustomPrompt="1"/>
+            <p:ph type="body" idx="101" hasCustomPrompt="1"/>
           </p:nvPr>
         </p:nvSpPr>
         <p:spPr>
@@ -2139,7 +2050,7 @@
         <p:txBody>
           <a:bodyPr wrap="square" rtlCol="0"/>
           <a:lstStyle>
-            <a:lvl1pPr indent="0" marL="0">
+            <a:lvl1pPr marL="0" indent="0">
               <a:buNone/>
               <a:defRPr lang="en-US" sz="2000" dirty="0">
                 <a:solidFill>
@@ -2149,7 +2060,7 @@
             </a:lvl1pPr>
           </a:lstStyle>
           <a:p>
-            <a:pPr indent="0" marL="0">
+            <a:pPr marL="0" indent="0">
               <a:buNone/>
             </a:pPr>
             <a:endParaRPr lang="en-US" sz="2000" dirty="0"/>
@@ -2172,6 +2083,7 @@
         <a:solidFill>
           <a:schemeClr val="bg1"/>
         </a:solidFill>
+        <a:effectLst/>
       </p:bgPr>
     </p:bg>
     <p:spTree>
@@ -2191,9 +2103,11 @@
       <p:sp>
         <p:nvSpPr>
           <p:cNvPr id="2" name="Text 0"/>
-          <p:cNvSpPr/>
+          <p:cNvSpPr>
+            <a:spLocks noGrp="1"/>
+          </p:cNvSpPr>
           <p:nvPr>
-            <p:ph idx="100" type="title" hasCustomPrompt="1"/>
+            <p:ph type="title" idx="100" hasCustomPrompt="1"/>
           </p:nvPr>
         </p:nvSpPr>
         <p:spPr>
@@ -2210,7 +2124,7 @@
         <p:txBody>
           <a:bodyPr wrap="square" rtlCol="0"/>
           <a:lstStyle>
-            <a:lvl1pPr indent="0" marL="0">
+            <a:lvl1pPr marL="0" indent="0">
               <a:buNone/>
               <a:defRPr lang="en-US" sz="3200" b="1" dirty="0">
                 <a:solidFill>
@@ -2220,7 +2134,7 @@
             </a:lvl1pPr>
           </a:lstStyle>
           <a:p>
-            <a:pPr indent="0" marL="0">
+            <a:pPr marL="0" indent="0">
               <a:buNone/>
             </a:pPr>
             <a:endParaRPr lang="en-US" sz="3200" dirty="0"/>
@@ -2248,7 +2162,7 @@
           <a:bodyPr wrap="square" lIns="0" tIns="0" rIns="0" bIns="0" rtlCol="0" anchor="ctr"/>
           <a:lstStyle/>
           <a:p>
-            <a:pPr indent="0" marL="0">
+            <a:pPr marL="0" indent="0">
               <a:buNone/>
             </a:pPr>
             <a:r>
@@ -2283,7 +2197,7 @@
           </a:prstGeom>
           <a:extLst>
             <a:ext uri="{C572A759-6A51-4108-AA02-DFA0A04FC94B}">
-              <ma14:wrappingTextBoxFlag xmlns:ma14="http://schemas.microsoft.com/office/mac/drawingml/2011/main" val="0"/>
+              <ma14:wrappingTextBoxFlag xmlns="" xmlns:ma14="http://schemas.microsoft.com/office/mac/drawingml/2011/main" val="0"/>
             </a:ext>
           </a:extLst>
         </p:spPr>
@@ -2301,8 +2215,8 @@
           <a:p>
             <a:pPr algn="r"/>
             <a:fld id="{F7021451-1387-4CA6-816F-3879F97B5CBC}" type="slidenum">
-              <a:rPr b="0" lang="en-US"/>
-              <a:t>1003</a:t>
+              <a:rPr lang="en-US" b="0"/>
+              <a:t>‹#›</a:t>
             </a:fld>
             <a:endParaRPr lang="en-US"/>
           </a:p>
@@ -2319,6 +2233,11 @@
 <file path=ppt/slideMasters/slideMaster1.xml><?xml version="1.0" encoding="utf-8"?>
 <p:sldMaster xmlns:a="http://schemas.openxmlformats.org/drawingml/2006/main" xmlns:r="http://schemas.openxmlformats.org/officeDocument/2006/relationships" xmlns:p="http://schemas.openxmlformats.org/presentationml/2006/main">
   <p:cSld>
+    <p:bg>
+      <p:bgRef idx="1001">
+        <a:schemeClr val="bg1"/>
+      </p:bgRef>
+    </p:bg>
     <p:spTree>
       <p:nvGrpSpPr>
         <p:cNvPr id="1" name=""/>
@@ -2353,7 +2272,7 @@
           </a:prstGeom>
           <a:extLst>
             <a:ext uri="{C572A759-6A51-4108-AA02-DFA0A04FC94B}">
-              <ma14:wrappingTextBoxFlag xmlns:ma14="http://schemas.microsoft.com/office/mac/drawingml/2011/main" val="0"/>
+              <ma14:wrappingTextBoxFlag xmlns="" xmlns:ma14="http://schemas.microsoft.com/office/mac/drawingml/2011/main" val="0"/>
             </a:ext>
           </a:extLst>
         </p:spPr>
@@ -2371,8 +2290,8 @@
           <a:p>
             <a:pPr algn="r"/>
             <a:fld id="{F7021451-1387-4CA6-816F-3879F97B5CBC}" type="slidenum">
-              <a:rPr b="0" lang="en-US"/>
-              <a:t>null</a:t>
+              <a:rPr lang="en-US" b="0"/>
+              <a:t>‹#›</a:t>
             </a:fld>
             <a:endParaRPr lang="en-US"/>
           </a:p>
@@ -2660,9 +2579,11 @@
       <p:sp>
         <p:nvSpPr>
           <p:cNvPr id="2" name="Text 0"/>
-          <p:cNvSpPr/>
+          <p:cNvSpPr>
+            <a:spLocks noGrp="1"/>
+          </p:cNvSpPr>
           <p:nvPr>
-            <p:ph idx="100" type="title" hasCustomPrompt="1"/>
+            <p:ph type="title" idx="100" hasCustomPrompt="1"/>
           </p:nvPr>
         </p:nvSpPr>
         <p:spPr>
@@ -2680,7 +2601,7 @@
           <a:bodyPr wrap="square" lIns="0" tIns="0" rIns="0" bIns="0" rtlCol="0" anchor="b"/>
           <a:lstStyle/>
           <a:p>
-            <a:pPr algn="l" indent="0" marL="0">
+            <a:pPr marL="0" indent="0" algn="l">
               <a:buNone/>
             </a:pPr>
             <a:r>
@@ -2698,9 +2619,11 @@
       <p:sp>
         <p:nvSpPr>
           <p:cNvPr id="3" name="Text 0"/>
-          <p:cNvSpPr/>
+          <p:cNvSpPr>
+            <a:spLocks noGrp="1"/>
+          </p:cNvSpPr>
           <p:nvPr>
-            <p:ph idx="101" type="body" hasCustomPrompt="1"/>
+            <p:ph type="body" idx="101" hasCustomPrompt="1"/>
           </p:nvPr>
         </p:nvSpPr>
         <p:spPr>
@@ -2718,7 +2641,7 @@
           <a:bodyPr wrap="square" lIns="0" tIns="0" rIns="0" bIns="0" rtlCol="0" anchor="t"/>
           <a:lstStyle/>
           <a:p>
-            <a:pPr indent="0" marL="0">
+            <a:pPr marL="0" indent="0">
               <a:buNone/>
             </a:pPr>
             <a:r>
@@ -2759,6 +2682,13 @@
             <a:prstDash val="solid"/>
           </a:ln>
         </p:spPr>
+        <p:txBody>
+          <a:bodyPr/>
+          <a:lstStyle/>
+          <a:p>
+            <a:endParaRPr lang="en-US"/>
+          </a:p>
+        </p:txBody>
       </p:sp>
       <p:sp>
         <p:nvSpPr>
@@ -2781,7 +2711,7 @@
           <a:bodyPr wrap="square" lIns="0" tIns="0" rIns="0" bIns="0" rtlCol="0" anchor="ctr"/>
           <a:lstStyle/>
           <a:p>
-            <a:pPr algn="ctr" indent="0" marL="0">
+            <a:pPr marL="0" indent="0" algn="ctr">
               <a:buNone/>
             </a:pPr>
             <a:r>
@@ -2822,6 +2752,13 @@
             <a:prstDash val="solid"/>
           </a:ln>
         </p:spPr>
+        <p:txBody>
+          <a:bodyPr/>
+          <a:lstStyle/>
+          <a:p>
+            <a:endParaRPr lang="en-US"/>
+          </a:p>
+        </p:txBody>
       </p:sp>
       <p:sp>
         <p:nvSpPr>
@@ -2844,7 +2781,7 @@
           <a:bodyPr wrap="square" lIns="0" tIns="0" rIns="0" bIns="0" rtlCol="0" anchor="ctr"/>
           <a:lstStyle/>
           <a:p>
-            <a:pPr algn="ctr" indent="0" marL="0">
+            <a:pPr marL="0" indent="0" algn="ctr">
               <a:buNone/>
             </a:pPr>
             <a:r>
@@ -2885,6 +2822,13 @@
             <a:prstDash val="solid"/>
           </a:ln>
         </p:spPr>
+        <p:txBody>
+          <a:bodyPr/>
+          <a:lstStyle/>
+          <a:p>
+            <a:endParaRPr lang="en-US"/>
+          </a:p>
+        </p:txBody>
       </p:sp>
       <p:sp>
         <p:nvSpPr>
@@ -2907,7 +2851,7 @@
           <a:bodyPr wrap="square" lIns="0" tIns="0" rIns="0" bIns="0" rtlCol="0" anchor="ctr"/>
           <a:lstStyle/>
           <a:p>
-            <a:pPr algn="ctr" indent="0" marL="0">
+            <a:pPr marL="0" indent="0" algn="ctr">
               <a:buNone/>
             </a:pPr>
             <a:r>
@@ -2943,7 +2887,7 @@
           <a:bodyPr wrap="square" lIns="0" tIns="0" rIns="0" bIns="0" rtlCol="0" anchor="ctr"/>
           <a:lstStyle/>
           <a:p>
-            <a:pPr indent="0" marL="0">
+            <a:pPr marL="0" indent="0">
               <a:buNone/>
             </a:pPr>
             <a:r>
@@ -2952,7 +2896,7 @@
                   <a:schemeClr val="accent5"/>
                 </a:solidFill>
               </a:rPr>
-              <a:t>Amal Ranawaka  ·  IT5514 Applied Machine Learning  ·  Final assignment</a:t>
+              <a:t>Amal Ranawaka  ·  IT5514 Applied Machine Learning  </a:t>
             </a:r>
             <a:endParaRPr lang="en-US" sz="1400" dirty="0"/>
           </a:p>
@@ -2986,9 +2930,11 @@
       <p:sp>
         <p:nvSpPr>
           <p:cNvPr id="2" name="Text 0"/>
-          <p:cNvSpPr/>
+          <p:cNvSpPr>
+            <a:spLocks noGrp="1"/>
+          </p:cNvSpPr>
           <p:nvPr>
-            <p:ph idx="100" type="title" hasCustomPrompt="1"/>
+            <p:ph type="title" idx="100" hasCustomPrompt="1"/>
           </p:nvPr>
         </p:nvSpPr>
         <p:spPr>
@@ -3006,7 +2952,7 @@
           <a:bodyPr wrap="square" lIns="0" tIns="0" rIns="0" bIns="0" rtlCol="0" anchor="ctr"/>
           <a:lstStyle/>
           <a:p>
-            <a:pPr indent="0" marL="0">
+            <a:pPr marL="0" indent="0">
               <a:buNone/>
             </a:pPr>
             <a:r>
@@ -3044,9 +2990,27 @@
             <a:tbl>
               <a:tblPr/>
               <a:tblGrid>
-                <a:gridCol w="1828800"/>
-                <a:gridCol w="4846320"/>
-                <a:gridCol w="4389120"/>
+                <a:gridCol w="1828800">
+                  <a:extLst>
+                    <a:ext uri="{9D8B030D-6E8A-4147-A177-3AD203B41FA5}">
+                      <a16:colId xmlns:a16="http://schemas.microsoft.com/office/drawing/2014/main" val="20000"/>
+                    </a:ext>
+                  </a:extLst>
+                </a:gridCol>
+                <a:gridCol w="4846320">
+                  <a:extLst>
+                    <a:ext uri="{9D8B030D-6E8A-4147-A177-3AD203B41FA5}">
+                      <a16:colId xmlns:a16="http://schemas.microsoft.com/office/drawing/2014/main" val="20001"/>
+                    </a:ext>
+                  </a:extLst>
+                </a:gridCol>
+                <a:gridCol w="4389120">
+                  <a:extLst>
+                    <a:ext uri="{9D8B030D-6E8A-4147-A177-3AD203B41FA5}">
+                      <a16:colId xmlns:a16="http://schemas.microsoft.com/office/drawing/2014/main" val="20002"/>
+                    </a:ext>
+                  </a:extLst>
+                </a:gridCol>
               </a:tblGrid>
               <a:tr h="713232">
                 <a:tc>
@@ -3054,7 +3018,7 @@
                     <a:bodyPr/>
                     <a:lstStyle/>
                     <a:p>
-                      <a:pPr indent="0" marL="0">
+                      <a:pPr marL="0" indent="0">
                         <a:buNone/>
                       </a:pPr>
                       <a:r>
@@ -3068,7 +3032,7 @@
                       <a:endParaRPr lang="en-US" sz="1400" dirty="0"/>
                     </a:p>
                   </a:txBody>
-                  <a:tcPr marL="91440" marR="91440" marT="45720" marB="45720" anchor="ctr">
+                  <a:tcPr anchor="ctr">
                     <a:lnL w="9525" cap="flat" cmpd="sng" algn="ctr">
                       <a:solidFill>
                         <a:srgbClr val="E2E6EB"/>
@@ -3115,7 +3079,7 @@
                     <a:bodyPr/>
                     <a:lstStyle/>
                     <a:p>
-                      <a:pPr indent="0" marL="0">
+                      <a:pPr marL="0" indent="0">
                         <a:buNone/>
                       </a:pPr>
                       <a:r>
@@ -3129,7 +3093,7 @@
                       <a:endParaRPr lang="en-US" sz="1400" dirty="0"/>
                     </a:p>
                   </a:txBody>
-                  <a:tcPr marL="91440" marR="91440" marT="45720" marB="45720" anchor="ctr">
+                  <a:tcPr anchor="ctr">
                     <a:lnL w="9525" cap="flat" cmpd="sng" algn="ctr">
                       <a:solidFill>
                         <a:srgbClr val="E2E6EB"/>
@@ -3176,7 +3140,7 @@
                     <a:bodyPr/>
                     <a:lstStyle/>
                     <a:p>
-                      <a:pPr indent="0" marL="0">
+                      <a:pPr marL="0" indent="0">
                         <a:buNone/>
                       </a:pPr>
                       <a:r>
@@ -3190,7 +3154,7 @@
                       <a:endParaRPr lang="en-US" sz="1400" dirty="0"/>
                     </a:p>
                   </a:txBody>
-                  <a:tcPr marL="91440" marR="91440" marT="45720" marB="45720" anchor="ctr">
+                  <a:tcPr anchor="ctr">
                     <a:lnL w="9525" cap="flat" cmpd="sng" algn="ctr">
                       <a:solidFill>
                         <a:srgbClr val="E2E6EB"/>
@@ -3232,6 +3196,11 @@
                     </a:solidFill>
                   </a:tcPr>
                 </a:tc>
+                <a:extLst>
+                  <a:ext uri="{0D108BD9-81ED-4DB2-BD59-A6C34878D82A}">
+                    <a16:rowId xmlns:a16="http://schemas.microsoft.com/office/drawing/2014/main" val="10000"/>
+                  </a:ext>
+                </a:extLst>
               </a:tr>
               <a:tr h="713232">
                 <a:tc>
@@ -3239,7 +3208,7 @@
                     <a:bodyPr/>
                     <a:lstStyle/>
                     <a:p>
-                      <a:pPr indent="0" marL="0">
+                      <a:pPr marL="0" indent="0">
                         <a:buNone/>
                       </a:pPr>
                       <a:r>
@@ -3253,7 +3222,7 @@
                       <a:endParaRPr lang="en-US" sz="1400" dirty="0"/>
                     </a:p>
                   </a:txBody>
-                  <a:tcPr marL="91440" marR="91440" marT="45720" marB="45720" anchor="ctr">
+                  <a:tcPr anchor="ctr">
                     <a:lnL w="9525" cap="flat" cmpd="sng" algn="ctr">
                       <a:solidFill>
                         <a:srgbClr val="E2E6EB"/>
@@ -3297,7 +3266,7 @@
                     <a:bodyPr/>
                     <a:lstStyle/>
                     <a:p>
-                      <a:pPr indent="0" marL="0">
+                      <a:pPr marL="0" indent="0">
                         <a:buNone/>
                       </a:pPr>
                       <a:r>
@@ -3311,7 +3280,7 @@
                       <a:endParaRPr lang="en-US" sz="1400" dirty="0"/>
                     </a:p>
                   </a:txBody>
-                  <a:tcPr marL="91440" marR="91440" marT="45720" marB="45720" anchor="ctr">
+                  <a:tcPr anchor="ctr">
                     <a:lnL w="9525" cap="flat" cmpd="sng" algn="ctr">
                       <a:solidFill>
                         <a:srgbClr val="E2E6EB"/>
@@ -3355,7 +3324,7 @@
                     <a:bodyPr/>
                     <a:lstStyle/>
                     <a:p>
-                      <a:pPr indent="0" marL="0">
+                      <a:pPr marL="0" indent="0">
                         <a:buNone/>
                       </a:pPr>
                       <a:r>
@@ -3369,7 +3338,7 @@
                       <a:endParaRPr lang="en-US" sz="1400" dirty="0"/>
                     </a:p>
                   </a:txBody>
-                  <a:tcPr marL="91440" marR="91440" marT="45720" marB="45720" anchor="ctr">
+                  <a:tcPr anchor="ctr">
                     <a:lnL w="9525" cap="flat" cmpd="sng" algn="ctr">
                       <a:solidFill>
                         <a:srgbClr val="E2E6EB"/>
@@ -3408,6 +3377,11 @@
                     </a:lnB>
                   </a:tcPr>
                 </a:tc>
+                <a:extLst>
+                  <a:ext uri="{0D108BD9-81ED-4DB2-BD59-A6C34878D82A}">
+                    <a16:rowId xmlns:a16="http://schemas.microsoft.com/office/drawing/2014/main" val="10001"/>
+                  </a:ext>
+                </a:extLst>
               </a:tr>
               <a:tr h="713232">
                 <a:tc>
@@ -3415,7 +3389,7 @@
                     <a:bodyPr/>
                     <a:lstStyle/>
                     <a:p>
-                      <a:pPr indent="0" marL="0">
+                      <a:pPr marL="0" indent="0">
                         <a:buNone/>
                       </a:pPr>
                       <a:r>
@@ -3429,7 +3403,7 @@
                       <a:endParaRPr lang="en-US" sz="1400" dirty="0"/>
                     </a:p>
                   </a:txBody>
-                  <a:tcPr marL="91440" marR="91440" marT="45720" marB="45720" anchor="ctr">
+                  <a:tcPr anchor="ctr">
                     <a:lnL w="9525" cap="flat" cmpd="sng" algn="ctr">
                       <a:solidFill>
                         <a:srgbClr val="E2E6EB"/>
@@ -3473,7 +3447,7 @@
                     <a:bodyPr/>
                     <a:lstStyle/>
                     <a:p>
-                      <a:pPr indent="0" marL="0">
+                      <a:pPr marL="0" indent="0">
                         <a:buNone/>
                       </a:pPr>
                       <a:r>
@@ -3487,7 +3461,7 @@
                       <a:endParaRPr lang="en-US" sz="1400" dirty="0"/>
                     </a:p>
                   </a:txBody>
-                  <a:tcPr marL="91440" marR="91440" marT="45720" marB="45720" anchor="ctr">
+                  <a:tcPr anchor="ctr">
                     <a:lnL w="9525" cap="flat" cmpd="sng" algn="ctr">
                       <a:solidFill>
                         <a:srgbClr val="E2E6EB"/>
@@ -3531,7 +3505,7 @@
                     <a:bodyPr/>
                     <a:lstStyle/>
                     <a:p>
-                      <a:pPr indent="0" marL="0">
+                      <a:pPr marL="0" indent="0">
                         <a:buNone/>
                       </a:pPr>
                       <a:r>
@@ -3545,7 +3519,7 @@
                       <a:endParaRPr lang="en-US" sz="1400" dirty="0"/>
                     </a:p>
                   </a:txBody>
-                  <a:tcPr marL="91440" marR="91440" marT="45720" marB="45720" anchor="ctr">
+                  <a:tcPr anchor="ctr">
                     <a:lnL w="9525" cap="flat" cmpd="sng" algn="ctr">
                       <a:solidFill>
                         <a:srgbClr val="E2E6EB"/>
@@ -3584,6 +3558,11 @@
                     </a:lnB>
                   </a:tcPr>
                 </a:tc>
+                <a:extLst>
+                  <a:ext uri="{0D108BD9-81ED-4DB2-BD59-A6C34878D82A}">
+                    <a16:rowId xmlns:a16="http://schemas.microsoft.com/office/drawing/2014/main" val="10002"/>
+                  </a:ext>
+                </a:extLst>
               </a:tr>
               <a:tr h="713232">
                 <a:tc>
@@ -3591,7 +3570,7 @@
                     <a:bodyPr/>
                     <a:lstStyle/>
                     <a:p>
-                      <a:pPr indent="0" marL="0">
+                      <a:pPr marL="0" indent="0">
                         <a:buNone/>
                       </a:pPr>
                       <a:r>
@@ -3605,7 +3584,7 @@
                       <a:endParaRPr lang="en-US" sz="1400" dirty="0"/>
                     </a:p>
                   </a:txBody>
-                  <a:tcPr marL="91440" marR="91440" marT="45720" marB="45720" anchor="ctr">
+                  <a:tcPr anchor="ctr">
                     <a:lnL w="9525" cap="flat" cmpd="sng" algn="ctr">
                       <a:solidFill>
                         <a:srgbClr val="E2E6EB"/>
@@ -3649,7 +3628,7 @@
                     <a:bodyPr/>
                     <a:lstStyle/>
                     <a:p>
-                      <a:pPr indent="0" marL="0">
+                      <a:pPr marL="0" indent="0">
                         <a:buNone/>
                       </a:pPr>
                       <a:r>
@@ -3663,7 +3642,7 @@
                       <a:endParaRPr lang="en-US" sz="1400" dirty="0"/>
                     </a:p>
                   </a:txBody>
-                  <a:tcPr marL="91440" marR="91440" marT="45720" marB="45720" anchor="ctr">
+                  <a:tcPr anchor="ctr">
                     <a:lnL w="9525" cap="flat" cmpd="sng" algn="ctr">
                       <a:solidFill>
                         <a:srgbClr val="E2E6EB"/>
@@ -3707,7 +3686,7 @@
                     <a:bodyPr/>
                     <a:lstStyle/>
                     <a:p>
-                      <a:pPr indent="0" marL="0">
+                      <a:pPr marL="0" indent="0">
                         <a:buNone/>
                       </a:pPr>
                       <a:r>
@@ -3721,7 +3700,7 @@
                       <a:endParaRPr lang="en-US" sz="1400" dirty="0"/>
                     </a:p>
                   </a:txBody>
-                  <a:tcPr marL="91440" marR="91440" marT="45720" marB="45720" anchor="ctr">
+                  <a:tcPr anchor="ctr">
                     <a:lnL w="9525" cap="flat" cmpd="sng" algn="ctr">
                       <a:solidFill>
                         <a:srgbClr val="E2E6EB"/>
@@ -3760,6 +3739,11 @@
                     </a:lnB>
                   </a:tcPr>
                 </a:tc>
+                <a:extLst>
+                  <a:ext uri="{0D108BD9-81ED-4DB2-BD59-A6C34878D82A}">
+                    <a16:rowId xmlns:a16="http://schemas.microsoft.com/office/drawing/2014/main" val="10003"/>
+                  </a:ext>
+                </a:extLst>
               </a:tr>
               <a:tr h="713232">
                 <a:tc>
@@ -3767,7 +3751,7 @@
                     <a:bodyPr/>
                     <a:lstStyle/>
                     <a:p>
-                      <a:pPr indent="0" marL="0">
+                      <a:pPr marL="0" indent="0">
                         <a:buNone/>
                       </a:pPr>
                       <a:r>
@@ -3781,7 +3765,7 @@
                       <a:endParaRPr lang="en-US" sz="1400" dirty="0"/>
                     </a:p>
                   </a:txBody>
-                  <a:tcPr marL="91440" marR="91440" marT="45720" marB="45720" anchor="ctr">
+                  <a:tcPr anchor="ctr">
                     <a:lnL w="9525" cap="flat" cmpd="sng" algn="ctr">
                       <a:solidFill>
                         <a:srgbClr val="E2E6EB"/>
@@ -3825,7 +3809,7 @@
                     <a:bodyPr/>
                     <a:lstStyle/>
                     <a:p>
-                      <a:pPr indent="0" marL="0">
+                      <a:pPr marL="0" indent="0">
                         <a:buNone/>
                       </a:pPr>
                       <a:r>
@@ -3839,7 +3823,7 @@
                       <a:endParaRPr lang="en-US" sz="1400" dirty="0"/>
                     </a:p>
                   </a:txBody>
-                  <a:tcPr marL="91440" marR="91440" marT="45720" marB="45720" anchor="ctr">
+                  <a:tcPr anchor="ctr">
                     <a:lnL w="9525" cap="flat" cmpd="sng" algn="ctr">
                       <a:solidFill>
                         <a:srgbClr val="E2E6EB"/>
@@ -3883,7 +3867,7 @@
                     <a:bodyPr/>
                     <a:lstStyle/>
                     <a:p>
-                      <a:pPr indent="0" marL="0">
+                      <a:pPr marL="0" indent="0">
                         <a:buNone/>
                       </a:pPr>
                       <a:r>
@@ -3897,7 +3881,7 @@
                       <a:endParaRPr lang="en-US" sz="1400" dirty="0"/>
                     </a:p>
                   </a:txBody>
-                  <a:tcPr marL="91440" marR="91440" marT="45720" marB="45720" anchor="ctr">
+                  <a:tcPr anchor="ctr">
                     <a:lnL w="9525" cap="flat" cmpd="sng" algn="ctr">
                       <a:solidFill>
                         <a:srgbClr val="E2E6EB"/>
@@ -3936,6 +3920,11 @@
                     </a:lnB>
                   </a:tcPr>
                 </a:tc>
+                <a:extLst>
+                  <a:ext uri="{0D108BD9-81ED-4DB2-BD59-A6C34878D82A}">
+                    <a16:rowId xmlns:a16="http://schemas.microsoft.com/office/drawing/2014/main" val="10004"/>
+                  </a:ext>
+                </a:extLst>
               </a:tr>
               <a:tr h="713232">
                 <a:tc>
@@ -3943,7 +3932,7 @@
                     <a:bodyPr/>
                     <a:lstStyle/>
                     <a:p>
-                      <a:pPr indent="0" marL="0">
+                      <a:pPr marL="0" indent="0">
                         <a:buNone/>
                       </a:pPr>
                       <a:r>
@@ -3957,7 +3946,7 @@
                       <a:endParaRPr lang="en-US" sz="1400" dirty="0"/>
                     </a:p>
                   </a:txBody>
-                  <a:tcPr marL="91440" marR="91440" marT="45720" marB="45720" anchor="ctr">
+                  <a:tcPr anchor="ctr">
                     <a:lnL w="9525" cap="flat" cmpd="sng" algn="ctr">
                       <a:solidFill>
                         <a:srgbClr val="E2E6EB"/>
@@ -4001,7 +3990,7 @@
                     <a:bodyPr/>
                     <a:lstStyle/>
                     <a:p>
-                      <a:pPr indent="0" marL="0">
+                      <a:pPr marL="0" indent="0">
                         <a:buNone/>
                       </a:pPr>
                       <a:r>
@@ -4015,7 +4004,7 @@
                       <a:endParaRPr lang="en-US" sz="1400" dirty="0"/>
                     </a:p>
                   </a:txBody>
-                  <a:tcPr marL="91440" marR="91440" marT="45720" marB="45720" anchor="ctr">
+                  <a:tcPr anchor="ctr">
                     <a:lnL w="9525" cap="flat" cmpd="sng" algn="ctr">
                       <a:solidFill>
                         <a:srgbClr val="E2E6EB"/>
@@ -4059,7 +4048,7 @@
                     <a:bodyPr/>
                     <a:lstStyle/>
                     <a:p>
-                      <a:pPr indent="0" marL="0">
+                      <a:pPr marL="0" indent="0">
                         <a:buNone/>
                       </a:pPr>
                       <a:r>
@@ -4073,7 +4062,7 @@
                       <a:endParaRPr lang="en-US" sz="1400" dirty="0"/>
                     </a:p>
                   </a:txBody>
-                  <a:tcPr marL="91440" marR="91440" marT="45720" marB="45720" anchor="ctr">
+                  <a:tcPr anchor="ctr">
                     <a:lnL w="9525" cap="flat" cmpd="sng" algn="ctr">
                       <a:solidFill>
                         <a:srgbClr val="E2E6EB"/>
@@ -4112,6 +4101,11 @@
                     </a:lnB>
                   </a:tcPr>
                 </a:tc>
+                <a:extLst>
+                  <a:ext uri="{0D108BD9-81ED-4DB2-BD59-A6C34878D82A}">
+                    <a16:rowId xmlns:a16="http://schemas.microsoft.com/office/drawing/2014/main" val="10005"/>
+                  </a:ext>
+                </a:extLst>
               </a:tr>
             </a:tbl>
           </a:graphicData>
@@ -4138,7 +4132,7 @@
           <a:bodyPr wrap="square" lIns="0" tIns="0" rIns="0" bIns="0" rtlCol="0" anchor="ctr"/>
           <a:lstStyle/>
           <a:p>
-            <a:pPr indent="0" marL="0">
+            <a:pPr marL="0" indent="0">
               <a:buNone/>
             </a:pPr>
             <a:r>
@@ -4173,7 +4167,7 @@
           </a:prstGeom>
           <a:extLst>
             <a:ext uri="{C572A759-6A51-4108-AA02-DFA0A04FC94B}">
-              <ma14:wrappingTextBoxFlag xmlns:ma14="http://schemas.microsoft.com/office/mac/drawingml/2011/main" val="0"/>
+              <ma14:wrappingTextBoxFlag xmlns="" xmlns:ma14="http://schemas.microsoft.com/office/mac/drawingml/2011/main" val="0"/>
             </a:ext>
           </a:extLst>
         </p:spPr>
@@ -4191,7 +4185,7 @@
           <a:p>
             <a:pPr algn="r"/>
             <a:fld id="{F7021451-1387-4CA6-816F-3879F97B5CBC}" type="slidenum">
-              <a:rPr b="0" lang="en-US"/>
+              <a:rPr lang="en-US" b="0"/>
               <a:t>10</a:t>
             </a:fld>
             <a:endParaRPr lang="en-US"/>
@@ -4226,9 +4220,11 @@
       <p:sp>
         <p:nvSpPr>
           <p:cNvPr id="2" name="Text 0"/>
-          <p:cNvSpPr/>
+          <p:cNvSpPr>
+            <a:spLocks noGrp="1"/>
+          </p:cNvSpPr>
           <p:nvPr>
-            <p:ph idx="100" type="title" hasCustomPrompt="1"/>
+            <p:ph type="title" idx="100" hasCustomPrompt="1"/>
           </p:nvPr>
         </p:nvSpPr>
         <p:spPr>
@@ -4246,7 +4242,7 @@
           <a:bodyPr wrap="square" lIns="0" tIns="0" rIns="0" bIns="0" rtlCol="0" anchor="ctr"/>
           <a:lstStyle/>
           <a:p>
-            <a:pPr indent="0" marL="0">
+            <a:pPr marL="0" indent="0">
               <a:buNone/>
             </a:pPr>
             <a:r>
@@ -4285,6 +4281,13 @@
             <a:prstDash val="solid"/>
           </a:ln>
         </p:spPr>
+        <p:txBody>
+          <a:bodyPr/>
+          <a:lstStyle/>
+          <a:p>
+            <a:endParaRPr lang="en-US"/>
+          </a:p>
+        </p:txBody>
       </p:sp>
       <p:sp>
         <p:nvSpPr>
@@ -4307,7 +4310,7 @@
           <a:bodyPr wrap="square" lIns="0" tIns="0" rIns="0" bIns="0" rtlCol="0" anchor="ctr"/>
           <a:lstStyle/>
           <a:p>
-            <a:pPr algn="ctr" indent="0" marL="0">
+            <a:pPr marL="0" indent="0" algn="ctr">
               <a:buNone/>
             </a:pPr>
             <a:r>
@@ -4343,7 +4346,7 @@
           <a:bodyPr wrap="square" lIns="0" tIns="0" rIns="0" bIns="0" rtlCol="0" anchor="ctr"/>
           <a:lstStyle/>
           <a:p>
-            <a:pPr indent="0" marL="0">
+            <a:pPr marL="0" indent="0">
               <a:buNone/>
             </a:pPr>
             <a:r>
@@ -4379,7 +4382,7 @@
           <a:bodyPr wrap="square" lIns="0" tIns="0" rIns="0" bIns="0" rtlCol="0" anchor="t"/>
           <a:lstStyle/>
           <a:p>
-            <a:pPr indent="0" marL="0">
+            <a:pPr marL="0" indent="0">
               <a:buNone/>
             </a:pPr>
             <a:r>
@@ -4418,6 +4421,13 @@
             <a:prstDash val="solid"/>
           </a:ln>
         </p:spPr>
+        <p:txBody>
+          <a:bodyPr/>
+          <a:lstStyle/>
+          <a:p>
+            <a:endParaRPr lang="en-US"/>
+          </a:p>
+        </p:txBody>
       </p:sp>
       <p:sp>
         <p:nvSpPr>
@@ -4440,7 +4450,7 @@
           <a:bodyPr wrap="square" lIns="0" tIns="0" rIns="0" bIns="0" rtlCol="0" anchor="ctr"/>
           <a:lstStyle/>
           <a:p>
-            <a:pPr algn="ctr" indent="0" marL="0">
+            <a:pPr marL="0" indent="0" algn="ctr">
               <a:buNone/>
             </a:pPr>
             <a:r>
@@ -4476,7 +4486,7 @@
           <a:bodyPr wrap="square" lIns="0" tIns="0" rIns="0" bIns="0" rtlCol="0" anchor="ctr"/>
           <a:lstStyle/>
           <a:p>
-            <a:pPr indent="0" marL="0">
+            <a:pPr marL="0" indent="0">
               <a:buNone/>
             </a:pPr>
             <a:r>
@@ -4512,7 +4522,7 @@
           <a:bodyPr wrap="square" lIns="0" tIns="0" rIns="0" bIns="0" rtlCol="0" anchor="t"/>
           <a:lstStyle/>
           <a:p>
-            <a:pPr indent="0" marL="0">
+            <a:pPr marL="0" indent="0">
               <a:buNone/>
             </a:pPr>
             <a:r>
@@ -4551,6 +4561,13 @@
             <a:prstDash val="solid"/>
           </a:ln>
         </p:spPr>
+        <p:txBody>
+          <a:bodyPr/>
+          <a:lstStyle/>
+          <a:p>
+            <a:endParaRPr lang="en-US"/>
+          </a:p>
+        </p:txBody>
       </p:sp>
       <p:sp>
         <p:nvSpPr>
@@ -4573,7 +4590,7 @@
           <a:bodyPr wrap="square" lIns="0" tIns="0" rIns="0" bIns="0" rtlCol="0" anchor="ctr"/>
           <a:lstStyle/>
           <a:p>
-            <a:pPr algn="ctr" indent="0" marL="0">
+            <a:pPr marL="0" indent="0" algn="ctr">
               <a:buNone/>
             </a:pPr>
             <a:r>
@@ -4609,7 +4626,7 @@
           <a:bodyPr wrap="square" lIns="0" tIns="0" rIns="0" bIns="0" rtlCol="0" anchor="ctr"/>
           <a:lstStyle/>
           <a:p>
-            <a:pPr indent="0" marL="0">
+            <a:pPr marL="0" indent="0">
               <a:buNone/>
             </a:pPr>
             <a:r>
@@ -4645,7 +4662,7 @@
           <a:bodyPr wrap="square" lIns="0" tIns="0" rIns="0" bIns="0" rtlCol="0" anchor="t"/>
           <a:lstStyle/>
           <a:p>
-            <a:pPr indent="0" marL="0">
+            <a:pPr marL="0" indent="0">
               <a:buNone/>
             </a:pPr>
             <a:r>
@@ -4684,6 +4701,13 @@
             <a:prstDash val="solid"/>
           </a:ln>
         </p:spPr>
+        <p:txBody>
+          <a:bodyPr/>
+          <a:lstStyle/>
+          <a:p>
+            <a:endParaRPr lang="en-US"/>
+          </a:p>
+        </p:txBody>
       </p:sp>
       <p:sp>
         <p:nvSpPr>
@@ -4706,7 +4730,7 @@
           <a:bodyPr wrap="square" lIns="0" tIns="0" rIns="0" bIns="0" rtlCol="0" anchor="ctr"/>
           <a:lstStyle/>
           <a:p>
-            <a:pPr algn="ctr" indent="0" marL="0">
+            <a:pPr marL="0" indent="0" algn="ctr">
               <a:buNone/>
             </a:pPr>
             <a:r>
@@ -4742,7 +4766,7 @@
           <a:bodyPr wrap="square" lIns="0" tIns="0" rIns="0" bIns="0" rtlCol="0" anchor="ctr"/>
           <a:lstStyle/>
           <a:p>
-            <a:pPr indent="0" marL="0">
+            <a:pPr marL="0" indent="0">
               <a:buNone/>
             </a:pPr>
             <a:r>
@@ -4778,7 +4802,7 @@
           <a:bodyPr wrap="square" lIns="0" tIns="0" rIns="0" bIns="0" rtlCol="0" anchor="t"/>
           <a:lstStyle/>
           <a:p>
-            <a:pPr indent="0" marL="0">
+            <a:pPr marL="0" indent="0">
               <a:buNone/>
             </a:pPr>
             <a:r>
@@ -4819,17 +4843,24 @@
             <a:prstDash val="solid"/>
           </a:ln>
         </p:spPr>
+        <p:txBody>
+          <a:bodyPr/>
+          <a:lstStyle/>
+          <a:p>
+            <a:endParaRPr lang="en-US"/>
+          </a:p>
+        </p:txBody>
       </p:sp>
       <p:pic>
         <p:nvPicPr>
-          <p:cNvPr id="20" name="Image 0" descr="Price per perch before and after log transform">    </p:cNvPr>
+          <p:cNvPr id="20" name="Image 0" descr="Price per perch before and after log transform"/>
           <p:cNvPicPr>
             <a:picLocks noChangeAspect="1"/>
           </p:cNvPicPr>
           <p:nvPr/>
         </p:nvPicPr>
         <p:blipFill>
-          <a:blip r:embed="rId1"/>
+          <a:blip r:embed="rId3"/>
           <a:stretch>
             <a:fillRect/>
           </a:stretch>
@@ -4865,7 +4896,7 @@
           <a:bodyPr wrap="square" lIns="0" tIns="0" rIns="0" bIns="0" rtlCol="0" anchor="ctr"/>
           <a:lstStyle/>
           <a:p>
-            <a:pPr indent="0" marL="0">
+            <a:pPr marL="0" indent="0">
               <a:buNone/>
             </a:pPr>
             <a:r>
@@ -4906,6 +4937,13 @@
             <a:prstDash val="solid"/>
           </a:ln>
         </p:spPr>
+        <p:txBody>
+          <a:bodyPr/>
+          <a:lstStyle/>
+          <a:p>
+            <a:endParaRPr lang="en-US"/>
+          </a:p>
+        </p:txBody>
       </p:sp>
       <p:sp>
         <p:nvSpPr>
@@ -4928,7 +4966,7 @@
           <a:bodyPr wrap="square" lIns="0" tIns="0" rIns="0" bIns="0" rtlCol="0" anchor="ctr"/>
           <a:lstStyle/>
           <a:p>
-            <a:pPr indent="0" marL="0">
+            <a:pPr marL="0" indent="0">
               <a:buNone/>
             </a:pPr>
             <a:r>
@@ -4939,9 +4977,6 @@
               </a:rPr>
               <a:t>Source: </a:t>
             </a:r>
-            <a:pPr indent="0" marL="0">
-              <a:buNone/>
-            </a:pPr>
             <a:r>
               <a:rPr lang="en-US" sz="1400" dirty="0">
                 <a:solidFill>
@@ -4974,7 +5009,7 @@
           </a:prstGeom>
           <a:extLst>
             <a:ext uri="{C572A759-6A51-4108-AA02-DFA0A04FC94B}">
-              <ma14:wrappingTextBoxFlag xmlns:ma14="http://schemas.microsoft.com/office/mac/drawingml/2011/main" val="0"/>
+              <ma14:wrappingTextBoxFlag xmlns="" xmlns:ma14="http://schemas.microsoft.com/office/mac/drawingml/2011/main" val="0"/>
             </a:ext>
           </a:extLst>
         </p:spPr>
@@ -4992,7 +5027,7 @@
           <a:p>
             <a:pPr algn="r"/>
             <a:fld id="{F7021451-1387-4CA6-816F-3879F97B5CBC}" type="slidenum">
-              <a:rPr b="0" lang="en-US"/>
+              <a:rPr lang="en-US" b="0"/>
               <a:t>2</a:t>
             </a:fld>
             <a:endParaRPr lang="en-US"/>
@@ -5027,9 +5062,11 @@
       <p:sp>
         <p:nvSpPr>
           <p:cNvPr id="2" name="Text 0"/>
-          <p:cNvSpPr/>
+          <p:cNvSpPr>
+            <a:spLocks noGrp="1"/>
+          </p:cNvSpPr>
           <p:nvPr>
-            <p:ph idx="100" type="title" hasCustomPrompt="1"/>
+            <p:ph type="title" idx="100" hasCustomPrompt="1"/>
           </p:nvPr>
         </p:nvSpPr>
         <p:spPr>
@@ -5047,7 +5084,7 @@
           <a:bodyPr wrap="square" lIns="0" tIns="0" rIns="0" bIns="0" rtlCol="0" anchor="ctr"/>
           <a:lstStyle/>
           <a:p>
-            <a:pPr indent="0" marL="0">
+            <a:pPr marL="0" indent="0">
               <a:buNone/>
             </a:pPr>
             <a:r>
@@ -5064,14 +5101,14 @@
       </p:sp>
       <p:pic>
         <p:nvPicPr>
-          <p:cNvPr id="3" name="Image 0" descr="Median price per perch in the cheapest and most expensive areas">    </p:cNvPr>
+          <p:cNvPr id="3" name="Image 0" descr="Median price per perch in the cheapest and most expensive areas"/>
           <p:cNvPicPr>
             <a:picLocks noChangeAspect="1"/>
           </p:cNvPicPr>
           <p:nvPr/>
         </p:nvPicPr>
         <p:blipFill>
-          <a:blip r:embed="rId1"/>
+          <a:blip r:embed="rId3"/>
           <a:stretch>
             <a:fillRect/>
           </a:stretch>
@@ -5107,7 +5144,7 @@
           <a:bodyPr wrap="square" lIns="0" tIns="0" rIns="0" bIns="0" rtlCol="0" anchor="ctr"/>
           <a:lstStyle/>
           <a:p>
-            <a:pPr indent="0" marL="0">
+            <a:pPr marL="0" indent="0">
               <a:buNone/>
             </a:pPr>
             <a:r>
@@ -5146,7 +5183,7 @@
           <a:bodyPr wrap="square" lIns="0" tIns="0" rIns="0" bIns="0" rtlCol="0" anchor="t"/>
           <a:lstStyle/>
           <a:p>
-            <a:pPr indent="0" marL="0">
+            <a:pPr marL="0" indent="0">
               <a:buNone/>
             </a:pPr>
             <a:r>
@@ -5182,7 +5219,7 @@
           <a:bodyPr wrap="square" lIns="0" tIns="0" rIns="0" bIns="0" rtlCol="0" anchor="ctr"/>
           <a:lstStyle/>
           <a:p>
-            <a:pPr indent="0" marL="0">
+            <a:pPr marL="0" indent="0">
               <a:buNone/>
             </a:pPr>
             <a:r>
@@ -5221,7 +5258,7 @@
           <a:bodyPr wrap="square" lIns="0" tIns="0" rIns="0" bIns="0" rtlCol="0" anchor="t"/>
           <a:lstStyle/>
           <a:p>
-            <a:pPr indent="0" marL="0">
+            <a:pPr marL="0" indent="0">
               <a:buNone/>
             </a:pPr>
             <a:r>
@@ -5257,7 +5294,7 @@
           <a:bodyPr wrap="square" lIns="0" tIns="0" rIns="0" bIns="0" rtlCol="0" anchor="ctr"/>
           <a:lstStyle/>
           <a:p>
-            <a:pPr indent="0" marL="0">
+            <a:pPr marL="0" indent="0">
               <a:buNone/>
             </a:pPr>
             <a:r>
@@ -5296,7 +5333,7 @@
           <a:bodyPr wrap="square" lIns="0" tIns="0" rIns="0" bIns="0" rtlCol="0" anchor="t"/>
           <a:lstStyle/>
           <a:p>
-            <a:pPr indent="0" marL="0">
+            <a:pPr marL="0" indent="0">
               <a:buNone/>
             </a:pPr>
             <a:r>
@@ -5331,7 +5368,7 @@
           </a:prstGeom>
           <a:extLst>
             <a:ext uri="{C572A759-6A51-4108-AA02-DFA0A04FC94B}">
-              <ma14:wrappingTextBoxFlag xmlns:ma14="http://schemas.microsoft.com/office/mac/drawingml/2011/main" val="0"/>
+              <ma14:wrappingTextBoxFlag xmlns="" xmlns:ma14="http://schemas.microsoft.com/office/mac/drawingml/2011/main" val="0"/>
             </a:ext>
           </a:extLst>
         </p:spPr>
@@ -5349,7 +5386,7 @@
           <a:p>
             <a:pPr algn="r"/>
             <a:fld id="{F7021451-1387-4CA6-816F-3879F97B5CBC}" type="slidenum">
-              <a:rPr b="0" lang="en-US"/>
+              <a:rPr lang="en-US" b="0"/>
               <a:t>3</a:t>
             </a:fld>
             <a:endParaRPr lang="en-US"/>
@@ -5384,9 +5421,11 @@
       <p:sp>
         <p:nvSpPr>
           <p:cNvPr id="2" name="Text 0"/>
-          <p:cNvSpPr/>
+          <p:cNvSpPr>
+            <a:spLocks noGrp="1"/>
+          </p:cNvSpPr>
           <p:nvPr>
-            <p:ph idx="100" type="title" hasCustomPrompt="1"/>
+            <p:ph type="title" idx="100" hasCustomPrompt="1"/>
           </p:nvPr>
         </p:nvSpPr>
         <p:spPr>
@@ -5404,7 +5443,7 @@
           <a:bodyPr wrap="square" lIns="0" tIns="0" rIns="0" bIns="0" rtlCol="0" anchor="ctr"/>
           <a:lstStyle/>
           <a:p>
-            <a:pPr indent="0" marL="0">
+            <a:pPr marL="0" indent="0">
               <a:buNone/>
             </a:pPr>
             <a:r>
@@ -5428,24 +5467,48 @@
           <p:nvPr>
             <p:extLst>
               <p:ext uri="{D42A27DB-BD31-4B8C-83A1-F6EECF244321}">
-                <p14:modId xmlns:p14="http://schemas.microsoft.com/office/powerpoint/2010/main" val="1579011935"/>
+                <p14:modId xmlns:p14="http://schemas.microsoft.com/office/powerpoint/2010/main" val="1111912102"/>
               </p:ext>
             </p:extLst>
           </p:nvPr>
         </p:nvGraphicFramePr>
         <p:xfrm>
           <a:off x="548640" y="1280160"/>
-          <a:ext cx="7406640" cy="914400"/>
+          <a:ext cx="7406640" cy="4114800"/>
         </p:xfrm>
         <a:graphic>
           <a:graphicData uri="http://schemas.openxmlformats.org/drawingml/2006/table">
             <a:tbl>
               <a:tblPr/>
               <a:tblGrid>
-                <a:gridCol w="3017520"/>
-                <a:gridCol w="1554480"/>
-                <a:gridCol w="1280160"/>
-                <a:gridCol w="1554480"/>
+                <a:gridCol w="3017520">
+                  <a:extLst>
+                    <a:ext uri="{9D8B030D-6E8A-4147-A177-3AD203B41FA5}">
+                      <a16:colId xmlns:a16="http://schemas.microsoft.com/office/drawing/2014/main" val="20000"/>
+                    </a:ext>
+                  </a:extLst>
+                </a:gridCol>
+                <a:gridCol w="1554480">
+                  <a:extLst>
+                    <a:ext uri="{9D8B030D-6E8A-4147-A177-3AD203B41FA5}">
+                      <a16:colId xmlns:a16="http://schemas.microsoft.com/office/drawing/2014/main" val="20001"/>
+                    </a:ext>
+                  </a:extLst>
+                </a:gridCol>
+                <a:gridCol w="1280160">
+                  <a:extLst>
+                    <a:ext uri="{9D8B030D-6E8A-4147-A177-3AD203B41FA5}">
+                      <a16:colId xmlns:a16="http://schemas.microsoft.com/office/drawing/2014/main" val="20002"/>
+                    </a:ext>
+                  </a:extLst>
+                </a:gridCol>
+                <a:gridCol w="1554480">
+                  <a:extLst>
+                    <a:ext uri="{9D8B030D-6E8A-4147-A177-3AD203B41FA5}">
+                      <a16:colId xmlns:a16="http://schemas.microsoft.com/office/drawing/2014/main" val="20003"/>
+                    </a:ext>
+                  </a:extLst>
+                </a:gridCol>
               </a:tblGrid>
               <a:tr h="411480">
                 <a:tc>
@@ -5453,7 +5516,7 @@
                     <a:bodyPr/>
                     <a:lstStyle/>
                     <a:p>
-                      <a:pPr algn="l" indent="0" marL="0">
+                      <a:pPr marL="0" indent="0" algn="l">
                         <a:buNone/>
                       </a:pPr>
                       <a:r>
@@ -5467,7 +5530,7 @@
                       <a:endParaRPr lang="en-US" sz="1500" dirty="0"/>
                     </a:p>
                   </a:txBody>
-                  <a:tcPr marL="91440" marR="91440" marT="45720" marB="45720" anchor="ctr">
+                  <a:tcPr anchor="ctr">
                     <a:lnL w="9525" cap="flat" cmpd="sng" algn="ctr">
                       <a:solidFill>
                         <a:srgbClr val="E2E6EB"/>
@@ -5514,7 +5577,7 @@
                     <a:bodyPr/>
                     <a:lstStyle/>
                     <a:p>
-                      <a:pPr algn="ctr" indent="0" marL="0">
+                      <a:pPr marL="0" indent="0" algn="ctr">
                         <a:buNone/>
                       </a:pPr>
                       <a:r>
@@ -5528,7 +5591,7 @@
                       <a:endParaRPr lang="en-US" sz="1500" dirty="0"/>
                     </a:p>
                   </a:txBody>
-                  <a:tcPr marL="91440" marR="91440" marT="45720" marB="45720" anchor="ctr">
+                  <a:tcPr anchor="ctr">
                     <a:lnL w="9525" cap="flat" cmpd="sng" algn="ctr">
                       <a:solidFill>
                         <a:srgbClr val="E2E6EB"/>
@@ -5575,7 +5638,7 @@
                     <a:bodyPr/>
                     <a:lstStyle/>
                     <a:p>
-                      <a:pPr algn="ctr" indent="0" marL="0">
+                      <a:pPr marL="0" indent="0" algn="ctr">
                         <a:buNone/>
                       </a:pPr>
                       <a:r>
@@ -5589,7 +5652,7 @@
                       <a:endParaRPr lang="en-US" sz="1500" dirty="0"/>
                     </a:p>
                   </a:txBody>
-                  <a:tcPr marL="91440" marR="91440" marT="45720" marB="45720" anchor="ctr">
+                  <a:tcPr anchor="ctr">
                     <a:lnL w="9525" cap="flat" cmpd="sng" algn="ctr">
                       <a:solidFill>
                         <a:srgbClr val="E2E6EB"/>
@@ -5636,7 +5699,7 @@
                     <a:bodyPr/>
                     <a:lstStyle/>
                     <a:p>
-                      <a:pPr algn="ctr" indent="0" marL="0">
+                      <a:pPr marL="0" indent="0" algn="ctr">
                         <a:buNone/>
                       </a:pPr>
                       <a:r>
@@ -5650,7 +5713,7 @@
                       <a:endParaRPr lang="en-US" sz="1500" dirty="0"/>
                     </a:p>
                   </a:txBody>
-                  <a:tcPr marL="91440" marR="91440" marT="45720" marB="45720" anchor="ctr">
+                  <a:tcPr anchor="ctr">
                     <a:lnL w="9525" cap="flat" cmpd="sng" algn="ctr">
                       <a:solidFill>
                         <a:srgbClr val="E2E6EB"/>
@@ -5692,6 +5755,11 @@
                     </a:solidFill>
                   </a:tcPr>
                 </a:tc>
+                <a:extLst>
+                  <a:ext uri="{0D108BD9-81ED-4DB2-BD59-A6C34878D82A}">
+                    <a16:rowId xmlns:a16="http://schemas.microsoft.com/office/drawing/2014/main" val="10000"/>
+                  </a:ext>
+                </a:extLst>
               </a:tr>
               <a:tr h="411480">
                 <a:tc>
@@ -5699,7 +5767,7 @@
                     <a:bodyPr/>
                     <a:lstStyle/>
                     <a:p>
-                      <a:pPr algn="l" indent="0" marL="0">
+                      <a:pPr marL="0" indent="0" algn="l">
                         <a:buNone/>
                       </a:pPr>
                       <a:r>
@@ -5713,7 +5781,7 @@
                       <a:endParaRPr lang="en-US" sz="1500" dirty="0"/>
                     </a:p>
                   </a:txBody>
-                  <a:tcPr marL="91440" marR="91440" marT="45720" marB="45720" anchor="ctr">
+                  <a:tcPr anchor="ctr">
                     <a:lnL w="9525" cap="flat" cmpd="sng" algn="ctr">
                       <a:solidFill>
                         <a:srgbClr val="E2E6EB"/>
@@ -5760,7 +5828,7 @@
                     <a:bodyPr/>
                     <a:lstStyle/>
                     <a:p>
-                      <a:pPr algn="ctr" indent="0" marL="0">
+                      <a:pPr marL="0" indent="0" algn="ctr">
                         <a:buNone/>
                       </a:pPr>
                       <a:r>
@@ -5774,7 +5842,7 @@
                       <a:endParaRPr lang="en-US" sz="1500" dirty="0"/>
                     </a:p>
                   </a:txBody>
-                  <a:tcPr marL="91440" marR="91440" marT="45720" marB="45720" anchor="ctr">
+                  <a:tcPr anchor="ctr">
                     <a:lnL w="9525" cap="flat" cmpd="sng" algn="ctr">
                       <a:solidFill>
                         <a:srgbClr val="E2E6EB"/>
@@ -5821,7 +5889,7 @@
                     <a:bodyPr/>
                     <a:lstStyle/>
                     <a:p>
-                      <a:pPr algn="ctr" indent="0" marL="0">
+                      <a:pPr marL="0" indent="0" algn="ctr">
                         <a:buNone/>
                       </a:pPr>
                       <a:r>
@@ -5835,7 +5903,7 @@
                       <a:endParaRPr lang="en-US" sz="1500" dirty="0"/>
                     </a:p>
                   </a:txBody>
-                  <a:tcPr marL="91440" marR="91440" marT="45720" marB="45720" anchor="ctr">
+                  <a:tcPr anchor="ctr">
                     <a:lnL w="9525" cap="flat" cmpd="sng" algn="ctr">
                       <a:solidFill>
                         <a:srgbClr val="E2E6EB"/>
@@ -5882,7 +5950,7 @@
                     <a:bodyPr/>
                     <a:lstStyle/>
                     <a:p>
-                      <a:pPr algn="ctr" indent="0" marL="0">
+                      <a:pPr marL="0" indent="0" algn="ctr">
                         <a:buNone/>
                       </a:pPr>
                       <a:r>
@@ -5896,7 +5964,7 @@
                       <a:endParaRPr lang="en-US" sz="1500" dirty="0"/>
                     </a:p>
                   </a:txBody>
-                  <a:tcPr marL="91440" marR="91440" marT="45720" marB="45720" anchor="ctr">
+                  <a:tcPr anchor="ctr">
                     <a:lnL w="9525" cap="flat" cmpd="sng" algn="ctr">
                       <a:solidFill>
                         <a:srgbClr val="E2E6EB"/>
@@ -5938,6 +6006,11 @@
                     </a:solidFill>
                   </a:tcPr>
                 </a:tc>
+                <a:extLst>
+                  <a:ext uri="{0D108BD9-81ED-4DB2-BD59-A6C34878D82A}">
+                    <a16:rowId xmlns:a16="http://schemas.microsoft.com/office/drawing/2014/main" val="10001"/>
+                  </a:ext>
+                </a:extLst>
               </a:tr>
               <a:tr h="411480">
                 <a:tc>
@@ -5945,7 +6018,7 @@
                     <a:bodyPr/>
                     <a:lstStyle/>
                     <a:p>
-                      <a:pPr algn="l" indent="0" marL="0">
+                      <a:pPr marL="0" indent="0" algn="l">
                         <a:buNone/>
                       </a:pPr>
                       <a:r>
@@ -5959,7 +6032,7 @@
                       <a:endParaRPr lang="en-US" sz="1500" dirty="0"/>
                     </a:p>
                   </a:txBody>
-                  <a:tcPr marL="91440" marR="91440" marT="45720" marB="45720" anchor="ctr">
+                  <a:tcPr anchor="ctr">
                     <a:lnL w="9525" cap="flat" cmpd="sng" algn="ctr">
                       <a:solidFill>
                         <a:srgbClr val="E2E6EB"/>
@@ -6006,7 +6079,7 @@
                     <a:bodyPr/>
                     <a:lstStyle/>
                     <a:p>
-                      <a:pPr algn="ctr" indent="0" marL="0">
+                      <a:pPr marL="0" indent="0" algn="ctr">
                         <a:buNone/>
                       </a:pPr>
                       <a:r>
@@ -6020,7 +6093,7 @@
                       <a:endParaRPr lang="en-US" sz="1500" dirty="0"/>
                     </a:p>
                   </a:txBody>
-                  <a:tcPr marL="91440" marR="91440" marT="45720" marB="45720" anchor="ctr">
+                  <a:tcPr anchor="ctr">
                     <a:lnL w="9525" cap="flat" cmpd="sng" algn="ctr">
                       <a:solidFill>
                         <a:srgbClr val="E2E6EB"/>
@@ -6067,7 +6140,7 @@
                     <a:bodyPr/>
                     <a:lstStyle/>
                     <a:p>
-                      <a:pPr algn="ctr" indent="0" marL="0">
+                      <a:pPr marL="0" indent="0" algn="ctr">
                         <a:buNone/>
                       </a:pPr>
                       <a:r>
@@ -6081,7 +6154,7 @@
                       <a:endParaRPr lang="en-US" sz="1500" dirty="0"/>
                     </a:p>
                   </a:txBody>
-                  <a:tcPr marL="91440" marR="91440" marT="45720" marB="45720" anchor="ctr">
+                  <a:tcPr anchor="ctr">
                     <a:lnL w="9525" cap="flat" cmpd="sng" algn="ctr">
                       <a:solidFill>
                         <a:srgbClr val="E2E6EB"/>
@@ -6128,7 +6201,7 @@
                     <a:bodyPr/>
                     <a:lstStyle/>
                     <a:p>
-                      <a:pPr algn="ctr" indent="0" marL="0">
+                      <a:pPr marL="0" indent="0" algn="ctr">
                         <a:buNone/>
                       </a:pPr>
                       <a:r>
@@ -6142,7 +6215,7 @@
                       <a:endParaRPr lang="en-US" sz="1500" dirty="0"/>
                     </a:p>
                   </a:txBody>
-                  <a:tcPr marL="91440" marR="91440" marT="45720" marB="45720" anchor="ctr">
+                  <a:tcPr anchor="ctr">
                     <a:lnL w="9525" cap="flat" cmpd="sng" algn="ctr">
                       <a:solidFill>
                         <a:srgbClr val="E2E6EB"/>
@@ -6184,6 +6257,11 @@
                     </a:solidFill>
                   </a:tcPr>
                 </a:tc>
+                <a:extLst>
+                  <a:ext uri="{0D108BD9-81ED-4DB2-BD59-A6C34878D82A}">
+                    <a16:rowId xmlns:a16="http://schemas.microsoft.com/office/drawing/2014/main" val="10002"/>
+                  </a:ext>
+                </a:extLst>
               </a:tr>
               <a:tr h="411480">
                 <a:tc>
@@ -6191,7 +6269,7 @@
                     <a:bodyPr/>
                     <a:lstStyle/>
                     <a:p>
-                      <a:pPr algn="l" indent="0" marL="0">
+                      <a:pPr marL="0" indent="0" algn="l">
                         <a:buNone/>
                       </a:pPr>
                       <a:r>
@@ -6200,12 +6278,12 @@
                             <a:srgbClr val="1F4E79"/>
                           </a:solidFill>
                         </a:rPr>
-                        <a:t>NGBoost (tuned) ★ new</a:t>
+                        <a:t>NGBoost (tuned) ★ </a:t>
                       </a:r>
                       <a:endParaRPr lang="en-US" sz="1500" dirty="0"/>
                     </a:p>
                   </a:txBody>
-                  <a:tcPr marL="91440" marR="91440" marT="45720" marB="45720" anchor="ctr">
+                  <a:tcPr anchor="ctr">
                     <a:lnL w="9525" cap="flat" cmpd="sng" algn="ctr">
                       <a:solidFill>
                         <a:srgbClr val="E2E6EB"/>
@@ -6252,7 +6330,7 @@
                     <a:bodyPr/>
                     <a:lstStyle/>
                     <a:p>
-                      <a:pPr algn="ctr" indent="0" marL="0">
+                      <a:pPr marL="0" indent="0" algn="ctr">
                         <a:buNone/>
                       </a:pPr>
                       <a:r>
@@ -6266,7 +6344,7 @@
                       <a:endParaRPr lang="en-US" sz="1500" dirty="0"/>
                     </a:p>
                   </a:txBody>
-                  <a:tcPr marL="91440" marR="91440" marT="45720" marB="45720" anchor="ctr">
+                  <a:tcPr anchor="ctr">
                     <a:lnL w="9525" cap="flat" cmpd="sng" algn="ctr">
                       <a:solidFill>
                         <a:srgbClr val="E2E6EB"/>
@@ -6313,7 +6391,7 @@
                     <a:bodyPr/>
                     <a:lstStyle/>
                     <a:p>
-                      <a:pPr algn="ctr" indent="0" marL="0">
+                      <a:pPr marL="0" indent="0" algn="ctr">
                         <a:buNone/>
                       </a:pPr>
                       <a:r>
@@ -6327,7 +6405,7 @@
                       <a:endParaRPr lang="en-US" sz="1500" dirty="0"/>
                     </a:p>
                   </a:txBody>
-                  <a:tcPr marL="91440" marR="91440" marT="45720" marB="45720" anchor="ctr">
+                  <a:tcPr anchor="ctr">
                     <a:lnL w="9525" cap="flat" cmpd="sng" algn="ctr">
                       <a:solidFill>
                         <a:srgbClr val="E2E6EB"/>
@@ -6374,7 +6452,7 @@
                     <a:bodyPr/>
                     <a:lstStyle/>
                     <a:p>
-                      <a:pPr algn="ctr" indent="0" marL="0">
+                      <a:pPr marL="0" indent="0" algn="ctr">
                         <a:buNone/>
                       </a:pPr>
                       <a:r>
@@ -6388,7 +6466,7 @@
                       <a:endParaRPr lang="en-US" sz="1500" dirty="0"/>
                     </a:p>
                   </a:txBody>
-                  <a:tcPr marL="91440" marR="91440" marT="45720" marB="45720" anchor="ctr">
+                  <a:tcPr anchor="ctr">
                     <a:lnL w="9525" cap="flat" cmpd="sng" algn="ctr">
                       <a:solidFill>
                         <a:srgbClr val="E2E6EB"/>
@@ -6430,6 +6508,11 @@
                     </a:solidFill>
                   </a:tcPr>
                 </a:tc>
+                <a:extLst>
+                  <a:ext uri="{0D108BD9-81ED-4DB2-BD59-A6C34878D82A}">
+                    <a16:rowId xmlns:a16="http://schemas.microsoft.com/office/drawing/2014/main" val="10003"/>
+                  </a:ext>
+                </a:extLst>
               </a:tr>
               <a:tr h="411480">
                 <a:tc>
@@ -6437,7 +6520,7 @@
                     <a:bodyPr/>
                     <a:lstStyle/>
                     <a:p>
-                      <a:pPr algn="l" indent="0" marL="0">
+                      <a:pPr marL="0" indent="0" algn="l">
                         <a:buNone/>
                       </a:pPr>
                       <a:r>
@@ -6451,7 +6534,7 @@
                       <a:endParaRPr lang="en-US" sz="1500" dirty="0"/>
                     </a:p>
                   </a:txBody>
-                  <a:tcPr marL="91440" marR="91440" marT="45720" marB="45720" anchor="ctr">
+                  <a:tcPr anchor="ctr">
                     <a:lnL w="9525" cap="flat" cmpd="sng" algn="ctr">
                       <a:solidFill>
                         <a:srgbClr val="E2E6EB"/>
@@ -6498,7 +6581,7 @@
                     <a:bodyPr/>
                     <a:lstStyle/>
                     <a:p>
-                      <a:pPr algn="ctr" indent="0" marL="0">
+                      <a:pPr marL="0" indent="0" algn="ctr">
                         <a:buNone/>
                       </a:pPr>
                       <a:r>
@@ -6512,7 +6595,7 @@
                       <a:endParaRPr lang="en-US" sz="1500" dirty="0"/>
                     </a:p>
                   </a:txBody>
-                  <a:tcPr marL="91440" marR="91440" marT="45720" marB="45720" anchor="ctr">
+                  <a:tcPr anchor="ctr">
                     <a:lnL w="9525" cap="flat" cmpd="sng" algn="ctr">
                       <a:solidFill>
                         <a:srgbClr val="E2E6EB"/>
@@ -6559,7 +6642,7 @@
                     <a:bodyPr/>
                     <a:lstStyle/>
                     <a:p>
-                      <a:pPr algn="ctr" indent="0" marL="0">
+                      <a:pPr marL="0" indent="0" algn="ctr">
                         <a:buNone/>
                       </a:pPr>
                       <a:r>
@@ -6573,7 +6656,7 @@
                       <a:endParaRPr lang="en-US" sz="1500" dirty="0"/>
                     </a:p>
                   </a:txBody>
-                  <a:tcPr marL="91440" marR="91440" marT="45720" marB="45720" anchor="ctr">
+                  <a:tcPr anchor="ctr">
                     <a:lnL w="9525" cap="flat" cmpd="sng" algn="ctr">
                       <a:solidFill>
                         <a:srgbClr val="E2E6EB"/>
@@ -6620,7 +6703,7 @@
                     <a:bodyPr/>
                     <a:lstStyle/>
                     <a:p>
-                      <a:pPr algn="ctr" indent="0" marL="0">
+                      <a:pPr marL="0" indent="0" algn="ctr">
                         <a:buNone/>
                       </a:pPr>
                       <a:r>
@@ -6634,7 +6717,7 @@
                       <a:endParaRPr lang="en-US" sz="1500" dirty="0"/>
                     </a:p>
                   </a:txBody>
-                  <a:tcPr marL="91440" marR="91440" marT="45720" marB="45720" anchor="ctr">
+                  <a:tcPr anchor="ctr">
                     <a:lnL w="9525" cap="flat" cmpd="sng" algn="ctr">
                       <a:solidFill>
                         <a:srgbClr val="E2E6EB"/>
@@ -6676,6 +6759,11 @@
                     </a:solidFill>
                   </a:tcPr>
                 </a:tc>
+                <a:extLst>
+                  <a:ext uri="{0D108BD9-81ED-4DB2-BD59-A6C34878D82A}">
+                    <a16:rowId xmlns:a16="http://schemas.microsoft.com/office/drawing/2014/main" val="10004"/>
+                  </a:ext>
+                </a:extLst>
               </a:tr>
               <a:tr h="411480">
                 <a:tc>
@@ -6683,7 +6771,7 @@
                     <a:bodyPr/>
                     <a:lstStyle/>
                     <a:p>
-                      <a:pPr algn="l" indent="0" marL="0">
+                      <a:pPr marL="0" indent="0" algn="l">
                         <a:buNone/>
                       </a:pPr>
                       <a:r>
@@ -6697,7 +6785,7 @@
                       <a:endParaRPr lang="en-US" sz="1500" dirty="0"/>
                     </a:p>
                   </a:txBody>
-                  <a:tcPr marL="91440" marR="91440" marT="45720" marB="45720" anchor="ctr">
+                  <a:tcPr anchor="ctr">
                     <a:lnL w="9525" cap="flat" cmpd="sng" algn="ctr">
                       <a:solidFill>
                         <a:srgbClr val="E2E6EB"/>
@@ -6744,7 +6832,7 @@
                     <a:bodyPr/>
                     <a:lstStyle/>
                     <a:p>
-                      <a:pPr algn="ctr" indent="0" marL="0">
+                      <a:pPr marL="0" indent="0" algn="ctr">
                         <a:buNone/>
                       </a:pPr>
                       <a:r>
@@ -6758,7 +6846,7 @@
                       <a:endParaRPr lang="en-US" sz="1500" dirty="0"/>
                     </a:p>
                   </a:txBody>
-                  <a:tcPr marL="91440" marR="91440" marT="45720" marB="45720" anchor="ctr">
+                  <a:tcPr anchor="ctr">
                     <a:lnL w="9525" cap="flat" cmpd="sng" algn="ctr">
                       <a:solidFill>
                         <a:srgbClr val="E2E6EB"/>
@@ -6805,7 +6893,7 @@
                     <a:bodyPr/>
                     <a:lstStyle/>
                     <a:p>
-                      <a:pPr algn="ctr" indent="0" marL="0">
+                      <a:pPr marL="0" indent="0" algn="ctr">
                         <a:buNone/>
                       </a:pPr>
                       <a:r>
@@ -6819,7 +6907,7 @@
                       <a:endParaRPr lang="en-US" sz="1500" dirty="0"/>
                     </a:p>
                   </a:txBody>
-                  <a:tcPr marL="91440" marR="91440" marT="45720" marB="45720" anchor="ctr">
+                  <a:tcPr anchor="ctr">
                     <a:lnL w="9525" cap="flat" cmpd="sng" algn="ctr">
                       <a:solidFill>
                         <a:srgbClr val="E2E6EB"/>
@@ -6866,7 +6954,7 @@
                     <a:bodyPr/>
                     <a:lstStyle/>
                     <a:p>
-                      <a:pPr algn="ctr" indent="0" marL="0">
+                      <a:pPr marL="0" indent="0" algn="ctr">
                         <a:buNone/>
                       </a:pPr>
                       <a:r>
@@ -6880,7 +6968,7 @@
                       <a:endParaRPr lang="en-US" sz="1500" dirty="0"/>
                     </a:p>
                   </a:txBody>
-                  <a:tcPr marL="91440" marR="91440" marT="45720" marB="45720" anchor="ctr">
+                  <a:tcPr anchor="ctr">
                     <a:lnL w="9525" cap="flat" cmpd="sng" algn="ctr">
                       <a:solidFill>
                         <a:srgbClr val="E2E6EB"/>
@@ -6922,6 +7010,11 @@
                     </a:solidFill>
                   </a:tcPr>
                 </a:tc>
+                <a:extLst>
+                  <a:ext uri="{0D108BD9-81ED-4DB2-BD59-A6C34878D82A}">
+                    <a16:rowId xmlns:a16="http://schemas.microsoft.com/office/drawing/2014/main" val="10005"/>
+                  </a:ext>
+                </a:extLst>
               </a:tr>
               <a:tr h="411480">
                 <a:tc>
@@ -6929,7 +7022,7 @@
                     <a:bodyPr/>
                     <a:lstStyle/>
                     <a:p>
-                      <a:pPr algn="l" indent="0" marL="0">
+                      <a:pPr marL="0" indent="0" algn="l">
                         <a:buNone/>
                       </a:pPr>
                       <a:r>
@@ -6943,7 +7036,7 @@
                       <a:endParaRPr lang="en-US" sz="1500" dirty="0"/>
                     </a:p>
                   </a:txBody>
-                  <a:tcPr marL="91440" marR="91440" marT="45720" marB="45720" anchor="ctr">
+                  <a:tcPr anchor="ctr">
                     <a:lnL w="9525" cap="flat" cmpd="sng" algn="ctr">
                       <a:solidFill>
                         <a:srgbClr val="E2E6EB"/>
@@ -6990,7 +7083,7 @@
                     <a:bodyPr/>
                     <a:lstStyle/>
                     <a:p>
-                      <a:pPr algn="ctr" indent="0" marL="0">
+                      <a:pPr marL="0" indent="0" algn="ctr">
                         <a:buNone/>
                       </a:pPr>
                       <a:r>
@@ -7004,7 +7097,7 @@
                       <a:endParaRPr lang="en-US" sz="1500" dirty="0"/>
                     </a:p>
                   </a:txBody>
-                  <a:tcPr marL="91440" marR="91440" marT="45720" marB="45720" anchor="ctr">
+                  <a:tcPr anchor="ctr">
                     <a:lnL w="9525" cap="flat" cmpd="sng" algn="ctr">
                       <a:solidFill>
                         <a:srgbClr val="E2E6EB"/>
@@ -7051,7 +7144,7 @@
                     <a:bodyPr/>
                     <a:lstStyle/>
                     <a:p>
-                      <a:pPr algn="ctr" indent="0" marL="0">
+                      <a:pPr marL="0" indent="0" algn="ctr">
                         <a:buNone/>
                       </a:pPr>
                       <a:r>
@@ -7065,7 +7158,7 @@
                       <a:endParaRPr lang="en-US" sz="1500" dirty="0"/>
                     </a:p>
                   </a:txBody>
-                  <a:tcPr marL="91440" marR="91440" marT="45720" marB="45720" anchor="ctr">
+                  <a:tcPr anchor="ctr">
                     <a:lnL w="9525" cap="flat" cmpd="sng" algn="ctr">
                       <a:solidFill>
                         <a:srgbClr val="E2E6EB"/>
@@ -7112,7 +7205,7 @@
                     <a:bodyPr/>
                     <a:lstStyle/>
                     <a:p>
-                      <a:pPr algn="ctr" indent="0" marL="0">
+                      <a:pPr marL="0" indent="0" algn="ctr">
                         <a:buNone/>
                       </a:pPr>
                       <a:r>
@@ -7126,7 +7219,7 @@
                       <a:endParaRPr lang="en-US" sz="1500" dirty="0"/>
                     </a:p>
                   </a:txBody>
-                  <a:tcPr marL="91440" marR="91440" marT="45720" marB="45720" anchor="ctr">
+                  <a:tcPr anchor="ctr">
                     <a:lnL w="9525" cap="flat" cmpd="sng" algn="ctr">
                       <a:solidFill>
                         <a:srgbClr val="E2E6EB"/>
@@ -7168,6 +7261,11 @@
                     </a:solidFill>
                   </a:tcPr>
                 </a:tc>
+                <a:extLst>
+                  <a:ext uri="{0D108BD9-81ED-4DB2-BD59-A6C34878D82A}">
+                    <a16:rowId xmlns:a16="http://schemas.microsoft.com/office/drawing/2014/main" val="10006"/>
+                  </a:ext>
+                </a:extLst>
               </a:tr>
               <a:tr h="411480">
                 <a:tc>
@@ -7175,7 +7273,7 @@
                     <a:bodyPr/>
                     <a:lstStyle/>
                     <a:p>
-                      <a:pPr algn="l" indent="0" marL="0">
+                      <a:pPr marL="0" indent="0" algn="l">
                         <a:buNone/>
                       </a:pPr>
                       <a:r>
@@ -7189,7 +7287,7 @@
                       <a:endParaRPr lang="en-US" sz="1500" dirty="0"/>
                     </a:p>
                   </a:txBody>
-                  <a:tcPr marL="91440" marR="91440" marT="45720" marB="45720" anchor="ctr">
+                  <a:tcPr anchor="ctr">
                     <a:lnL w="9525" cap="flat" cmpd="sng" algn="ctr">
                       <a:solidFill>
                         <a:srgbClr val="E2E6EB"/>
@@ -7236,7 +7334,7 @@
                     <a:bodyPr/>
                     <a:lstStyle/>
                     <a:p>
-                      <a:pPr algn="ctr" indent="0" marL="0">
+                      <a:pPr marL="0" indent="0" algn="ctr">
                         <a:buNone/>
                       </a:pPr>
                       <a:r>
@@ -7250,7 +7348,7 @@
                       <a:endParaRPr lang="en-US" sz="1500" dirty="0"/>
                     </a:p>
                   </a:txBody>
-                  <a:tcPr marL="91440" marR="91440" marT="45720" marB="45720" anchor="ctr">
+                  <a:tcPr anchor="ctr">
                     <a:lnL w="9525" cap="flat" cmpd="sng" algn="ctr">
                       <a:solidFill>
                         <a:srgbClr val="E2E6EB"/>
@@ -7297,7 +7395,7 @@
                     <a:bodyPr/>
                     <a:lstStyle/>
                     <a:p>
-                      <a:pPr algn="ctr" indent="0" marL="0">
+                      <a:pPr marL="0" indent="0" algn="ctr">
                         <a:buNone/>
                       </a:pPr>
                       <a:r>
@@ -7311,7 +7409,7 @@
                       <a:endParaRPr lang="en-US" sz="1500" dirty="0"/>
                     </a:p>
                   </a:txBody>
-                  <a:tcPr marL="91440" marR="91440" marT="45720" marB="45720" anchor="ctr">
+                  <a:tcPr anchor="ctr">
                     <a:lnL w="9525" cap="flat" cmpd="sng" algn="ctr">
                       <a:solidFill>
                         <a:srgbClr val="E2E6EB"/>
@@ -7358,7 +7456,7 @@
                     <a:bodyPr/>
                     <a:lstStyle/>
                     <a:p>
-                      <a:pPr algn="ctr" indent="0" marL="0">
+                      <a:pPr marL="0" indent="0" algn="ctr">
                         <a:buNone/>
                       </a:pPr>
                       <a:r>
@@ -7372,7 +7470,7 @@
                       <a:endParaRPr lang="en-US" sz="1500" dirty="0"/>
                     </a:p>
                   </a:txBody>
-                  <a:tcPr marL="91440" marR="91440" marT="45720" marB="45720" anchor="ctr">
+                  <a:tcPr anchor="ctr">
                     <a:lnL w="9525" cap="flat" cmpd="sng" algn="ctr">
                       <a:solidFill>
                         <a:srgbClr val="E2E6EB"/>
@@ -7414,6 +7512,11 @@
                     </a:solidFill>
                   </a:tcPr>
                 </a:tc>
+                <a:extLst>
+                  <a:ext uri="{0D108BD9-81ED-4DB2-BD59-A6C34878D82A}">
+                    <a16:rowId xmlns:a16="http://schemas.microsoft.com/office/drawing/2014/main" val="10007"/>
+                  </a:ext>
+                </a:extLst>
               </a:tr>
               <a:tr h="411480">
                 <a:tc>
@@ -7421,7 +7524,7 @@
                     <a:bodyPr/>
                     <a:lstStyle/>
                     <a:p>
-                      <a:pPr algn="l" indent="0" marL="0">
+                      <a:pPr marL="0" indent="0" algn="l">
                         <a:buNone/>
                       </a:pPr>
                       <a:r>
@@ -7435,7 +7538,7 @@
                       <a:endParaRPr lang="en-US" sz="1500" dirty="0"/>
                     </a:p>
                   </a:txBody>
-                  <a:tcPr marL="91440" marR="91440" marT="45720" marB="45720" anchor="ctr">
+                  <a:tcPr anchor="ctr">
                     <a:lnL w="9525" cap="flat" cmpd="sng" algn="ctr">
                       <a:solidFill>
                         <a:srgbClr val="E2E6EB"/>
@@ -7482,7 +7585,7 @@
                     <a:bodyPr/>
                     <a:lstStyle/>
                     <a:p>
-                      <a:pPr algn="ctr" indent="0" marL="0">
+                      <a:pPr marL="0" indent="0" algn="ctr">
                         <a:buNone/>
                       </a:pPr>
                       <a:r>
@@ -7496,7 +7599,7 @@
                       <a:endParaRPr lang="en-US" sz="1500" dirty="0"/>
                     </a:p>
                   </a:txBody>
-                  <a:tcPr marL="91440" marR="91440" marT="45720" marB="45720" anchor="ctr">
+                  <a:tcPr anchor="ctr">
                     <a:lnL w="9525" cap="flat" cmpd="sng" algn="ctr">
                       <a:solidFill>
                         <a:srgbClr val="E2E6EB"/>
@@ -7543,7 +7646,7 @@
                     <a:bodyPr/>
                     <a:lstStyle/>
                     <a:p>
-                      <a:pPr algn="ctr" indent="0" marL="0">
+                      <a:pPr marL="0" indent="0" algn="ctr">
                         <a:buNone/>
                       </a:pPr>
                       <a:r>
@@ -7557,7 +7660,7 @@
                       <a:endParaRPr lang="en-US" sz="1500" dirty="0"/>
                     </a:p>
                   </a:txBody>
-                  <a:tcPr marL="91440" marR="91440" marT="45720" marB="45720" anchor="ctr">
+                  <a:tcPr anchor="ctr">
                     <a:lnL w="9525" cap="flat" cmpd="sng" algn="ctr">
                       <a:solidFill>
                         <a:srgbClr val="E2E6EB"/>
@@ -7604,7 +7707,7 @@
                     <a:bodyPr/>
                     <a:lstStyle/>
                     <a:p>
-                      <a:pPr algn="ctr" indent="0" marL="0">
+                      <a:pPr marL="0" indent="0" algn="ctr">
                         <a:buNone/>
                       </a:pPr>
                       <a:r>
@@ -7618,7 +7721,7 @@
                       <a:endParaRPr lang="en-US" sz="1500" dirty="0"/>
                     </a:p>
                   </a:txBody>
-                  <a:tcPr marL="91440" marR="91440" marT="45720" marB="45720" anchor="ctr">
+                  <a:tcPr anchor="ctr">
                     <a:lnL w="9525" cap="flat" cmpd="sng" algn="ctr">
                       <a:solidFill>
                         <a:srgbClr val="E2E6EB"/>
@@ -7660,6 +7763,11 @@
                     </a:solidFill>
                   </a:tcPr>
                 </a:tc>
+                <a:extLst>
+                  <a:ext uri="{0D108BD9-81ED-4DB2-BD59-A6C34878D82A}">
+                    <a16:rowId xmlns:a16="http://schemas.microsoft.com/office/drawing/2014/main" val="10008"/>
+                  </a:ext>
+                </a:extLst>
               </a:tr>
               <a:tr h="411480">
                 <a:tc>
@@ -7667,7 +7775,7 @@
                     <a:bodyPr/>
                     <a:lstStyle/>
                     <a:p>
-                      <a:pPr algn="l" indent="0" marL="0">
+                      <a:pPr marL="0" indent="0" algn="l">
                         <a:buNone/>
                       </a:pPr>
                       <a:r>
@@ -7681,7 +7789,7 @@
                       <a:endParaRPr lang="en-US" sz="1500" dirty="0"/>
                     </a:p>
                   </a:txBody>
-                  <a:tcPr marL="91440" marR="91440" marT="45720" marB="45720" anchor="ctr">
+                  <a:tcPr anchor="ctr">
                     <a:lnL w="9525" cap="flat" cmpd="sng" algn="ctr">
                       <a:solidFill>
                         <a:srgbClr val="E2E6EB"/>
@@ -7728,7 +7836,7 @@
                     <a:bodyPr/>
                     <a:lstStyle/>
                     <a:p>
-                      <a:pPr algn="ctr" indent="0" marL="0">
+                      <a:pPr marL="0" indent="0" algn="ctr">
                         <a:buNone/>
                       </a:pPr>
                       <a:r>
@@ -7742,7 +7850,7 @@
                       <a:endParaRPr lang="en-US" sz="1500" dirty="0"/>
                     </a:p>
                   </a:txBody>
-                  <a:tcPr marL="91440" marR="91440" marT="45720" marB="45720" anchor="ctr">
+                  <a:tcPr anchor="ctr">
                     <a:lnL w="9525" cap="flat" cmpd="sng" algn="ctr">
                       <a:solidFill>
                         <a:srgbClr val="E2E6EB"/>
@@ -7789,7 +7897,7 @@
                     <a:bodyPr/>
                     <a:lstStyle/>
                     <a:p>
-                      <a:pPr algn="ctr" indent="0" marL="0">
+                      <a:pPr marL="0" indent="0" algn="ctr">
                         <a:buNone/>
                       </a:pPr>
                       <a:r>
@@ -7803,7 +7911,7 @@
                       <a:endParaRPr lang="en-US" sz="1500" dirty="0"/>
                     </a:p>
                   </a:txBody>
-                  <a:tcPr marL="91440" marR="91440" marT="45720" marB="45720" anchor="ctr">
+                  <a:tcPr anchor="ctr">
                     <a:lnL w="9525" cap="flat" cmpd="sng" algn="ctr">
                       <a:solidFill>
                         <a:srgbClr val="E2E6EB"/>
@@ -7850,7 +7958,7 @@
                     <a:bodyPr/>
                     <a:lstStyle/>
                     <a:p>
-                      <a:pPr algn="ctr" indent="0" marL="0">
+                      <a:pPr marL="0" indent="0" algn="ctr">
                         <a:buNone/>
                       </a:pPr>
                       <a:r>
@@ -7864,7 +7972,7 @@
                       <a:endParaRPr lang="en-US" sz="1500" dirty="0"/>
                     </a:p>
                   </a:txBody>
-                  <a:tcPr marL="91440" marR="91440" marT="45720" marB="45720" anchor="ctr">
+                  <a:tcPr anchor="ctr">
                     <a:lnL w="9525" cap="flat" cmpd="sng" algn="ctr">
                       <a:solidFill>
                         <a:srgbClr val="E2E6EB"/>
@@ -7906,6 +8014,11 @@
                     </a:solidFill>
                   </a:tcPr>
                 </a:tc>
+                <a:extLst>
+                  <a:ext uri="{0D108BD9-81ED-4DB2-BD59-A6C34878D82A}">
+                    <a16:rowId xmlns:a16="http://schemas.microsoft.com/office/drawing/2014/main" val="10009"/>
+                  </a:ext>
+                </a:extLst>
               </a:tr>
             </a:tbl>
           </a:graphicData>
@@ -7932,7 +8045,7 @@
           <a:bodyPr wrap="square" lIns="0" tIns="0" rIns="0" bIns="0" rtlCol="0" anchor="t"/>
           <a:lstStyle/>
           <a:p>
-            <a:pPr indent="0" marL="0">
+            <a:pPr marL="0" indent="0">
               <a:buNone/>
             </a:pPr>
             <a:r>
@@ -7949,7 +8062,7 @@
       </p:sp>
       <p:sp>
         <p:nvSpPr>
-          <p:cNvPr id="5" name="why-card"/>
+          <p:cNvPr id="3" name="why-card"/>
           <p:cNvSpPr/>
           <p:nvPr/>
         </p:nvSpPr>
@@ -7973,6 +8086,13 @@
             <a:prstDash val="solid"/>
           </a:ln>
         </p:spPr>
+        <p:txBody>
+          <a:bodyPr/>
+          <a:lstStyle/>
+          <a:p>
+            <a:endParaRPr lang="en-US"/>
+          </a:p>
+        </p:txBody>
       </p:sp>
       <p:sp>
         <p:nvSpPr>
@@ -7995,7 +8115,7 @@
           <a:bodyPr wrap="square" lIns="0" tIns="0" rIns="0" bIns="0" rtlCol="0" anchor="ctr"/>
           <a:lstStyle/>
           <a:p>
-            <a:pPr indent="0" marL="0">
+            <a:pPr marL="0" indent="0">
               <a:buNone/>
             </a:pPr>
             <a:r>
@@ -8033,24 +8153,6 @@
         <p:txBody>
           <a:bodyPr wrap="square" lIns="0" tIns="0" rIns="0" bIns="0" rtlCol="0" anchor="t"/>
           <a:lstStyle/>
-          <a:p>
-            <a:pPr marL="342900" indent="-342900">
-              <a:spcAft>
-                <a:spcPts val="600"/>
-              </a:spcAft>
-              <a:buSzPct val="100000"/>
-              <a:buChar char="•"/>
-            </a:pPr>
-            <a:r>
-              <a:rPr lang="en-US" sz="1400" dirty="0">
-                <a:solidFill>
-                  <a:schemeClr val="tx1"/>
-                </a:solidFill>
-              </a:rPr>
-              <a:t>Not taught in lectures</a:t>
-            </a:r>
-            <a:endParaRPr lang="en-US" sz="1400" dirty="0"/>
-          </a:p>
           <a:p>
             <a:pPr marL="342900" indent="-342900">
               <a:spcAft>
@@ -8110,7 +8212,7 @@
           <a:bodyPr wrap="square" lIns="0" tIns="0" rIns="0" bIns="0" rtlCol="0" anchor="ctr"/>
           <a:lstStyle/>
           <a:p>
-            <a:pPr indent="0" marL="0">
+            <a:pPr marL="0" indent="0">
               <a:buNone/>
             </a:pPr>
             <a:r>
@@ -8206,7 +8308,7 @@
           </a:prstGeom>
           <a:extLst>
             <a:ext uri="{C572A759-6A51-4108-AA02-DFA0A04FC94B}">
-              <ma14:wrappingTextBoxFlag xmlns:ma14="http://schemas.microsoft.com/office/mac/drawingml/2011/main" val="0"/>
+              <ma14:wrappingTextBoxFlag xmlns="" xmlns:ma14="http://schemas.microsoft.com/office/mac/drawingml/2011/main" val="0"/>
             </a:ext>
           </a:extLst>
         </p:spPr>
@@ -8224,7 +8326,7 @@
           <a:p>
             <a:pPr algn="r"/>
             <a:fld id="{F7021451-1387-4CA6-816F-3879F97B5CBC}" type="slidenum">
-              <a:rPr b="0" lang="en-US"/>
+              <a:rPr lang="en-US" b="0"/>
               <a:t>4</a:t>
             </a:fld>
             <a:endParaRPr lang="en-US"/>
@@ -8259,9 +8361,11 @@
       <p:sp>
         <p:nvSpPr>
           <p:cNvPr id="2" name="Text 0"/>
-          <p:cNvSpPr/>
+          <p:cNvSpPr>
+            <a:spLocks noGrp="1"/>
+          </p:cNvSpPr>
           <p:nvPr>
-            <p:ph idx="100" type="title" hasCustomPrompt="1"/>
+            <p:ph type="title" idx="100" hasCustomPrompt="1"/>
           </p:nvPr>
         </p:nvSpPr>
         <p:spPr>
@@ -8279,7 +8383,7 @@
           <a:bodyPr wrap="square" lIns="0" tIns="0" rIns="0" bIns="0" rtlCol="0" anchor="ctr"/>
           <a:lstStyle/>
           <a:p>
-            <a:pPr indent="0" marL="0">
+            <a:pPr marL="0" indent="0">
               <a:buNone/>
             </a:pPr>
             <a:r>
@@ -8320,6 +8424,13 @@
             <a:prstDash val="solid"/>
           </a:ln>
         </p:spPr>
+        <p:txBody>
+          <a:bodyPr/>
+          <a:lstStyle/>
+          <a:p>
+            <a:endParaRPr lang="en-US"/>
+          </a:p>
+        </p:txBody>
       </p:sp>
       <p:sp>
         <p:nvSpPr>
@@ -8342,7 +8453,7 @@
           <a:bodyPr wrap="square" lIns="0" tIns="0" rIns="0" bIns="0" rtlCol="0" anchor="ctr"/>
           <a:lstStyle/>
           <a:p>
-            <a:pPr indent="0" marL="0">
+            <a:pPr marL="0" indent="0">
               <a:buNone/>
             </a:pPr>
             <a:r>
@@ -8381,7 +8492,7 @@
           <a:bodyPr wrap="square" lIns="0" tIns="0" rIns="0" bIns="0" rtlCol="0" anchor="ctr"/>
           <a:lstStyle/>
           <a:p>
-            <a:pPr indent="0" marL="0">
+            <a:pPr marL="0" indent="0">
               <a:buNone/>
             </a:pPr>
             <a:r>
@@ -8471,7 +8582,7 @@
       </p:sp>
       <p:graphicFrame>
         <p:nvGraphicFramePr>
-          <p:cNvPr id="7" name="Chart 0" descr=""/>
+          <p:cNvPr id="7" name="Chart 0"/>
           <p:cNvGraphicFramePr/>
           <p:nvPr/>
         </p:nvGraphicFramePr>
@@ -8479,9 +8590,9 @@
           <a:off x="5120640" y="1280160"/>
           <a:ext cx="6583680" cy="4846320"/>
         </p:xfrm>
-        <a:graphic xmlns:a="http://schemas.openxmlformats.org/drawingml/2006/main">
+        <a:graphic>
           <a:graphicData uri="http://schemas.openxmlformats.org/drawingml/2006/chart">
-            <c:chart xmlns:c="http://schemas.openxmlformats.org/drawingml/2006/chart" r:id="rId1"/>
+            <c:chart xmlns:c="http://schemas.openxmlformats.org/drawingml/2006/chart" xmlns:r="http://schemas.openxmlformats.org/officeDocument/2006/relationships" r:id="rId3"/>
           </a:graphicData>
         </a:graphic>
       </p:graphicFrame>
@@ -8505,7 +8616,7 @@
           </a:prstGeom>
           <a:extLst>
             <a:ext uri="{C572A759-6A51-4108-AA02-DFA0A04FC94B}">
-              <ma14:wrappingTextBoxFlag xmlns:ma14="http://schemas.microsoft.com/office/mac/drawingml/2011/main" val="0"/>
+              <ma14:wrappingTextBoxFlag xmlns="" xmlns:ma14="http://schemas.microsoft.com/office/mac/drawingml/2011/main" val="0"/>
             </a:ext>
           </a:extLst>
         </p:spPr>
@@ -8523,7 +8634,7 @@
           <a:p>
             <a:pPr algn="r"/>
             <a:fld id="{F7021451-1387-4CA6-816F-3879F97B5CBC}" type="slidenum">
-              <a:rPr b="0" lang="en-US"/>
+              <a:rPr lang="en-US" b="0"/>
               <a:t>5</a:t>
             </a:fld>
             <a:endParaRPr lang="en-US"/>
@@ -8558,9 +8669,11 @@
       <p:sp>
         <p:nvSpPr>
           <p:cNvPr id="2" name="Text 0"/>
-          <p:cNvSpPr/>
+          <p:cNvSpPr>
+            <a:spLocks noGrp="1"/>
+          </p:cNvSpPr>
           <p:nvPr>
-            <p:ph idx="100" type="title" hasCustomPrompt="1"/>
+            <p:ph type="title" idx="100" hasCustomPrompt="1"/>
           </p:nvPr>
         </p:nvSpPr>
         <p:spPr>
@@ -8578,7 +8691,7 @@
           <a:bodyPr wrap="square" lIns="0" tIns="0" rIns="0" bIns="0" rtlCol="0" anchor="ctr"/>
           <a:lstStyle/>
           <a:p>
-            <a:pPr indent="0" marL="0">
+            <a:pPr marL="0" indent="0">
               <a:buNone/>
             </a:pPr>
             <a:r>
@@ -8595,7 +8708,7 @@
       </p:sp>
       <p:graphicFrame>
         <p:nvGraphicFramePr>
-          <p:cNvPr id="3" name="Chart 0" descr=""/>
+          <p:cNvPr id="3" name="Chart 0"/>
           <p:cNvGraphicFramePr/>
           <p:nvPr/>
         </p:nvGraphicFramePr>
@@ -8603,22 +8716,22 @@
           <a:off x="548640" y="1280160"/>
           <a:ext cx="4206240" cy="3840480"/>
         </p:xfrm>
-        <a:graphic xmlns:a="http://schemas.openxmlformats.org/drawingml/2006/main">
+        <a:graphic>
           <a:graphicData uri="http://schemas.openxmlformats.org/drawingml/2006/chart">
-            <c:chart xmlns:c="http://schemas.openxmlformats.org/drawingml/2006/chart" r:id="rId1"/>
+            <c:chart xmlns:c="http://schemas.openxmlformats.org/drawingml/2006/chart" xmlns:r="http://schemas.openxmlformats.org/officeDocument/2006/relationships" r:id="rId3"/>
           </a:graphicData>
         </a:graphic>
       </p:graphicFrame>
       <p:pic>
         <p:nvPicPr>
-          <p:cNvPr id="4" name="Image 0" descr="SHAP waterfall for the held-out Dampe listing">    </p:cNvPr>
+          <p:cNvPr id="4" name="Image 0" descr="SHAP waterfall for the held-out Dampe listing"/>
           <p:cNvPicPr>
             <a:picLocks noChangeAspect="1"/>
           </p:cNvPicPr>
           <p:nvPr/>
         </p:nvPicPr>
         <p:blipFill>
-          <a:blip r:embed="rId2"/>
+          <a:blip r:embed="rId4"/>
           <a:stretch>
             <a:fillRect/>
           </a:stretch>
@@ -8659,6 +8772,13 @@
             <a:prstDash val="solid"/>
           </a:ln>
         </p:spPr>
+        <p:txBody>
+          <a:bodyPr/>
+          <a:lstStyle/>
+          <a:p>
+            <a:endParaRPr lang="en-US"/>
+          </a:p>
+        </p:txBody>
       </p:sp>
       <p:sp>
         <p:nvSpPr>
@@ -8681,7 +8801,7 @@
           <a:bodyPr wrap="square" lIns="0" tIns="0" rIns="0" bIns="0" rtlCol="0" anchor="ctr"/>
           <a:lstStyle/>
           <a:p>
-            <a:pPr indent="0" marL="0">
+            <a:pPr marL="0" indent="0">
               <a:buNone/>
             </a:pPr>
             <a:r>
@@ -8692,9 +8812,6 @@
               </a:rPr>
               <a:t>Held-out Dampe plot: </a:t>
             </a:r>
-            <a:pPr indent="0" marL="0">
-              <a:buNone/>
-            </a:pPr>
             <a:r>
               <a:rPr lang="en-US" sz="1500" dirty="0">
                 <a:solidFill>
@@ -8703,9 +8820,6 @@
               </a:rPr>
               <a:t>28 km from Fort, a low-priced area and far from a grade-A school pull the price down.  </a:t>
             </a:r>
-            <a:pPr indent="0" marL="0">
-              <a:buNone/>
-            </a:pPr>
             <a:r>
               <a:rPr lang="en-US" sz="1500" b="1" dirty="0">
                 <a:solidFill>
@@ -8738,7 +8852,7 @@
           </a:prstGeom>
           <a:extLst>
             <a:ext uri="{C572A759-6A51-4108-AA02-DFA0A04FC94B}">
-              <ma14:wrappingTextBoxFlag xmlns:ma14="http://schemas.microsoft.com/office/mac/drawingml/2011/main" val="0"/>
+              <ma14:wrappingTextBoxFlag xmlns="" xmlns:ma14="http://schemas.microsoft.com/office/mac/drawingml/2011/main" val="0"/>
             </a:ext>
           </a:extLst>
         </p:spPr>
@@ -8756,7 +8870,7 @@
           <a:p>
             <a:pPr algn="r"/>
             <a:fld id="{F7021451-1387-4CA6-816F-3879F97B5CBC}" type="slidenum">
-              <a:rPr b="0" lang="en-US"/>
+              <a:rPr lang="en-US" b="0"/>
               <a:t>6</a:t>
             </a:fld>
             <a:endParaRPr lang="en-US"/>
@@ -8791,9 +8905,11 @@
       <p:sp>
         <p:nvSpPr>
           <p:cNvPr id="2" name="Text 0"/>
-          <p:cNvSpPr/>
+          <p:cNvSpPr>
+            <a:spLocks noGrp="1"/>
+          </p:cNvSpPr>
           <p:nvPr>
-            <p:ph idx="100" type="title" hasCustomPrompt="1"/>
+            <p:ph type="title" idx="100" hasCustomPrompt="1"/>
           </p:nvPr>
         </p:nvSpPr>
         <p:spPr>
@@ -8811,7 +8927,7 @@
           <a:bodyPr wrap="square" lIns="0" tIns="0" rIns="0" bIns="0" rtlCol="0" anchor="ctr"/>
           <a:lstStyle/>
           <a:p>
-            <a:pPr indent="0" marL="0">
+            <a:pPr marL="0" indent="0">
               <a:buNone/>
             </a:pPr>
             <a:r>
@@ -8828,14 +8944,14 @@
       </p:sp>
       <p:pic>
         <p:nvPicPr>
-          <p:cNvPr id="3" name="Image 0" descr="Screenshot of the live Colombo Land Price Estimator app">    </p:cNvPr>
+          <p:cNvPr id="3" name="Image 0" descr="Screenshot of the live Colombo Land Price Estimator app"/>
           <p:cNvPicPr>
             <a:picLocks noChangeAspect="1"/>
           </p:cNvPicPr>
           <p:nvPr/>
         </p:nvPicPr>
         <p:blipFill>
-          <a:blip r:embed="rId1"/>
+          <a:blip r:embed="rId3"/>
           <a:stretch>
             <a:fillRect/>
           </a:stretch>
@@ -8871,7 +8987,7 @@
           <a:bodyPr wrap="square" lIns="0" tIns="0" rIns="0" bIns="0" rtlCol="0" anchor="ctr"/>
           <a:lstStyle/>
           <a:p>
-            <a:pPr indent="0" marL="0">
+            <a:pPr marL="0" indent="0">
               <a:buNone/>
             </a:pPr>
             <a:r>
@@ -8888,14 +9004,14 @@
       </p:sp>
       <p:pic>
         <p:nvPicPr>
-          <p:cNvPr id="5" name="Image 1" descr="QR code linking to the live app">    </p:cNvPr>
+          <p:cNvPr id="5" name="Image 1" descr="QR code linking to the live app"/>
           <p:cNvPicPr>
             <a:picLocks noChangeAspect="1"/>
           </p:cNvPicPr>
           <p:nvPr/>
         </p:nvPicPr>
         <p:blipFill>
-          <a:blip r:embed="rId2"/>
+          <a:blip r:embed="rId4"/>
           <a:stretch>
             <a:fillRect/>
           </a:stretch>
@@ -8931,7 +9047,7 @@
           <a:bodyPr wrap="square" lIns="0" tIns="0" rIns="0" bIns="0" rtlCol="0" anchor="ctr"/>
           <a:lstStyle/>
           <a:p>
-            <a:pPr indent="0" marL="0">
+            <a:pPr marL="0" indent="0">
               <a:buNone/>
             </a:pPr>
             <a:r>
@@ -8945,7 +9061,7 @@
             <a:endParaRPr lang="en-US" sz="1400" dirty="0"/>
           </a:p>
           <a:p>
-            <a:pPr indent="0" marL="0">
+            <a:pPr marL="0" indent="0">
               <a:buNone/>
             </a:pPr>
             <a:r>
@@ -8981,7 +9097,7 @@
           <a:bodyPr wrap="square" lIns="0" tIns="0" rIns="0" bIns="0" rtlCol="0" anchor="ctr"/>
           <a:lstStyle/>
           <a:p>
-            <a:pPr indent="0" marL="0">
+            <a:pPr marL="0" indent="0">
               <a:buNone/>
             </a:pPr>
             <a:r>
@@ -8989,7 +9105,7 @@
                 <a:solidFill>
                   <a:schemeClr val="tx2"/>
                 </a:solidFill>
-                <a:hlinkClick r:id="rId3" invalidUrl="" action="" tgtFrame="" tooltip="https://colombo-land-price-ml-5jekcfuzve5ezgfgjjpqoh.streamlit.app" history="1" highlightClick="0" endSnd="0">
+                <a:hlinkClick r:id="rId5" tooltip="https://colombo-land-price-ml-5jekcfuzve5ezgfgjjpqoh.streamlit.app">
                   <a:extLst>
                     <a:ext uri="{A12FA001-AC4F-418D-AE19-62706E023703}">
                       <ahyp:hlinkClr xmlns:ahyp="http://schemas.microsoft.com/office/drawing/2018/hyperlinkcolor" val="tx"/>
@@ -9102,6 +9218,13 @@
             <a:prstDash val="solid"/>
           </a:ln>
         </p:spPr>
+        <p:txBody>
+          <a:bodyPr/>
+          <a:lstStyle/>
+          <a:p>
+            <a:endParaRPr lang="en-US"/>
+          </a:p>
+        </p:txBody>
       </p:sp>
       <p:sp>
         <p:nvSpPr>
@@ -9124,7 +9247,7 @@
           <a:bodyPr wrap="square" lIns="0" tIns="0" rIns="0" bIns="0" rtlCol="0" anchor="ctr"/>
           <a:lstStyle/>
           <a:p>
-            <a:pPr algn="ctr" indent="0" marL="0">
+            <a:pPr marL="0" indent="0" algn="ctr">
               <a:buNone/>
             </a:pPr>
             <a:r>
@@ -9165,6 +9288,13 @@
             <a:prstDash val="solid"/>
           </a:ln>
         </p:spPr>
+        <p:txBody>
+          <a:bodyPr/>
+          <a:lstStyle/>
+          <a:p>
+            <a:endParaRPr lang="en-US"/>
+          </a:p>
+        </p:txBody>
       </p:sp>
       <p:sp>
         <p:nvSpPr>
@@ -9187,7 +9317,7 @@
           <a:bodyPr wrap="square" lIns="0" tIns="0" rIns="0" bIns="0" rtlCol="0" anchor="ctr"/>
           <a:lstStyle/>
           <a:p>
-            <a:pPr algn="ctr" indent="0" marL="0">
+            <a:pPr marL="0" indent="0" algn="ctr">
               <a:buNone/>
             </a:pPr>
             <a:r>
@@ -9228,6 +9358,13 @@
             <a:prstDash val="solid"/>
           </a:ln>
         </p:spPr>
+        <p:txBody>
+          <a:bodyPr/>
+          <a:lstStyle/>
+          <a:p>
+            <a:endParaRPr lang="en-US"/>
+          </a:p>
+        </p:txBody>
       </p:sp>
       <p:sp>
         <p:nvSpPr>
@@ -9250,7 +9387,7 @@
           <a:bodyPr wrap="square" lIns="0" tIns="0" rIns="0" bIns="0" rtlCol="0" anchor="ctr"/>
           <a:lstStyle/>
           <a:p>
-            <a:pPr algn="ctr" indent="0" marL="0">
+            <a:pPr marL="0" indent="0" algn="ctr">
               <a:buNone/>
             </a:pPr>
             <a:r>
@@ -9291,6 +9428,13 @@
             <a:prstDash val="solid"/>
           </a:ln>
         </p:spPr>
+        <p:txBody>
+          <a:bodyPr/>
+          <a:lstStyle/>
+          <a:p>
+            <a:endParaRPr lang="en-US"/>
+          </a:p>
+        </p:txBody>
       </p:sp>
       <p:sp>
         <p:nvSpPr>
@@ -9313,7 +9457,7 @@
           <a:bodyPr wrap="square" lIns="0" tIns="0" rIns="0" bIns="0" rtlCol="0" anchor="ctr"/>
           <a:lstStyle/>
           <a:p>
-            <a:pPr algn="ctr" indent="0" marL="0">
+            <a:pPr marL="0" indent="0" algn="ctr">
               <a:buNone/>
             </a:pPr>
             <a:r>
@@ -9349,7 +9493,7 @@
           <a:bodyPr wrap="square" lIns="0" tIns="0" rIns="0" bIns="0" rtlCol="0" anchor="ctr"/>
           <a:lstStyle/>
           <a:p>
-            <a:pPr indent="0" marL="0">
+            <a:pPr marL="0" indent="0">
               <a:buNone/>
             </a:pPr>
             <a:r>
@@ -9384,7 +9528,7 @@
           </a:prstGeom>
           <a:extLst>
             <a:ext uri="{C572A759-6A51-4108-AA02-DFA0A04FC94B}">
-              <ma14:wrappingTextBoxFlag xmlns:ma14="http://schemas.microsoft.com/office/mac/drawingml/2011/main" val="0"/>
+              <ma14:wrappingTextBoxFlag xmlns="" xmlns:ma14="http://schemas.microsoft.com/office/mac/drawingml/2011/main" val="0"/>
             </a:ext>
           </a:extLst>
         </p:spPr>
@@ -9402,7 +9546,7 @@
           <a:p>
             <a:pPr algn="r"/>
             <a:fld id="{F7021451-1387-4CA6-816F-3879F97B5CBC}" type="slidenum">
-              <a:rPr b="0" lang="en-US"/>
+              <a:rPr lang="en-US" b="0"/>
               <a:t>7</a:t>
             </a:fld>
             <a:endParaRPr lang="en-US"/>
@@ -9455,7 +9599,7 @@
           <a:bodyPr wrap="square" lIns="0" tIns="0" rIns="0" bIns="0" rtlCol="0" anchor="ctr"/>
           <a:lstStyle/>
           <a:p>
-            <a:pPr indent="0" marL="0">
+            <a:pPr marL="0" indent="0">
               <a:buNone/>
             </a:pPr>
             <a:r>
@@ -9501,6 +9645,13 @@
             <a:prstDash val="solid"/>
           </a:ln>
         </p:spPr>
+        <p:txBody>
+          <a:bodyPr/>
+          <a:lstStyle/>
+          <a:p>
+            <a:endParaRPr lang="en-US"/>
+          </a:p>
+        </p:txBody>
       </p:sp>
       <p:sp>
         <p:nvSpPr>
@@ -9523,7 +9674,7 @@
           <a:bodyPr wrap="square" lIns="0" tIns="0" rIns="0" bIns="0" rtlCol="0" anchor="ctr"/>
           <a:lstStyle/>
           <a:p>
-            <a:pPr indent="0" marL="0">
+            <a:pPr marL="0" indent="0">
               <a:buNone/>
             </a:pPr>
             <a:r>
@@ -9559,7 +9710,7 @@
           <a:bodyPr wrap="square" lIns="0" tIns="0" rIns="0" bIns="0" rtlCol="0" anchor="t"/>
           <a:lstStyle/>
           <a:p>
-            <a:pPr indent="0" marL="0">
+            <a:pPr marL="0" indent="0">
               <a:buNone/>
             </a:pPr>
             <a:r>
@@ -9602,6 +9753,13 @@
             <a:prstDash val="solid"/>
           </a:ln>
         </p:spPr>
+        <p:txBody>
+          <a:bodyPr/>
+          <a:lstStyle/>
+          <a:p>
+            <a:endParaRPr lang="en-US"/>
+          </a:p>
+        </p:txBody>
       </p:sp>
       <p:sp>
         <p:nvSpPr>
@@ -9624,7 +9782,7 @@
           <a:bodyPr wrap="square" lIns="0" tIns="0" rIns="0" bIns="0" rtlCol="0" anchor="ctr"/>
           <a:lstStyle/>
           <a:p>
-            <a:pPr indent="0" marL="0">
+            <a:pPr marL="0" indent="0">
               <a:buNone/>
             </a:pPr>
             <a:r>
@@ -9660,7 +9818,7 @@
           <a:bodyPr wrap="square" lIns="0" tIns="0" rIns="0" bIns="0" rtlCol="0" anchor="t"/>
           <a:lstStyle/>
           <a:p>
-            <a:pPr indent="0" marL="0">
+            <a:pPr marL="0" indent="0">
               <a:buNone/>
             </a:pPr>
             <a:r>
@@ -9703,6 +9861,13 @@
             <a:prstDash val="solid"/>
           </a:ln>
         </p:spPr>
+        <p:txBody>
+          <a:bodyPr/>
+          <a:lstStyle/>
+          <a:p>
+            <a:endParaRPr lang="en-US"/>
+          </a:p>
+        </p:txBody>
       </p:sp>
       <p:sp>
         <p:nvSpPr>
@@ -9725,7 +9890,7 @@
           <a:bodyPr wrap="square" lIns="0" tIns="0" rIns="0" bIns="0" rtlCol="0" anchor="ctr"/>
           <a:lstStyle/>
           <a:p>
-            <a:pPr indent="0" marL="0">
+            <a:pPr marL="0" indent="0">
               <a:buNone/>
             </a:pPr>
             <a:r>
@@ -9761,7 +9926,7 @@
           <a:bodyPr wrap="square" lIns="0" tIns="0" rIns="0" bIns="0" rtlCol="0" anchor="t"/>
           <a:lstStyle/>
           <a:p>
-            <a:pPr indent="0" marL="0">
+            <a:pPr marL="0" indent="0">
               <a:buNone/>
             </a:pPr>
             <a:r>
@@ -9784,8 +9949,8 @@
         </p:nvSpPr>
         <p:spPr>
           <a:xfrm>
-            <a:off x="731520" y="4343400"/>
-            <a:ext cx="10698480" cy="731520"/>
+            <a:off x="4743938" y="4954172"/>
+            <a:ext cx="2754142" cy="731520"/>
           </a:xfrm>
           <a:prstGeom prst="rect">
             <a:avLst/>
@@ -9797,7 +9962,7 @@
           <a:bodyPr wrap="square" lIns="0" tIns="0" rIns="0" bIns="0" rtlCol="0" anchor="ctr"/>
           <a:lstStyle/>
           <a:p>
-            <a:pPr indent="0" marL="0">
+            <a:pPr marL="0" indent="0" algn="ctr">
               <a:buNone/>
             </a:pPr>
             <a:r>
@@ -9809,69 +9974,9 @@
                 <a:ea typeface="Cambria" pitchFamily="34" charset="-122"/>
                 <a:cs typeface="Cambria" pitchFamily="34" charset="-120"/>
               </a:rPr>
-              <a:t>Thank you  ·  Questions?</a:t>
+              <a:t>Thank you  </a:t>
             </a:r>
             <a:endParaRPr lang="en-US" sz="3000" dirty="0"/>
-          </a:p>
-        </p:txBody>
-      </p:sp>
-      <p:sp>
-        <p:nvSpPr>
-          <p:cNvPr id="14" name="Text 0"/>
-          <p:cNvSpPr/>
-          <p:nvPr>
-            <p:ph idx="100" type="title" hasCustomPrompt="1"/>
-          </p:nvPr>
-        </p:nvSpPr>
-        <p:spPr>
-          <a:xfrm>
-            <a:off x="731520" y="1554480"/>
-            <a:ext cx="10698480" cy="1463040"/>
-          </a:xfrm>
-          <a:prstGeom prst="rect">
-            <a:avLst/>
-          </a:prstGeom>
-          <a:noFill/>
-          <a:ln/>
-        </p:spPr>
-        <p:txBody>
-          <a:bodyPr wrap="square" lIns="0" tIns="0" rIns="0" bIns="0" rtlCol="0" anchor="b"/>
-          <a:lstStyle/>
-          <a:p>
-            <a:pPr algn="l" indent="0" marL="0">
-              <a:buNone/>
-            </a:pPr>
-            <a:endParaRPr lang="en-US" sz="4400" dirty="0"/>
-          </a:p>
-        </p:txBody>
-      </p:sp>
-      <p:sp>
-        <p:nvSpPr>
-          <p:cNvPr id="15" name="Text 0"/>
-          <p:cNvSpPr/>
-          <p:nvPr>
-            <p:ph idx="101" type="body" hasCustomPrompt="1"/>
-          </p:nvPr>
-        </p:nvSpPr>
-        <p:spPr>
-          <a:xfrm>
-            <a:off x="731520" y="3154680"/>
-            <a:ext cx="10058400" cy="1005840"/>
-          </a:xfrm>
-          <a:prstGeom prst="rect">
-            <a:avLst/>
-          </a:prstGeom>
-          <a:noFill/>
-          <a:ln/>
-        </p:spPr>
-        <p:txBody>
-          <a:bodyPr wrap="square" lIns="0" tIns="0" rIns="0" bIns="0" rtlCol="0" anchor="t"/>
-          <a:lstStyle/>
-          <a:p>
-            <a:pPr indent="0" marL="0">
-              <a:buNone/>
-            </a:pPr>
-            <a:endParaRPr lang="en-US" sz="2000" dirty="0"/>
           </a:p>
         </p:txBody>
       </p:sp>
@@ -9903,9 +10008,11 @@
       <p:sp>
         <p:nvSpPr>
           <p:cNvPr id="2" name="Text 0"/>
-          <p:cNvSpPr/>
+          <p:cNvSpPr>
+            <a:spLocks noGrp="1"/>
+          </p:cNvSpPr>
           <p:nvPr>
-            <p:ph idx="100" type="title" hasCustomPrompt="1"/>
+            <p:ph type="title" idx="100" hasCustomPrompt="1"/>
           </p:nvPr>
         </p:nvSpPr>
         <p:spPr>
@@ -9923,7 +10030,7 @@
           <a:bodyPr wrap="square" lIns="0" tIns="0" rIns="0" bIns="0" rtlCol="0" anchor="ctr"/>
           <a:lstStyle/>
           <a:p>
-            <a:pPr indent="0" marL="0">
+            <a:pPr marL="0" indent="0">
               <a:buNone/>
             </a:pPr>
             <a:r>
@@ -9961,12 +10068,48 @@
             <a:tbl>
               <a:tblPr/>
               <a:tblGrid>
-                <a:gridCol w="3291840"/>
-                <a:gridCol w="1554480"/>
-                <a:gridCol w="1554480"/>
-                <a:gridCol w="1463040"/>
-                <a:gridCol w="1737360"/>
-                <a:gridCol w="1463040"/>
+                <a:gridCol w="3291840">
+                  <a:extLst>
+                    <a:ext uri="{9D8B030D-6E8A-4147-A177-3AD203B41FA5}">
+                      <a16:colId xmlns:a16="http://schemas.microsoft.com/office/drawing/2014/main" val="20000"/>
+                    </a:ext>
+                  </a:extLst>
+                </a:gridCol>
+                <a:gridCol w="1554480">
+                  <a:extLst>
+                    <a:ext uri="{9D8B030D-6E8A-4147-A177-3AD203B41FA5}">
+                      <a16:colId xmlns:a16="http://schemas.microsoft.com/office/drawing/2014/main" val="20001"/>
+                    </a:ext>
+                  </a:extLst>
+                </a:gridCol>
+                <a:gridCol w="1554480">
+                  <a:extLst>
+                    <a:ext uri="{9D8B030D-6E8A-4147-A177-3AD203B41FA5}">
+                      <a16:colId xmlns:a16="http://schemas.microsoft.com/office/drawing/2014/main" val="20002"/>
+                    </a:ext>
+                  </a:extLst>
+                </a:gridCol>
+                <a:gridCol w="1463040">
+                  <a:extLst>
+                    <a:ext uri="{9D8B030D-6E8A-4147-A177-3AD203B41FA5}">
+                      <a16:colId xmlns:a16="http://schemas.microsoft.com/office/drawing/2014/main" val="20003"/>
+                    </a:ext>
+                  </a:extLst>
+                </a:gridCol>
+                <a:gridCol w="1737360">
+                  <a:extLst>
+                    <a:ext uri="{9D8B030D-6E8A-4147-A177-3AD203B41FA5}">
+                      <a16:colId xmlns:a16="http://schemas.microsoft.com/office/drawing/2014/main" val="20004"/>
+                    </a:ext>
+                  </a:extLst>
+                </a:gridCol>
+                <a:gridCol w="1463040">
+                  <a:extLst>
+                    <a:ext uri="{9D8B030D-6E8A-4147-A177-3AD203B41FA5}">
+                      <a16:colId xmlns:a16="http://schemas.microsoft.com/office/drawing/2014/main" val="20005"/>
+                    </a:ext>
+                  </a:extLst>
+                </a:gridCol>
               </a:tblGrid>
               <a:tr h="411480">
                 <a:tc>
@@ -9974,7 +10117,7 @@
                     <a:bodyPr/>
                     <a:lstStyle/>
                     <a:p>
-                      <a:pPr indent="0" marL="0">
+                      <a:pPr marL="0" indent="0">
                         <a:buNone/>
                       </a:pPr>
                       <a:r>
@@ -9988,7 +10131,7 @@
                       <a:endParaRPr lang="en-US" sz="1400" dirty="0"/>
                     </a:p>
                   </a:txBody>
-                  <a:tcPr marL="91440" marR="91440" marT="45720" marB="45720" anchor="ctr">
+                  <a:tcPr anchor="ctr">
                     <a:lnL w="9525" cap="flat" cmpd="sng" algn="ctr">
                       <a:solidFill>
                         <a:srgbClr val="E2E6EB"/>
@@ -10035,7 +10178,7 @@
                     <a:bodyPr/>
                     <a:lstStyle/>
                     <a:p>
-                      <a:pPr indent="0" marL="0">
+                      <a:pPr marL="0" indent="0">
                         <a:buNone/>
                       </a:pPr>
                       <a:r>
@@ -10049,7 +10192,7 @@
                       <a:endParaRPr lang="en-US" sz="1400" dirty="0"/>
                     </a:p>
                   </a:txBody>
-                  <a:tcPr marL="91440" marR="91440" marT="45720" marB="45720" anchor="ctr">
+                  <a:tcPr anchor="ctr">
                     <a:lnL w="9525" cap="flat" cmpd="sng" algn="ctr">
                       <a:solidFill>
                         <a:srgbClr val="E2E6EB"/>
@@ -10096,7 +10239,7 @@
                     <a:bodyPr/>
                     <a:lstStyle/>
                     <a:p>
-                      <a:pPr indent="0" marL="0">
+                      <a:pPr marL="0" indent="0">
                         <a:buNone/>
                       </a:pPr>
                       <a:r>
@@ -10110,7 +10253,7 @@
                       <a:endParaRPr lang="en-US" sz="1400" dirty="0"/>
                     </a:p>
                   </a:txBody>
-                  <a:tcPr marL="91440" marR="91440" marT="45720" marB="45720" anchor="ctr">
+                  <a:tcPr anchor="ctr">
                     <a:lnL w="9525" cap="flat" cmpd="sng" algn="ctr">
                       <a:solidFill>
                         <a:srgbClr val="E2E6EB"/>
@@ -10157,7 +10300,7 @@
                     <a:bodyPr/>
                     <a:lstStyle/>
                     <a:p>
-                      <a:pPr indent="0" marL="0">
+                      <a:pPr marL="0" indent="0">
                         <a:buNone/>
                       </a:pPr>
                       <a:r>
@@ -10171,7 +10314,7 @@
                       <a:endParaRPr lang="en-US" sz="1400" dirty="0"/>
                     </a:p>
                   </a:txBody>
-                  <a:tcPr marL="91440" marR="91440" marT="45720" marB="45720" anchor="ctr">
+                  <a:tcPr anchor="ctr">
                     <a:lnL w="9525" cap="flat" cmpd="sng" algn="ctr">
                       <a:solidFill>
                         <a:srgbClr val="E2E6EB"/>
@@ -10218,7 +10361,7 @@
                     <a:bodyPr/>
                     <a:lstStyle/>
                     <a:p>
-                      <a:pPr indent="0" marL="0">
+                      <a:pPr marL="0" indent="0">
                         <a:buNone/>
                       </a:pPr>
                       <a:r>
@@ -10232,7 +10375,7 @@
                       <a:endParaRPr lang="en-US" sz="1400" dirty="0"/>
                     </a:p>
                   </a:txBody>
-                  <a:tcPr marL="91440" marR="91440" marT="45720" marB="45720" anchor="ctr">
+                  <a:tcPr anchor="ctr">
                     <a:lnL w="9525" cap="flat" cmpd="sng" algn="ctr">
                       <a:solidFill>
                         <a:srgbClr val="E2E6EB"/>
@@ -10279,7 +10422,7 @@
                     <a:bodyPr/>
                     <a:lstStyle/>
                     <a:p>
-                      <a:pPr indent="0" marL="0">
+                      <a:pPr marL="0" indent="0">
                         <a:buNone/>
                       </a:pPr>
                       <a:r>
@@ -10293,7 +10436,7 @@
                       <a:endParaRPr lang="en-US" sz="1400" dirty="0"/>
                     </a:p>
                   </a:txBody>
-                  <a:tcPr marL="91440" marR="91440" marT="45720" marB="45720" anchor="ctr">
+                  <a:tcPr anchor="ctr">
                     <a:lnL w="9525" cap="flat" cmpd="sng" algn="ctr">
                       <a:solidFill>
                         <a:srgbClr val="E2E6EB"/>
@@ -10335,6 +10478,11 @@
                     </a:solidFill>
                   </a:tcPr>
                 </a:tc>
+                <a:extLst>
+                  <a:ext uri="{0D108BD9-81ED-4DB2-BD59-A6C34878D82A}">
+                    <a16:rowId xmlns:a16="http://schemas.microsoft.com/office/drawing/2014/main" val="10000"/>
+                  </a:ext>
+                </a:extLst>
               </a:tr>
               <a:tr h="411480">
                 <a:tc>
@@ -10342,7 +10490,7 @@
                     <a:bodyPr/>
                     <a:lstStyle/>
                     <a:p>
-                      <a:pPr indent="0" marL="0">
+                      <a:pPr marL="0" indent="0">
                         <a:buNone/>
                       </a:pPr>
                       <a:r>
@@ -10356,7 +10504,7 @@
                       <a:endParaRPr lang="en-US" sz="1400" dirty="0"/>
                     </a:p>
                   </a:txBody>
-                  <a:tcPr marL="91440" marR="91440" marT="45720" marB="45720" anchor="ctr">
+                  <a:tcPr anchor="ctr">
                     <a:lnL w="9525" cap="flat" cmpd="sng" algn="ctr">
                       <a:solidFill>
                         <a:srgbClr val="E2E6EB"/>
@@ -10400,7 +10548,7 @@
                     <a:bodyPr/>
                     <a:lstStyle/>
                     <a:p>
-                      <a:pPr indent="0" marL="0">
+                      <a:pPr marL="0" indent="0">
                         <a:buNone/>
                       </a:pPr>
                       <a:r>
@@ -10414,7 +10562,7 @@
                       <a:endParaRPr lang="en-US" sz="1400" dirty="0"/>
                     </a:p>
                   </a:txBody>
-                  <a:tcPr marL="91440" marR="91440" marT="45720" marB="45720" anchor="ctr">
+                  <a:tcPr anchor="ctr">
                     <a:lnL w="9525" cap="flat" cmpd="sng" algn="ctr">
                       <a:solidFill>
                         <a:srgbClr val="E2E6EB"/>
@@ -10458,7 +10606,7 @@
                     <a:bodyPr/>
                     <a:lstStyle/>
                     <a:p>
-                      <a:pPr indent="0" marL="0">
+                      <a:pPr marL="0" indent="0">
                         <a:buNone/>
                       </a:pPr>
                       <a:r>
@@ -10472,7 +10620,7 @@
                       <a:endParaRPr lang="en-US" sz="1400" dirty="0"/>
                     </a:p>
                   </a:txBody>
-                  <a:tcPr marL="91440" marR="91440" marT="45720" marB="45720" anchor="ctr">
+                  <a:tcPr anchor="ctr">
                     <a:lnL w="9525" cap="flat" cmpd="sng" algn="ctr">
                       <a:solidFill>
                         <a:srgbClr val="E2E6EB"/>
@@ -10516,7 +10664,7 @@
                     <a:bodyPr/>
                     <a:lstStyle/>
                     <a:p>
-                      <a:pPr indent="0" marL="0">
+                      <a:pPr marL="0" indent="0">
                         <a:buNone/>
                       </a:pPr>
                       <a:r>
@@ -10530,7 +10678,7 @@
                       <a:endParaRPr lang="en-US" sz="1400" dirty="0"/>
                     </a:p>
                   </a:txBody>
-                  <a:tcPr marL="91440" marR="91440" marT="45720" marB="45720" anchor="ctr">
+                  <a:tcPr anchor="ctr">
                     <a:lnL w="9525" cap="flat" cmpd="sng" algn="ctr">
                       <a:solidFill>
                         <a:srgbClr val="E2E6EB"/>
@@ -10574,7 +10722,7 @@
                     <a:bodyPr/>
                     <a:lstStyle/>
                     <a:p>
-                      <a:pPr indent="0" marL="0">
+                      <a:pPr marL="0" indent="0">
                         <a:buNone/>
                       </a:pPr>
                       <a:r>
@@ -10588,7 +10736,7 @@
                       <a:endParaRPr lang="en-US" sz="1400" dirty="0"/>
                     </a:p>
                   </a:txBody>
-                  <a:tcPr marL="91440" marR="91440" marT="45720" marB="45720" anchor="ctr">
+                  <a:tcPr anchor="ctr">
                     <a:lnL w="9525" cap="flat" cmpd="sng" algn="ctr">
                       <a:solidFill>
                         <a:srgbClr val="E2E6EB"/>
@@ -10632,7 +10780,7 @@
                     <a:bodyPr/>
                     <a:lstStyle/>
                     <a:p>
-                      <a:pPr indent="0" marL="0">
+                      <a:pPr marL="0" indent="0">
                         <a:buNone/>
                       </a:pPr>
                       <a:r>
@@ -10646,7 +10794,7 @@
                       <a:endParaRPr lang="en-US" sz="1400" dirty="0"/>
                     </a:p>
                   </a:txBody>
-                  <a:tcPr marL="91440" marR="91440" marT="45720" marB="45720" anchor="ctr">
+                  <a:tcPr anchor="ctr">
                     <a:lnL w="9525" cap="flat" cmpd="sng" algn="ctr">
                       <a:solidFill>
                         <a:srgbClr val="E2E6EB"/>
@@ -10685,6 +10833,11 @@
                     </a:lnB>
                   </a:tcPr>
                 </a:tc>
+                <a:extLst>
+                  <a:ext uri="{0D108BD9-81ED-4DB2-BD59-A6C34878D82A}">
+                    <a16:rowId xmlns:a16="http://schemas.microsoft.com/office/drawing/2014/main" val="10001"/>
+                  </a:ext>
+                </a:extLst>
               </a:tr>
               <a:tr h="411480">
                 <a:tc>
@@ -10692,7 +10845,7 @@
                     <a:bodyPr/>
                     <a:lstStyle/>
                     <a:p>
-                      <a:pPr indent="0" marL="0">
+                      <a:pPr marL="0" indent="0">
                         <a:buNone/>
                       </a:pPr>
                       <a:r>
@@ -10706,7 +10859,7 @@
                       <a:endParaRPr lang="en-US" sz="1400" dirty="0"/>
                     </a:p>
                   </a:txBody>
-                  <a:tcPr marL="91440" marR="91440" marT="45720" marB="45720" anchor="ctr">
+                  <a:tcPr anchor="ctr">
                     <a:lnL w="9525" cap="flat" cmpd="sng" algn="ctr">
                       <a:solidFill>
                         <a:srgbClr val="E2E6EB"/>
@@ -10750,7 +10903,7 @@
                     <a:bodyPr/>
                     <a:lstStyle/>
                     <a:p>
-                      <a:pPr indent="0" marL="0">
+                      <a:pPr marL="0" indent="0">
                         <a:buNone/>
                       </a:pPr>
                       <a:r>
@@ -10764,7 +10917,7 @@
                       <a:endParaRPr lang="en-US" sz="1400" dirty="0"/>
                     </a:p>
                   </a:txBody>
-                  <a:tcPr marL="91440" marR="91440" marT="45720" marB="45720" anchor="ctr">
+                  <a:tcPr anchor="ctr">
                     <a:lnL w="9525" cap="flat" cmpd="sng" algn="ctr">
                       <a:solidFill>
                         <a:srgbClr val="E2E6EB"/>
@@ -10808,7 +10961,7 @@
                     <a:bodyPr/>
                     <a:lstStyle/>
                     <a:p>
-                      <a:pPr indent="0" marL="0">
+                      <a:pPr marL="0" indent="0">
                         <a:buNone/>
                       </a:pPr>
                       <a:r>
@@ -10822,7 +10975,7 @@
                       <a:endParaRPr lang="en-US" sz="1400" dirty="0"/>
                     </a:p>
                   </a:txBody>
-                  <a:tcPr marL="91440" marR="91440" marT="45720" marB="45720" anchor="ctr">
+                  <a:tcPr anchor="ctr">
                     <a:lnL w="9525" cap="flat" cmpd="sng" algn="ctr">
                       <a:solidFill>
                         <a:srgbClr val="E2E6EB"/>
@@ -10866,7 +11019,7 @@
                     <a:bodyPr/>
                     <a:lstStyle/>
                     <a:p>
-                      <a:pPr indent="0" marL="0">
+                      <a:pPr marL="0" indent="0">
                         <a:buNone/>
                       </a:pPr>
                       <a:r>
@@ -10880,7 +11033,7 @@
                       <a:endParaRPr lang="en-US" sz="1400" dirty="0"/>
                     </a:p>
                   </a:txBody>
-                  <a:tcPr marL="91440" marR="91440" marT="45720" marB="45720" anchor="ctr">
+                  <a:tcPr anchor="ctr">
                     <a:lnL w="9525" cap="flat" cmpd="sng" algn="ctr">
                       <a:solidFill>
                         <a:srgbClr val="E2E6EB"/>
@@ -10924,7 +11077,7 @@
                     <a:bodyPr/>
                     <a:lstStyle/>
                     <a:p>
-                      <a:pPr indent="0" marL="0">
+                      <a:pPr marL="0" indent="0">
                         <a:buNone/>
                       </a:pPr>
                       <a:r>
@@ -10938,7 +11091,7 @@
                       <a:endParaRPr lang="en-US" sz="1400" dirty="0"/>
                     </a:p>
                   </a:txBody>
-                  <a:tcPr marL="91440" marR="91440" marT="45720" marB="45720" anchor="ctr">
+                  <a:tcPr anchor="ctr">
                     <a:lnL w="9525" cap="flat" cmpd="sng" algn="ctr">
                       <a:solidFill>
                         <a:srgbClr val="E2E6EB"/>
@@ -10982,7 +11135,7 @@
                     <a:bodyPr/>
                     <a:lstStyle/>
                     <a:p>
-                      <a:pPr indent="0" marL="0">
+                      <a:pPr marL="0" indent="0">
                         <a:buNone/>
                       </a:pPr>
                       <a:r>
@@ -10996,7 +11149,7 @@
                       <a:endParaRPr lang="en-US" sz="1400" dirty="0"/>
                     </a:p>
                   </a:txBody>
-                  <a:tcPr marL="91440" marR="91440" marT="45720" marB="45720" anchor="ctr">
+                  <a:tcPr anchor="ctr">
                     <a:lnL w="9525" cap="flat" cmpd="sng" algn="ctr">
                       <a:solidFill>
                         <a:srgbClr val="E2E6EB"/>
@@ -11035,6 +11188,11 @@
                     </a:lnB>
                   </a:tcPr>
                 </a:tc>
+                <a:extLst>
+                  <a:ext uri="{0D108BD9-81ED-4DB2-BD59-A6C34878D82A}">
+                    <a16:rowId xmlns:a16="http://schemas.microsoft.com/office/drawing/2014/main" val="10002"/>
+                  </a:ext>
+                </a:extLst>
               </a:tr>
               <a:tr h="411480">
                 <a:tc>
@@ -11042,7 +11200,7 @@
                     <a:bodyPr/>
                     <a:lstStyle/>
                     <a:p>
-                      <a:pPr indent="0" marL="0">
+                      <a:pPr marL="0" indent="0">
                         <a:buNone/>
                       </a:pPr>
                       <a:r>
@@ -11056,7 +11214,7 @@
                       <a:endParaRPr lang="en-US" sz="1400" dirty="0"/>
                     </a:p>
                   </a:txBody>
-                  <a:tcPr marL="91440" marR="91440" marT="45720" marB="45720" anchor="ctr">
+                  <a:tcPr anchor="ctr">
                     <a:lnL w="9525" cap="flat" cmpd="sng" algn="ctr">
                       <a:solidFill>
                         <a:srgbClr val="E2E6EB"/>
@@ -11100,7 +11258,7 @@
                     <a:bodyPr/>
                     <a:lstStyle/>
                     <a:p>
-                      <a:pPr indent="0" marL="0">
+                      <a:pPr marL="0" indent="0">
                         <a:buNone/>
                       </a:pPr>
                       <a:r>
@@ -11114,7 +11272,7 @@
                       <a:endParaRPr lang="en-US" sz="1400" dirty="0"/>
                     </a:p>
                   </a:txBody>
-                  <a:tcPr marL="91440" marR="91440" marT="45720" marB="45720" anchor="ctr">
+                  <a:tcPr anchor="ctr">
                     <a:lnL w="9525" cap="flat" cmpd="sng" algn="ctr">
                       <a:solidFill>
                         <a:srgbClr val="E2E6EB"/>
@@ -11158,7 +11316,7 @@
                     <a:bodyPr/>
                     <a:lstStyle/>
                     <a:p>
-                      <a:pPr indent="0" marL="0">
+                      <a:pPr marL="0" indent="0">
                         <a:buNone/>
                       </a:pPr>
                       <a:r>
@@ -11172,7 +11330,7 @@
                       <a:endParaRPr lang="en-US" sz="1400" dirty="0"/>
                     </a:p>
                   </a:txBody>
-                  <a:tcPr marL="91440" marR="91440" marT="45720" marB="45720" anchor="ctr">
+                  <a:tcPr anchor="ctr">
                     <a:lnL w="9525" cap="flat" cmpd="sng" algn="ctr">
                       <a:solidFill>
                         <a:srgbClr val="E2E6EB"/>
@@ -11216,7 +11374,7 @@
                     <a:bodyPr/>
                     <a:lstStyle/>
                     <a:p>
-                      <a:pPr indent="0" marL="0">
+                      <a:pPr marL="0" indent="0">
                         <a:buNone/>
                       </a:pPr>
                       <a:r>
@@ -11230,7 +11388,7 @@
                       <a:endParaRPr lang="en-US" sz="1400" dirty="0"/>
                     </a:p>
                   </a:txBody>
-                  <a:tcPr marL="91440" marR="91440" marT="45720" marB="45720" anchor="ctr">
+                  <a:tcPr anchor="ctr">
                     <a:lnL w="9525" cap="flat" cmpd="sng" algn="ctr">
                       <a:solidFill>
                         <a:srgbClr val="E2E6EB"/>
@@ -11274,7 +11432,7 @@
                     <a:bodyPr/>
                     <a:lstStyle/>
                     <a:p>
-                      <a:pPr indent="0" marL="0">
+                      <a:pPr marL="0" indent="0">
                         <a:buNone/>
                       </a:pPr>
                       <a:r>
@@ -11288,7 +11446,7 @@
                       <a:endParaRPr lang="en-US" sz="1400" dirty="0"/>
                     </a:p>
                   </a:txBody>
-                  <a:tcPr marL="91440" marR="91440" marT="45720" marB="45720" anchor="ctr">
+                  <a:tcPr anchor="ctr">
                     <a:lnL w="9525" cap="flat" cmpd="sng" algn="ctr">
                       <a:solidFill>
                         <a:srgbClr val="E2E6EB"/>
@@ -11332,7 +11490,7 @@
                     <a:bodyPr/>
                     <a:lstStyle/>
                     <a:p>
-                      <a:pPr indent="0" marL="0">
+                      <a:pPr marL="0" indent="0">
                         <a:buNone/>
                       </a:pPr>
                       <a:r>
@@ -11346,7 +11504,7 @@
                       <a:endParaRPr lang="en-US" sz="1400" dirty="0"/>
                     </a:p>
                   </a:txBody>
-                  <a:tcPr marL="91440" marR="91440" marT="45720" marB="45720" anchor="ctr">
+                  <a:tcPr anchor="ctr">
                     <a:lnL w="9525" cap="flat" cmpd="sng" algn="ctr">
                       <a:solidFill>
                         <a:srgbClr val="E2E6EB"/>
@@ -11385,6 +11543,11 @@
                     </a:lnB>
                   </a:tcPr>
                 </a:tc>
+                <a:extLst>
+                  <a:ext uri="{0D108BD9-81ED-4DB2-BD59-A6C34878D82A}">
+                    <a16:rowId xmlns:a16="http://schemas.microsoft.com/office/drawing/2014/main" val="10003"/>
+                  </a:ext>
+                </a:extLst>
               </a:tr>
               <a:tr h="411480">
                 <a:tc>
@@ -11392,7 +11555,7 @@
                     <a:bodyPr/>
                     <a:lstStyle/>
                     <a:p>
-                      <a:pPr indent="0" marL="0">
+                      <a:pPr marL="0" indent="0">
                         <a:buNone/>
                       </a:pPr>
                       <a:r>
@@ -11406,7 +11569,7 @@
                       <a:endParaRPr lang="en-US" sz="1400" dirty="0"/>
                     </a:p>
                   </a:txBody>
-                  <a:tcPr marL="91440" marR="91440" marT="45720" marB="45720" anchor="ctr">
+                  <a:tcPr anchor="ctr">
                     <a:lnL w="9525" cap="flat" cmpd="sng" algn="ctr">
                       <a:solidFill>
                         <a:srgbClr val="E2E6EB"/>
@@ -11450,7 +11613,7 @@
                     <a:bodyPr/>
                     <a:lstStyle/>
                     <a:p>
-                      <a:pPr indent="0" marL="0">
+                      <a:pPr marL="0" indent="0">
                         <a:buNone/>
                       </a:pPr>
                       <a:r>
@@ -11464,7 +11627,7 @@
                       <a:endParaRPr lang="en-US" sz="1400" dirty="0"/>
                     </a:p>
                   </a:txBody>
-                  <a:tcPr marL="91440" marR="91440" marT="45720" marB="45720" anchor="ctr">
+                  <a:tcPr anchor="ctr">
                     <a:lnL w="9525" cap="flat" cmpd="sng" algn="ctr">
                       <a:solidFill>
                         <a:srgbClr val="E2E6EB"/>
@@ -11508,7 +11671,7 @@
                     <a:bodyPr/>
                     <a:lstStyle/>
                     <a:p>
-                      <a:pPr indent="0" marL="0">
+                      <a:pPr marL="0" indent="0">
                         <a:buNone/>
                       </a:pPr>
                       <a:r>
@@ -11522,7 +11685,7 @@
                       <a:endParaRPr lang="en-US" sz="1400" dirty="0"/>
                     </a:p>
                   </a:txBody>
-                  <a:tcPr marL="91440" marR="91440" marT="45720" marB="45720" anchor="ctr">
+                  <a:tcPr anchor="ctr">
                     <a:lnL w="9525" cap="flat" cmpd="sng" algn="ctr">
                       <a:solidFill>
                         <a:srgbClr val="E2E6EB"/>
@@ -11566,7 +11729,7 @@
                     <a:bodyPr/>
                     <a:lstStyle/>
                     <a:p>
-                      <a:pPr indent="0" marL="0">
+                      <a:pPr marL="0" indent="0">
                         <a:buNone/>
                       </a:pPr>
                       <a:r>
@@ -11580,7 +11743,7 @@
                       <a:endParaRPr lang="en-US" sz="1400" dirty="0"/>
                     </a:p>
                   </a:txBody>
-                  <a:tcPr marL="91440" marR="91440" marT="45720" marB="45720" anchor="ctr">
+                  <a:tcPr anchor="ctr">
                     <a:lnL w="9525" cap="flat" cmpd="sng" algn="ctr">
                       <a:solidFill>
                         <a:srgbClr val="E2E6EB"/>
@@ -11624,7 +11787,7 @@
                     <a:bodyPr/>
                     <a:lstStyle/>
                     <a:p>
-                      <a:pPr indent="0" marL="0">
+                      <a:pPr marL="0" indent="0">
                         <a:buNone/>
                       </a:pPr>
                       <a:r>
@@ -11638,7 +11801,7 @@
                       <a:endParaRPr lang="en-US" sz="1400" dirty="0"/>
                     </a:p>
                   </a:txBody>
-                  <a:tcPr marL="91440" marR="91440" marT="45720" marB="45720" anchor="ctr">
+                  <a:tcPr anchor="ctr">
                     <a:lnL w="9525" cap="flat" cmpd="sng" algn="ctr">
                       <a:solidFill>
                         <a:srgbClr val="E2E6EB"/>
@@ -11682,7 +11845,7 @@
                     <a:bodyPr/>
                     <a:lstStyle/>
                     <a:p>
-                      <a:pPr indent="0" marL="0">
+                      <a:pPr marL="0" indent="0">
                         <a:buNone/>
                       </a:pPr>
                       <a:r>
@@ -11696,7 +11859,7 @@
                       <a:endParaRPr lang="en-US" sz="1400" dirty="0"/>
                     </a:p>
                   </a:txBody>
-                  <a:tcPr marL="91440" marR="91440" marT="45720" marB="45720" anchor="ctr">
+                  <a:tcPr anchor="ctr">
                     <a:lnL w="9525" cap="flat" cmpd="sng" algn="ctr">
                       <a:solidFill>
                         <a:srgbClr val="E2E6EB"/>
@@ -11735,6 +11898,11 @@
                     </a:lnB>
                   </a:tcPr>
                 </a:tc>
+                <a:extLst>
+                  <a:ext uri="{0D108BD9-81ED-4DB2-BD59-A6C34878D82A}">
+                    <a16:rowId xmlns:a16="http://schemas.microsoft.com/office/drawing/2014/main" val="10004"/>
+                  </a:ext>
+                </a:extLst>
               </a:tr>
               <a:tr h="411480">
                 <a:tc>
@@ -11742,7 +11910,7 @@
                     <a:bodyPr/>
                     <a:lstStyle/>
                     <a:p>
-                      <a:pPr indent="0" marL="0">
+                      <a:pPr marL="0" indent="0">
                         <a:buNone/>
                       </a:pPr>
                       <a:r>
@@ -11756,7 +11924,7 @@
                       <a:endParaRPr lang="en-US" sz="1400" dirty="0"/>
                     </a:p>
                   </a:txBody>
-                  <a:tcPr marL="91440" marR="91440" marT="45720" marB="45720" anchor="ctr">
+                  <a:tcPr anchor="ctr">
                     <a:lnL w="9525" cap="flat" cmpd="sng" algn="ctr">
                       <a:solidFill>
                         <a:srgbClr val="E2E6EB"/>
@@ -11800,7 +11968,7 @@
                     <a:bodyPr/>
                     <a:lstStyle/>
                     <a:p>
-                      <a:pPr indent="0" marL="0">
+                      <a:pPr marL="0" indent="0">
                         <a:buNone/>
                       </a:pPr>
                       <a:r>
@@ -11814,7 +11982,7 @@
                       <a:endParaRPr lang="en-US" sz="1400" dirty="0"/>
                     </a:p>
                   </a:txBody>
-                  <a:tcPr marL="91440" marR="91440" marT="45720" marB="45720" anchor="ctr">
+                  <a:tcPr anchor="ctr">
                     <a:lnL w="9525" cap="flat" cmpd="sng" algn="ctr">
                       <a:solidFill>
                         <a:srgbClr val="E2E6EB"/>
@@ -11858,7 +12026,7 @@
                     <a:bodyPr/>
                     <a:lstStyle/>
                     <a:p>
-                      <a:pPr indent="0" marL="0">
+                      <a:pPr marL="0" indent="0">
                         <a:buNone/>
                       </a:pPr>
                       <a:r>
@@ -11872,7 +12040,7 @@
                       <a:endParaRPr lang="en-US" sz="1400" dirty="0"/>
                     </a:p>
                   </a:txBody>
-                  <a:tcPr marL="91440" marR="91440" marT="45720" marB="45720" anchor="ctr">
+                  <a:tcPr anchor="ctr">
                     <a:lnL w="9525" cap="flat" cmpd="sng" algn="ctr">
                       <a:solidFill>
                         <a:srgbClr val="E2E6EB"/>
@@ -11916,7 +12084,7 @@
                     <a:bodyPr/>
                     <a:lstStyle/>
                     <a:p>
-                      <a:pPr indent="0" marL="0">
+                      <a:pPr marL="0" indent="0">
                         <a:buNone/>
                       </a:pPr>
                       <a:r>
@@ -11930,7 +12098,7 @@
                       <a:endParaRPr lang="en-US" sz="1400" dirty="0"/>
                     </a:p>
                   </a:txBody>
-                  <a:tcPr marL="91440" marR="91440" marT="45720" marB="45720" anchor="ctr">
+                  <a:tcPr anchor="ctr">
                     <a:lnL w="9525" cap="flat" cmpd="sng" algn="ctr">
                       <a:solidFill>
                         <a:srgbClr val="E2E6EB"/>
@@ -11974,7 +12142,7 @@
                     <a:bodyPr/>
                     <a:lstStyle/>
                     <a:p>
-                      <a:pPr indent="0" marL="0">
+                      <a:pPr marL="0" indent="0">
                         <a:buNone/>
                       </a:pPr>
                       <a:r>
@@ -11988,7 +12156,7 @@
                       <a:endParaRPr lang="en-US" sz="1400" dirty="0"/>
                     </a:p>
                   </a:txBody>
-                  <a:tcPr marL="91440" marR="91440" marT="45720" marB="45720" anchor="ctr">
+                  <a:tcPr anchor="ctr">
                     <a:lnL w="9525" cap="flat" cmpd="sng" algn="ctr">
                       <a:solidFill>
                         <a:srgbClr val="E2E6EB"/>
@@ -12032,7 +12200,7 @@
                     <a:bodyPr/>
                     <a:lstStyle/>
                     <a:p>
-                      <a:pPr indent="0" marL="0">
+                      <a:pPr marL="0" indent="0">
                         <a:buNone/>
                       </a:pPr>
                       <a:r>
@@ -12046,7 +12214,7 @@
                       <a:endParaRPr lang="en-US" sz="1400" dirty="0"/>
                     </a:p>
                   </a:txBody>
-                  <a:tcPr marL="91440" marR="91440" marT="45720" marB="45720" anchor="ctr">
+                  <a:tcPr anchor="ctr">
                     <a:lnL w="9525" cap="flat" cmpd="sng" algn="ctr">
                       <a:solidFill>
                         <a:srgbClr val="E2E6EB"/>
@@ -12085,6 +12253,11 @@
                     </a:lnB>
                   </a:tcPr>
                 </a:tc>
+                <a:extLst>
+                  <a:ext uri="{0D108BD9-81ED-4DB2-BD59-A6C34878D82A}">
+                    <a16:rowId xmlns:a16="http://schemas.microsoft.com/office/drawing/2014/main" val="10005"/>
+                  </a:ext>
+                </a:extLst>
               </a:tr>
               <a:tr h="411480">
                 <a:tc>
@@ -12092,7 +12265,7 @@
                     <a:bodyPr/>
                     <a:lstStyle/>
                     <a:p>
-                      <a:pPr indent="0" marL="0">
+                      <a:pPr marL="0" indent="0">
                         <a:buNone/>
                       </a:pPr>
                       <a:r>
@@ -12106,7 +12279,7 @@
                       <a:endParaRPr lang="en-US" sz="1400" dirty="0"/>
                     </a:p>
                   </a:txBody>
-                  <a:tcPr marL="91440" marR="91440" marT="45720" marB="45720" anchor="ctr">
+                  <a:tcPr anchor="ctr">
                     <a:lnL w="9525" cap="flat" cmpd="sng" algn="ctr">
                       <a:solidFill>
                         <a:srgbClr val="E2E6EB"/>
@@ -12150,7 +12323,7 @@
                     <a:bodyPr/>
                     <a:lstStyle/>
                     <a:p>
-                      <a:pPr indent="0" marL="0">
+                      <a:pPr marL="0" indent="0">
                         <a:buNone/>
                       </a:pPr>
                       <a:r>
@@ -12164,7 +12337,7 @@
                       <a:endParaRPr lang="en-US" sz="1400" dirty="0"/>
                     </a:p>
                   </a:txBody>
-                  <a:tcPr marL="91440" marR="91440" marT="45720" marB="45720" anchor="ctr">
+                  <a:tcPr anchor="ctr">
                     <a:lnL w="9525" cap="flat" cmpd="sng" algn="ctr">
                       <a:solidFill>
                         <a:srgbClr val="E2E6EB"/>
@@ -12208,7 +12381,7 @@
                     <a:bodyPr/>
                     <a:lstStyle/>
                     <a:p>
-                      <a:pPr indent="0" marL="0">
+                      <a:pPr marL="0" indent="0">
                         <a:buNone/>
                       </a:pPr>
                       <a:r>
@@ -12222,7 +12395,7 @@
                       <a:endParaRPr lang="en-US" sz="1400" dirty="0"/>
                     </a:p>
                   </a:txBody>
-                  <a:tcPr marL="91440" marR="91440" marT="45720" marB="45720" anchor="ctr">
+                  <a:tcPr anchor="ctr">
                     <a:lnL w="9525" cap="flat" cmpd="sng" algn="ctr">
                       <a:solidFill>
                         <a:srgbClr val="E2E6EB"/>
@@ -12266,7 +12439,7 @@
                     <a:bodyPr/>
                     <a:lstStyle/>
                     <a:p>
-                      <a:pPr indent="0" marL="0">
+                      <a:pPr marL="0" indent="0">
                         <a:buNone/>
                       </a:pPr>
                       <a:r>
@@ -12280,7 +12453,7 @@
                       <a:endParaRPr lang="en-US" sz="1400" dirty="0"/>
                     </a:p>
                   </a:txBody>
-                  <a:tcPr marL="91440" marR="91440" marT="45720" marB="45720" anchor="ctr">
+                  <a:tcPr anchor="ctr">
                     <a:lnL w="9525" cap="flat" cmpd="sng" algn="ctr">
                       <a:solidFill>
                         <a:srgbClr val="E2E6EB"/>
@@ -12324,7 +12497,7 @@
                     <a:bodyPr/>
                     <a:lstStyle/>
                     <a:p>
-                      <a:pPr indent="0" marL="0">
+                      <a:pPr marL="0" indent="0">
                         <a:buNone/>
                       </a:pPr>
                       <a:r>
@@ -12338,7 +12511,7 @@
                       <a:endParaRPr lang="en-US" sz="1400" dirty="0"/>
                     </a:p>
                   </a:txBody>
-                  <a:tcPr marL="91440" marR="91440" marT="45720" marB="45720" anchor="ctr">
+                  <a:tcPr anchor="ctr">
                     <a:lnL w="9525" cap="flat" cmpd="sng" algn="ctr">
                       <a:solidFill>
                         <a:srgbClr val="E2E6EB"/>
@@ -12382,7 +12555,7 @@
                     <a:bodyPr/>
                     <a:lstStyle/>
                     <a:p>
-                      <a:pPr indent="0" marL="0">
+                      <a:pPr marL="0" indent="0">
                         <a:buNone/>
                       </a:pPr>
                       <a:r>
@@ -12396,7 +12569,7 @@
                       <a:endParaRPr lang="en-US" sz="1400" dirty="0"/>
                     </a:p>
                   </a:txBody>
-                  <a:tcPr marL="91440" marR="91440" marT="45720" marB="45720" anchor="ctr">
+                  <a:tcPr anchor="ctr">
                     <a:lnL w="9525" cap="flat" cmpd="sng" algn="ctr">
                       <a:solidFill>
                         <a:srgbClr val="E2E6EB"/>
@@ -12435,6 +12608,11 @@
                     </a:lnB>
                   </a:tcPr>
                 </a:tc>
+                <a:extLst>
+                  <a:ext uri="{0D108BD9-81ED-4DB2-BD59-A6C34878D82A}">
+                    <a16:rowId xmlns:a16="http://schemas.microsoft.com/office/drawing/2014/main" val="10006"/>
+                  </a:ext>
+                </a:extLst>
               </a:tr>
               <a:tr h="411480">
                 <a:tc>
@@ -12442,7 +12620,7 @@
                     <a:bodyPr/>
                     <a:lstStyle/>
                     <a:p>
-                      <a:pPr indent="0" marL="0">
+                      <a:pPr marL="0" indent="0">
                         <a:buNone/>
                       </a:pPr>
                       <a:r>
@@ -12456,7 +12634,7 @@
                       <a:endParaRPr lang="en-US" sz="1400" dirty="0"/>
                     </a:p>
                   </a:txBody>
-                  <a:tcPr marL="91440" marR="91440" marT="45720" marB="45720" anchor="ctr">
+                  <a:tcPr anchor="ctr">
                     <a:lnL w="9525" cap="flat" cmpd="sng" algn="ctr">
                       <a:solidFill>
                         <a:srgbClr val="E2E6EB"/>
@@ -12500,7 +12678,7 @@
                     <a:bodyPr/>
                     <a:lstStyle/>
                     <a:p>
-                      <a:pPr indent="0" marL="0">
+                      <a:pPr marL="0" indent="0">
                         <a:buNone/>
                       </a:pPr>
                       <a:r>
@@ -12514,7 +12692,7 @@
                       <a:endParaRPr lang="en-US" sz="1400" dirty="0"/>
                     </a:p>
                   </a:txBody>
-                  <a:tcPr marL="91440" marR="91440" marT="45720" marB="45720" anchor="ctr">
+                  <a:tcPr anchor="ctr">
                     <a:lnL w="9525" cap="flat" cmpd="sng" algn="ctr">
                       <a:solidFill>
                         <a:srgbClr val="E2E6EB"/>
@@ -12558,7 +12736,7 @@
                     <a:bodyPr/>
                     <a:lstStyle/>
                     <a:p>
-                      <a:pPr indent="0" marL="0">
+                      <a:pPr marL="0" indent="0">
                         <a:buNone/>
                       </a:pPr>
                       <a:r>
@@ -12572,7 +12750,7 @@
                       <a:endParaRPr lang="en-US" sz="1400" dirty="0"/>
                     </a:p>
                   </a:txBody>
-                  <a:tcPr marL="91440" marR="91440" marT="45720" marB="45720" anchor="ctr">
+                  <a:tcPr anchor="ctr">
                     <a:lnL w="9525" cap="flat" cmpd="sng" algn="ctr">
                       <a:solidFill>
                         <a:srgbClr val="E2E6EB"/>
@@ -12616,7 +12794,7 @@
                     <a:bodyPr/>
                     <a:lstStyle/>
                     <a:p>
-                      <a:pPr indent="0" marL="0">
+                      <a:pPr marL="0" indent="0">
                         <a:buNone/>
                       </a:pPr>
                       <a:r>
@@ -12630,7 +12808,7 @@
                       <a:endParaRPr lang="en-US" sz="1400" dirty="0"/>
                     </a:p>
                   </a:txBody>
-                  <a:tcPr marL="91440" marR="91440" marT="45720" marB="45720" anchor="ctr">
+                  <a:tcPr anchor="ctr">
                     <a:lnL w="9525" cap="flat" cmpd="sng" algn="ctr">
                       <a:solidFill>
                         <a:srgbClr val="E2E6EB"/>
@@ -12674,7 +12852,7 @@
                     <a:bodyPr/>
                     <a:lstStyle/>
                     <a:p>
-                      <a:pPr indent="0" marL="0">
+                      <a:pPr marL="0" indent="0">
                         <a:buNone/>
                       </a:pPr>
                       <a:r>
@@ -12688,7 +12866,7 @@
                       <a:endParaRPr lang="en-US" sz="1400" dirty="0"/>
                     </a:p>
                   </a:txBody>
-                  <a:tcPr marL="91440" marR="91440" marT="45720" marB="45720" anchor="ctr">
+                  <a:tcPr anchor="ctr">
                     <a:lnL w="9525" cap="flat" cmpd="sng" algn="ctr">
                       <a:solidFill>
                         <a:srgbClr val="E2E6EB"/>
@@ -12732,7 +12910,7 @@
                     <a:bodyPr/>
                     <a:lstStyle/>
                     <a:p>
-                      <a:pPr indent="0" marL="0">
+                      <a:pPr marL="0" indent="0">
                         <a:buNone/>
                       </a:pPr>
                       <a:r>
@@ -12746,7 +12924,7 @@
                       <a:endParaRPr lang="en-US" sz="1400" dirty="0"/>
                     </a:p>
                   </a:txBody>
-                  <a:tcPr marL="91440" marR="91440" marT="45720" marB="45720" anchor="ctr">
+                  <a:tcPr anchor="ctr">
                     <a:lnL w="9525" cap="flat" cmpd="sng" algn="ctr">
                       <a:solidFill>
                         <a:srgbClr val="E2E6EB"/>
@@ -12785,6 +12963,11 @@
                     </a:lnB>
                   </a:tcPr>
                 </a:tc>
+                <a:extLst>
+                  <a:ext uri="{0D108BD9-81ED-4DB2-BD59-A6C34878D82A}">
+                    <a16:rowId xmlns:a16="http://schemas.microsoft.com/office/drawing/2014/main" val="10007"/>
+                  </a:ext>
+                </a:extLst>
               </a:tr>
               <a:tr h="411480">
                 <a:tc>
@@ -12792,7 +12975,7 @@
                     <a:bodyPr/>
                     <a:lstStyle/>
                     <a:p>
-                      <a:pPr indent="0" marL="0">
+                      <a:pPr marL="0" indent="0">
                         <a:buNone/>
                       </a:pPr>
                       <a:r>
@@ -12806,7 +12989,7 @@
                       <a:endParaRPr lang="en-US" sz="1400" dirty="0"/>
                     </a:p>
                   </a:txBody>
-                  <a:tcPr marL="91440" marR="91440" marT="45720" marB="45720" anchor="ctr">
+                  <a:tcPr anchor="ctr">
                     <a:lnL w="9525" cap="flat" cmpd="sng" algn="ctr">
                       <a:solidFill>
                         <a:srgbClr val="E2E6EB"/>
@@ -12850,7 +13033,7 @@
                     <a:bodyPr/>
                     <a:lstStyle/>
                     <a:p>
-                      <a:pPr indent="0" marL="0">
+                      <a:pPr marL="0" indent="0">
                         <a:buNone/>
                       </a:pPr>
                       <a:r>
@@ -12864,7 +13047,7 @@
                       <a:endParaRPr lang="en-US" sz="1400" dirty="0"/>
                     </a:p>
                   </a:txBody>
-                  <a:tcPr marL="91440" marR="91440" marT="45720" marB="45720" anchor="ctr">
+                  <a:tcPr anchor="ctr">
                     <a:lnL w="9525" cap="flat" cmpd="sng" algn="ctr">
                       <a:solidFill>
                         <a:srgbClr val="E2E6EB"/>
@@ -12908,7 +13091,7 @@
                     <a:bodyPr/>
                     <a:lstStyle/>
                     <a:p>
-                      <a:pPr indent="0" marL="0">
+                      <a:pPr marL="0" indent="0">
                         <a:buNone/>
                       </a:pPr>
                       <a:r>
@@ -12922,7 +13105,7 @@
                       <a:endParaRPr lang="en-US" sz="1400" dirty="0"/>
                     </a:p>
                   </a:txBody>
-                  <a:tcPr marL="91440" marR="91440" marT="45720" marB="45720" anchor="ctr">
+                  <a:tcPr anchor="ctr">
                     <a:lnL w="9525" cap="flat" cmpd="sng" algn="ctr">
                       <a:solidFill>
                         <a:srgbClr val="E2E6EB"/>
@@ -12966,7 +13149,7 @@
                     <a:bodyPr/>
                     <a:lstStyle/>
                     <a:p>
-                      <a:pPr indent="0" marL="0">
+                      <a:pPr marL="0" indent="0">
                         <a:buNone/>
                       </a:pPr>
                       <a:r>
@@ -12980,7 +13163,7 @@
                       <a:endParaRPr lang="en-US" sz="1400" dirty="0"/>
                     </a:p>
                   </a:txBody>
-                  <a:tcPr marL="91440" marR="91440" marT="45720" marB="45720" anchor="ctr">
+                  <a:tcPr anchor="ctr">
                     <a:lnL w="9525" cap="flat" cmpd="sng" algn="ctr">
                       <a:solidFill>
                         <a:srgbClr val="E2E6EB"/>
@@ -13024,7 +13207,7 @@
                     <a:bodyPr/>
                     <a:lstStyle/>
                     <a:p>
-                      <a:pPr indent="0" marL="0">
+                      <a:pPr marL="0" indent="0">
                         <a:buNone/>
                       </a:pPr>
                       <a:r>
@@ -13038,7 +13221,7 @@
                       <a:endParaRPr lang="en-US" sz="1400" dirty="0"/>
                     </a:p>
                   </a:txBody>
-                  <a:tcPr marL="91440" marR="91440" marT="45720" marB="45720" anchor="ctr">
+                  <a:tcPr anchor="ctr">
                     <a:lnL w="9525" cap="flat" cmpd="sng" algn="ctr">
                       <a:solidFill>
                         <a:srgbClr val="E2E6EB"/>
@@ -13082,7 +13265,7 @@
                     <a:bodyPr/>
                     <a:lstStyle/>
                     <a:p>
-                      <a:pPr indent="0" marL="0">
+                      <a:pPr marL="0" indent="0">
                         <a:buNone/>
                       </a:pPr>
                       <a:r>
@@ -13096,7 +13279,7 @@
                       <a:endParaRPr lang="en-US" sz="1400" dirty="0"/>
                     </a:p>
                   </a:txBody>
-                  <a:tcPr marL="91440" marR="91440" marT="45720" marB="45720" anchor="ctr">
+                  <a:tcPr anchor="ctr">
                     <a:lnL w="9525" cap="flat" cmpd="sng" algn="ctr">
                       <a:solidFill>
                         <a:srgbClr val="E2E6EB"/>
@@ -13135,6 +13318,11 @@
                     </a:lnB>
                   </a:tcPr>
                 </a:tc>
+                <a:extLst>
+                  <a:ext uri="{0D108BD9-81ED-4DB2-BD59-A6C34878D82A}">
+                    <a16:rowId xmlns:a16="http://schemas.microsoft.com/office/drawing/2014/main" val="10008"/>
+                  </a:ext>
+                </a:extLst>
               </a:tr>
               <a:tr h="411480">
                 <a:tc>
@@ -13142,7 +13330,7 @@
                     <a:bodyPr/>
                     <a:lstStyle/>
                     <a:p>
-                      <a:pPr indent="0" marL="0">
+                      <a:pPr marL="0" indent="0">
                         <a:buNone/>
                       </a:pPr>
                       <a:r>
@@ -13156,7 +13344,7 @@
                       <a:endParaRPr lang="en-US" sz="1400" dirty="0"/>
                     </a:p>
                   </a:txBody>
-                  <a:tcPr marL="91440" marR="91440" marT="45720" marB="45720" anchor="ctr">
+                  <a:tcPr anchor="ctr">
                     <a:lnL w="9525" cap="flat" cmpd="sng" algn="ctr">
                       <a:solidFill>
                         <a:srgbClr val="E2E6EB"/>
@@ -13200,7 +13388,7 @@
                     <a:bodyPr/>
                     <a:lstStyle/>
                     <a:p>
-                      <a:pPr indent="0" marL="0">
+                      <a:pPr marL="0" indent="0">
                         <a:buNone/>
                       </a:pPr>
                       <a:r>
@@ -13214,7 +13402,7 @@
                       <a:endParaRPr lang="en-US" sz="1400" dirty="0"/>
                     </a:p>
                   </a:txBody>
-                  <a:tcPr marL="91440" marR="91440" marT="45720" marB="45720" anchor="ctr">
+                  <a:tcPr anchor="ctr">
                     <a:lnL w="9525" cap="flat" cmpd="sng" algn="ctr">
                       <a:solidFill>
                         <a:srgbClr val="E2E6EB"/>
@@ -13258,7 +13446,7 @@
                     <a:bodyPr/>
                     <a:lstStyle/>
                     <a:p>
-                      <a:pPr indent="0" marL="0">
+                      <a:pPr marL="0" indent="0">
                         <a:buNone/>
                       </a:pPr>
                       <a:r>
@@ -13272,7 +13460,7 @@
                       <a:endParaRPr lang="en-US" sz="1400" dirty="0"/>
                     </a:p>
                   </a:txBody>
-                  <a:tcPr marL="91440" marR="91440" marT="45720" marB="45720" anchor="ctr">
+                  <a:tcPr anchor="ctr">
                     <a:lnL w="9525" cap="flat" cmpd="sng" algn="ctr">
                       <a:solidFill>
                         <a:srgbClr val="E2E6EB"/>
@@ -13316,7 +13504,7 @@
                     <a:bodyPr/>
                     <a:lstStyle/>
                     <a:p>
-                      <a:pPr indent="0" marL="0">
+                      <a:pPr marL="0" indent="0">
                         <a:buNone/>
                       </a:pPr>
                       <a:r>
@@ -13330,7 +13518,7 @@
                       <a:endParaRPr lang="en-US" sz="1400" dirty="0"/>
                     </a:p>
                   </a:txBody>
-                  <a:tcPr marL="91440" marR="91440" marT="45720" marB="45720" anchor="ctr">
+                  <a:tcPr anchor="ctr">
                     <a:lnL w="9525" cap="flat" cmpd="sng" algn="ctr">
                       <a:solidFill>
                         <a:srgbClr val="E2E6EB"/>
@@ -13374,7 +13562,7 @@
                     <a:bodyPr/>
                     <a:lstStyle/>
                     <a:p>
-                      <a:pPr indent="0" marL="0">
+                      <a:pPr marL="0" indent="0">
                         <a:buNone/>
                       </a:pPr>
                       <a:r>
@@ -13388,7 +13576,7 @@
                       <a:endParaRPr lang="en-US" sz="1400" dirty="0"/>
                     </a:p>
                   </a:txBody>
-                  <a:tcPr marL="91440" marR="91440" marT="45720" marB="45720" anchor="ctr">
+                  <a:tcPr anchor="ctr">
                     <a:lnL w="9525" cap="flat" cmpd="sng" algn="ctr">
                       <a:solidFill>
                         <a:srgbClr val="E2E6EB"/>
@@ -13432,7 +13620,7 @@
                     <a:bodyPr/>
                     <a:lstStyle/>
                     <a:p>
-                      <a:pPr indent="0" marL="0">
+                      <a:pPr marL="0" indent="0">
                         <a:buNone/>
                       </a:pPr>
                       <a:r>
@@ -13446,7 +13634,7 @@
                       <a:endParaRPr lang="en-US" sz="1400" dirty="0"/>
                     </a:p>
                   </a:txBody>
-                  <a:tcPr marL="91440" marR="91440" marT="45720" marB="45720" anchor="ctr">
+                  <a:tcPr anchor="ctr">
                     <a:lnL w="9525" cap="flat" cmpd="sng" algn="ctr">
                       <a:solidFill>
                         <a:srgbClr val="E2E6EB"/>
@@ -13485,6 +13673,11 @@
                     </a:lnB>
                   </a:tcPr>
                 </a:tc>
+                <a:extLst>
+                  <a:ext uri="{0D108BD9-81ED-4DB2-BD59-A6C34878D82A}">
+                    <a16:rowId xmlns:a16="http://schemas.microsoft.com/office/drawing/2014/main" val="10009"/>
+                  </a:ext>
+                </a:extLst>
               </a:tr>
               <a:tr h="411480">
                 <a:tc>
@@ -13492,7 +13685,7 @@
                     <a:bodyPr/>
                     <a:lstStyle/>
                     <a:p>
-                      <a:pPr indent="0" marL="0">
+                      <a:pPr marL="0" indent="0">
                         <a:buNone/>
                       </a:pPr>
                       <a:r>
@@ -13506,7 +13699,7 @@
                       <a:endParaRPr lang="en-US" sz="1400" dirty="0"/>
                     </a:p>
                   </a:txBody>
-                  <a:tcPr marL="91440" marR="91440" marT="45720" marB="45720" anchor="ctr">
+                  <a:tcPr anchor="ctr">
                     <a:lnL w="9525" cap="flat" cmpd="sng" algn="ctr">
                       <a:solidFill>
                         <a:srgbClr val="E2E6EB"/>
@@ -13550,7 +13743,7 @@
                     <a:bodyPr/>
                     <a:lstStyle/>
                     <a:p>
-                      <a:pPr indent="0" marL="0">
+                      <a:pPr marL="0" indent="0">
                         <a:buNone/>
                       </a:pPr>
                       <a:r>
@@ -13564,7 +13757,7 @@
                       <a:endParaRPr lang="en-US" sz="1400" dirty="0"/>
                     </a:p>
                   </a:txBody>
-                  <a:tcPr marL="91440" marR="91440" marT="45720" marB="45720" anchor="ctr">
+                  <a:tcPr anchor="ctr">
                     <a:lnL w="9525" cap="flat" cmpd="sng" algn="ctr">
                       <a:solidFill>
                         <a:srgbClr val="E2E6EB"/>
@@ -13608,7 +13801,7 @@
                     <a:bodyPr/>
                     <a:lstStyle/>
                     <a:p>
-                      <a:pPr indent="0" marL="0">
+                      <a:pPr marL="0" indent="0">
                         <a:buNone/>
                       </a:pPr>
                       <a:r>
@@ -13622,7 +13815,7 @@
                       <a:endParaRPr lang="en-US" sz="1400" dirty="0"/>
                     </a:p>
                   </a:txBody>
-                  <a:tcPr marL="91440" marR="91440" marT="45720" marB="45720" anchor="ctr">
+                  <a:tcPr anchor="ctr">
                     <a:lnL w="9525" cap="flat" cmpd="sng" algn="ctr">
                       <a:solidFill>
                         <a:srgbClr val="E2E6EB"/>
@@ -13666,7 +13859,7 @@
                     <a:bodyPr/>
                     <a:lstStyle/>
                     <a:p>
-                      <a:pPr indent="0" marL="0">
+                      <a:pPr marL="0" indent="0">
                         <a:buNone/>
                       </a:pPr>
                       <a:r>
@@ -13680,7 +13873,7 @@
                       <a:endParaRPr lang="en-US" sz="1400" dirty="0"/>
                     </a:p>
                   </a:txBody>
-                  <a:tcPr marL="91440" marR="91440" marT="45720" marB="45720" anchor="ctr">
+                  <a:tcPr anchor="ctr">
                     <a:lnL w="9525" cap="flat" cmpd="sng" algn="ctr">
                       <a:solidFill>
                         <a:srgbClr val="E2E6EB"/>
@@ -13724,7 +13917,7 @@
                     <a:bodyPr/>
                     <a:lstStyle/>
                     <a:p>
-                      <a:pPr indent="0" marL="0">
+                      <a:pPr marL="0" indent="0">
                         <a:buNone/>
                       </a:pPr>
                       <a:r>
@@ -13738,7 +13931,7 @@
                       <a:endParaRPr lang="en-US" sz="1400" dirty="0"/>
                     </a:p>
                   </a:txBody>
-                  <a:tcPr marL="91440" marR="91440" marT="45720" marB="45720" anchor="ctr">
+                  <a:tcPr anchor="ctr">
                     <a:lnL w="9525" cap="flat" cmpd="sng" algn="ctr">
                       <a:solidFill>
                         <a:srgbClr val="E2E6EB"/>
@@ -13782,7 +13975,7 @@
                     <a:bodyPr/>
                     <a:lstStyle/>
                     <a:p>
-                      <a:pPr indent="0" marL="0">
+                      <a:pPr marL="0" indent="0">
                         <a:buNone/>
                       </a:pPr>
                       <a:r>
@@ -13796,7 +13989,7 @@
                       <a:endParaRPr lang="en-US" sz="1400" dirty="0"/>
                     </a:p>
                   </a:txBody>
-                  <a:tcPr marL="91440" marR="91440" marT="45720" marB="45720" anchor="ctr">
+                  <a:tcPr anchor="ctr">
                     <a:lnL w="9525" cap="flat" cmpd="sng" algn="ctr">
                       <a:solidFill>
                         <a:srgbClr val="E2E6EB"/>
@@ -13835,6 +14028,11 @@
                     </a:lnB>
                   </a:tcPr>
                 </a:tc>
+                <a:extLst>
+                  <a:ext uri="{0D108BD9-81ED-4DB2-BD59-A6C34878D82A}">
+                    <a16:rowId xmlns:a16="http://schemas.microsoft.com/office/drawing/2014/main" val="10010"/>
+                  </a:ext>
+                </a:extLst>
               </a:tr>
             </a:tbl>
           </a:graphicData>
@@ -13860,7 +14058,7 @@
           </a:prstGeom>
           <a:extLst>
             <a:ext uri="{C572A759-6A51-4108-AA02-DFA0A04FC94B}">
-              <ma14:wrappingTextBoxFlag xmlns:ma14="http://schemas.microsoft.com/office/mac/drawingml/2011/main" val="0"/>
+              <ma14:wrappingTextBoxFlag xmlns="" xmlns:ma14="http://schemas.microsoft.com/office/mac/drawingml/2011/main" val="0"/>
             </a:ext>
           </a:extLst>
         </p:spPr>
@@ -13878,7 +14076,7 @@
           <a:p>
             <a:pPr algn="r"/>
             <a:fld id="{F7021451-1387-4CA6-816F-3879F97B5CBC}" type="slidenum">
-              <a:rPr b="0" lang="en-US"/>
+              <a:rPr lang="en-US" b="0"/>
               <a:t>9</a:t>
             </a:fld>
             <a:endParaRPr lang="en-US"/>
@@ -14186,4 +14384,319 @@
     </a:ext>
   </a:extLst>
 </a:theme>
+</file>
+
+<file path=ppt/theme/theme2.xml><?xml version="1.0" encoding="utf-8"?>
+<a:theme xmlns:a="http://schemas.openxmlformats.org/drawingml/2006/main" name="Office Theme">
+  <a:themeElements>
+    <a:clrScheme name="Office">
+      <a:dk1>
+        <a:sysClr val="windowText" lastClr="000000"/>
+      </a:dk1>
+      <a:lt1>
+        <a:sysClr val="window" lastClr="FFFFFF"/>
+      </a:lt1>
+      <a:dk2>
+        <a:srgbClr val="0E2841"/>
+      </a:dk2>
+      <a:lt2>
+        <a:srgbClr val="E8E8E8"/>
+      </a:lt2>
+      <a:accent1>
+        <a:srgbClr val="156082"/>
+      </a:accent1>
+      <a:accent2>
+        <a:srgbClr val="E97132"/>
+      </a:accent2>
+      <a:accent3>
+        <a:srgbClr val="196B24"/>
+      </a:accent3>
+      <a:accent4>
+        <a:srgbClr val="0F9ED5"/>
+      </a:accent4>
+      <a:accent5>
+        <a:srgbClr val="A02B93"/>
+      </a:accent5>
+      <a:accent6>
+        <a:srgbClr val="4EA72E"/>
+      </a:accent6>
+      <a:hlink>
+        <a:srgbClr val="467886"/>
+      </a:hlink>
+      <a:folHlink>
+        <a:srgbClr val="96607D"/>
+      </a:folHlink>
+    </a:clrScheme>
+    <a:fontScheme name="Office">
+      <a:majorFont>
+        <a:latin typeface="Aptos Display" panose="02110004020202020204"/>
+        <a:ea typeface=""/>
+        <a:cs typeface=""/>
+        <a:font script="Jpan" typeface="游ゴシック Light"/>
+        <a:font script="Hang" typeface="맑은 고딕"/>
+        <a:font script="Hans" typeface="等线 Light"/>
+        <a:font script="Hant" typeface="新細明體"/>
+        <a:font script="Arab" typeface="Times New Roman"/>
+        <a:font script="Hebr" typeface="Times New Roman"/>
+        <a:font script="Thai" typeface="Angsana New"/>
+        <a:font script="Ethi" typeface="Nyala"/>
+        <a:font script="Beng" typeface="Vrinda"/>
+        <a:font script="Gujr" typeface="Shruti"/>
+        <a:font script="Khmr" typeface="MoolBoran"/>
+        <a:font script="Knda" typeface="Tunga"/>
+        <a:font script="Guru" typeface="Raavi"/>
+        <a:font script="Cans" typeface="Euphemia"/>
+        <a:font script="Cher" typeface="Plantagenet Cherokee"/>
+        <a:font script="Yiii" typeface="Microsoft Yi Baiti"/>
+        <a:font script="Tibt" typeface="Microsoft Himalaya"/>
+        <a:font script="Thaa" typeface="MV Boli"/>
+        <a:font script="Deva" typeface="Mangal"/>
+        <a:font script="Telu" typeface="Gautami"/>
+        <a:font script="Taml" typeface="Latha"/>
+        <a:font script="Syrc" typeface="Estrangelo Edessa"/>
+        <a:font script="Orya" typeface="Kalinga"/>
+        <a:font script="Mlym" typeface="Kartika"/>
+        <a:font script="Laoo" typeface="DokChampa"/>
+        <a:font script="Sinh" typeface="Iskoola Pota"/>
+        <a:font script="Mong" typeface="Mongolian Baiti"/>
+        <a:font script="Viet" typeface="Times New Roman"/>
+        <a:font script="Uigh" typeface="Microsoft Uighur"/>
+        <a:font script="Geor" typeface="Sylfaen"/>
+        <a:font script="Armn" typeface="Arial"/>
+        <a:font script="Bugi" typeface="Leelawadee UI"/>
+        <a:font script="Bopo" typeface="Microsoft JhengHei"/>
+        <a:font script="Java" typeface="Javanese Text"/>
+        <a:font script="Lisu" typeface="Segoe UI"/>
+        <a:font script="Mymr" typeface="Myanmar Text"/>
+        <a:font script="Nkoo" typeface="Ebrima"/>
+        <a:font script="Olck" typeface="Nirmala UI"/>
+        <a:font script="Osma" typeface="Ebrima"/>
+        <a:font script="Phag" typeface="Phagspa"/>
+        <a:font script="Syrn" typeface="Estrangelo Edessa"/>
+        <a:font script="Syrj" typeface="Estrangelo Edessa"/>
+        <a:font script="Syre" typeface="Estrangelo Edessa"/>
+        <a:font script="Sora" typeface="Nirmala UI"/>
+        <a:font script="Tale" typeface="Microsoft Tai Le"/>
+        <a:font script="Talu" typeface="Microsoft New Tai Lue"/>
+        <a:font script="Tfng" typeface="Ebrima"/>
+      </a:majorFont>
+      <a:minorFont>
+        <a:latin typeface="Aptos" panose="02110004020202020204"/>
+        <a:ea typeface=""/>
+        <a:cs typeface=""/>
+        <a:font script="Jpan" typeface="游ゴシック"/>
+        <a:font script="Hang" typeface="맑은 고딕"/>
+        <a:font script="Hans" typeface="等线"/>
+        <a:font script="Hant" typeface="新細明體"/>
+        <a:font script="Arab" typeface="Arial"/>
+        <a:font script="Hebr" typeface="Arial"/>
+        <a:font script="Thai" typeface="Cordia New"/>
+        <a:font script="Ethi" typeface="Nyala"/>
+        <a:font script="Beng" typeface="Vrinda"/>
+        <a:font script="Gujr" typeface="Shruti"/>
+        <a:font script="Khmr" typeface="DaunPenh"/>
+        <a:font script="Knda" typeface="Tunga"/>
+        <a:font script="Guru" typeface="Raavi"/>
+        <a:font script="Cans" typeface="Euphemia"/>
+        <a:font script="Cher" typeface="Plantagenet Cherokee"/>
+        <a:font script="Yiii" typeface="Microsoft Yi Baiti"/>
+        <a:font script="Tibt" typeface="Microsoft Himalaya"/>
+        <a:font script="Thaa" typeface="MV Boli"/>
+        <a:font script="Deva" typeface="Mangal"/>
+        <a:font script="Telu" typeface="Gautami"/>
+        <a:font script="Taml" typeface="Latha"/>
+        <a:font script="Syrc" typeface="Estrangelo Edessa"/>
+        <a:font script="Orya" typeface="Kalinga"/>
+        <a:font script="Mlym" typeface="Kartika"/>
+        <a:font script="Laoo" typeface="DokChampa"/>
+        <a:font script="Sinh" typeface="Iskoola Pota"/>
+        <a:font script="Mong" typeface="Mongolian Baiti"/>
+        <a:font script="Viet" typeface="Arial"/>
+        <a:font script="Uigh" typeface="Microsoft Uighur"/>
+        <a:font script="Geor" typeface="Sylfaen"/>
+        <a:font script="Armn" typeface="Arial"/>
+        <a:font script="Bugi" typeface="Leelawadee UI"/>
+        <a:font script="Bopo" typeface="Microsoft JhengHei"/>
+        <a:font script="Java" typeface="Javanese Text"/>
+        <a:font script="Lisu" typeface="Segoe UI"/>
+        <a:font script="Mymr" typeface="Myanmar Text"/>
+        <a:font script="Nkoo" typeface="Ebrima"/>
+        <a:font script="Olck" typeface="Nirmala UI"/>
+        <a:font script="Osma" typeface="Ebrima"/>
+        <a:font script="Phag" typeface="Phagspa"/>
+        <a:font script="Syrn" typeface="Estrangelo Edessa"/>
+        <a:font script="Syrj" typeface="Estrangelo Edessa"/>
+        <a:font script="Syre" typeface="Estrangelo Edessa"/>
+        <a:font script="Sora" typeface="Nirmala UI"/>
+        <a:font script="Tale" typeface="Microsoft Tai Le"/>
+        <a:font script="Talu" typeface="Microsoft New Tai Lue"/>
+        <a:font script="Tfng" typeface="Ebrima"/>
+      </a:minorFont>
+    </a:fontScheme>
+    <a:fmtScheme name="Office">
+      <a:fillStyleLst>
+        <a:solidFill>
+          <a:schemeClr val="phClr"/>
+        </a:solidFill>
+        <a:gradFill rotWithShape="1">
+          <a:gsLst>
+            <a:gs pos="0">
+              <a:schemeClr val="phClr">
+                <a:lumMod val="110000"/>
+                <a:satMod val="105000"/>
+                <a:tint val="67000"/>
+              </a:schemeClr>
+            </a:gs>
+            <a:gs pos="50000">
+              <a:schemeClr val="phClr">
+                <a:lumMod val="105000"/>
+                <a:satMod val="103000"/>
+                <a:tint val="73000"/>
+              </a:schemeClr>
+            </a:gs>
+            <a:gs pos="100000">
+              <a:schemeClr val="phClr">
+                <a:lumMod val="105000"/>
+                <a:satMod val="109000"/>
+                <a:tint val="81000"/>
+              </a:schemeClr>
+            </a:gs>
+          </a:gsLst>
+          <a:lin ang="5400000" scaled="0"/>
+        </a:gradFill>
+        <a:gradFill rotWithShape="1">
+          <a:gsLst>
+            <a:gs pos="0">
+              <a:schemeClr val="phClr">
+                <a:satMod val="103000"/>
+                <a:lumMod val="102000"/>
+                <a:tint val="94000"/>
+              </a:schemeClr>
+            </a:gs>
+            <a:gs pos="50000">
+              <a:schemeClr val="phClr">
+                <a:satMod val="110000"/>
+                <a:lumMod val="100000"/>
+                <a:shade val="100000"/>
+              </a:schemeClr>
+            </a:gs>
+            <a:gs pos="100000">
+              <a:schemeClr val="phClr">
+                <a:lumMod val="99000"/>
+                <a:satMod val="120000"/>
+                <a:shade val="78000"/>
+              </a:schemeClr>
+            </a:gs>
+          </a:gsLst>
+          <a:lin ang="5400000" scaled="0"/>
+        </a:gradFill>
+      </a:fillStyleLst>
+      <a:lnStyleLst>
+        <a:ln w="12700" cap="flat" cmpd="sng" algn="ctr">
+          <a:solidFill>
+            <a:schemeClr val="phClr"/>
+          </a:solidFill>
+          <a:prstDash val="solid"/>
+          <a:miter lim="800000"/>
+        </a:ln>
+        <a:ln w="19050" cap="flat" cmpd="sng" algn="ctr">
+          <a:solidFill>
+            <a:schemeClr val="phClr"/>
+          </a:solidFill>
+          <a:prstDash val="solid"/>
+          <a:miter lim="800000"/>
+        </a:ln>
+        <a:ln w="25400" cap="flat" cmpd="sng" algn="ctr">
+          <a:solidFill>
+            <a:schemeClr val="phClr"/>
+          </a:solidFill>
+          <a:prstDash val="solid"/>
+          <a:miter lim="800000"/>
+        </a:ln>
+      </a:lnStyleLst>
+      <a:effectStyleLst>
+        <a:effectStyle>
+          <a:effectLst/>
+        </a:effectStyle>
+        <a:effectStyle>
+          <a:effectLst/>
+        </a:effectStyle>
+        <a:effectStyle>
+          <a:effectLst>
+            <a:outerShdw blurRad="57150" dist="19050" dir="5400000" algn="ctr" rotWithShape="0">
+              <a:srgbClr val="000000">
+                <a:alpha val="63000"/>
+              </a:srgbClr>
+            </a:outerShdw>
+          </a:effectLst>
+        </a:effectStyle>
+      </a:effectStyleLst>
+      <a:bgFillStyleLst>
+        <a:solidFill>
+          <a:schemeClr val="phClr"/>
+        </a:solidFill>
+        <a:solidFill>
+          <a:schemeClr val="phClr">
+            <a:tint val="95000"/>
+            <a:satMod val="170000"/>
+          </a:schemeClr>
+        </a:solidFill>
+        <a:gradFill rotWithShape="1">
+          <a:gsLst>
+            <a:gs pos="0">
+              <a:schemeClr val="phClr">
+                <a:tint val="93000"/>
+                <a:satMod val="150000"/>
+                <a:shade val="98000"/>
+                <a:lumMod val="102000"/>
+              </a:schemeClr>
+            </a:gs>
+            <a:gs pos="50000">
+              <a:schemeClr val="phClr">
+                <a:tint val="98000"/>
+                <a:satMod val="130000"/>
+                <a:shade val="90000"/>
+                <a:lumMod val="103000"/>
+              </a:schemeClr>
+            </a:gs>
+            <a:gs pos="100000">
+              <a:schemeClr val="phClr">
+                <a:shade val="63000"/>
+                <a:satMod val="120000"/>
+              </a:schemeClr>
+            </a:gs>
+          </a:gsLst>
+          <a:lin ang="5400000" scaled="0"/>
+        </a:gradFill>
+      </a:bgFillStyleLst>
+    </a:fmtScheme>
+  </a:themeElements>
+  <a:objectDefaults>
+    <a:lnDef>
+      <a:spPr/>
+      <a:bodyPr/>
+      <a:lstStyle/>
+      <a:style>
+        <a:lnRef idx="2">
+          <a:schemeClr val="accent1"/>
+        </a:lnRef>
+        <a:fillRef idx="0">
+          <a:schemeClr val="accent1"/>
+        </a:fillRef>
+        <a:effectRef idx="1">
+          <a:schemeClr val="accent1"/>
+        </a:effectRef>
+        <a:fontRef idx="minor">
+          <a:schemeClr val="tx1"/>
+        </a:fontRef>
+      </a:style>
+    </a:lnDef>
+  </a:objectDefaults>
+  <a:extraClrSchemeLst/>
+  <a:extLst>
+    <a:ext uri="{05A4C25C-085E-4340-85A3-A5531E510DB2}">
+      <thm15:themeFamily xmlns:thm15="http://schemas.microsoft.com/office/thememl/2012/main" name="Office Theme" id="{2E142A2C-CD16-42D6-873A-C26D2A0506FA}" vid="{1BDDFF52-6CD6-40A5-AB3C-68EB2F1E4D0A}"/>
+    </a:ext>
+  </a:extLst>
+</a:theme>
 </file>